--- a/slides/CSC336-Lecture-28-Hooks-and-State-Management.pptx
+++ b/slides/CSC336-Lecture-28-Hooks-and-State-Management.pptx
@@ -3726,79 +3726,44 @@
       </p:sp>
       <p:sp>
         <p:nvSpPr>
-          <p:cNvPr id="6" name="Text 4"/>
-          <p:cNvSpPr txBox="1"/>
-          <p:nvPr/>
-        </p:nvSpPr>
-        <p:spPr>
-          <a:xfrm>
-            <a:off x="640080" y="6446520"/>
-            <a:ext cx="8686800" cy="292608"/>
-          </a:xfrm>
-          <a:prstGeom prst="rect">
-            <a:avLst/>
-          </a:prstGeom>
-          <a:noFill/>
-          <a:ln/>
-        </p:spPr>
-        <p:txBody>
-          <a:bodyPr wrap="square" lIns="0" tIns="0" rIns="0" bIns="0" rtlCol="0" anchor="ctr"/>
-          <a:lstStyle/>
-          <a:p>
-            <a:pPr algn="l" indent="0" marL="0">
-              <a:buNone/>
-            </a:pPr>
-            <a:r>
-              <a:rPr lang="en-US" sz="900" dirty="0">
-                <a:solidFill>
-                  <a:srgbClr val="9AA3D8"/>
-                </a:solidFill>
-                <a:latin typeface="Calibri" pitchFamily="34" charset="0"/>
-                <a:ea typeface="Calibri" pitchFamily="34" charset="-122"/>
-                <a:cs typeface="Calibri" pitchFamily="34" charset="-120"/>
-              </a:rPr>
-              <a:t>Usman Akram  •  COMSATS University Islamabad</a:t>
-            </a:r>
-            <a:endParaRPr lang="en-US" sz="900" dirty="0"/>
-          </a:p>
-        </p:txBody>
-      </p:sp>
-      <p:sp>
-        <p:nvSpPr>
-          <p:cNvPr id="7" name="Text 5"/>
-          <p:cNvSpPr txBox="1"/>
-          <p:nvPr/>
-        </p:nvSpPr>
-        <p:spPr>
-          <a:xfrm>
-            <a:off x="11155680" y="6446520"/>
-            <a:ext cx="457200" cy="292608"/>
-          </a:xfrm>
-          <a:prstGeom prst="rect">
-            <a:avLst/>
-          </a:prstGeom>
-          <a:noFill/>
-          <a:ln/>
-        </p:spPr>
-        <p:txBody>
-          <a:bodyPr wrap="square" lIns="0" tIns="0" rIns="0" bIns="0" rtlCol="0" anchor="ctr"/>
-          <a:lstStyle/>
-          <a:p>
-            <a:pPr algn="r" indent="0" marL="0">
-              <a:buNone/>
-            </a:pPr>
-            <a:r>
-              <a:rPr lang="en-US" sz="900" dirty="0">
-                <a:solidFill>
-                  <a:srgbClr val="9AA3D8"/>
-                </a:solidFill>
-                <a:latin typeface="Calibri" pitchFamily="34" charset="0"/>
-                <a:ea typeface="Calibri" pitchFamily="34" charset="-122"/>
-                <a:cs typeface="Calibri" pitchFamily="34" charset="-120"/>
-              </a:rPr>
-              <a:t>1</a:t>
-            </a:r>
-            <a:endParaRPr lang="en-US" sz="900" dirty="0"/>
+          <p:cNvPr id="8" name="cuinotes-footer-mark"/>
+          <p:cNvSpPr txBox="1"/>
+          <p:nvPr/>
+        </p:nvSpPr>
+        <p:spPr>
+          <a:xfrm>
+            <a:off x="9951720" y="6455664"/>
+            <a:ext cx="2011680" cy="292608"/>
+          </a:xfrm>
+          <a:prstGeom prst="rect">
+            <a:avLst/>
+          </a:prstGeom>
+          <a:noFill/>
+        </p:spPr>
+        <p:txBody>
+          <a:bodyPr wrap="none" lIns="0" rIns="0" tIns="0" bIns="0">
+            <a:spAutoFit/>
+          </a:bodyPr>
+          <a:lstStyle/>
+          <a:p>
+            <a:pPr algn="r"/>
+            <a:r>
+              <a:rPr sz="1000">
+                <a:solidFill>
+                  <a:srgbClr val="8A939B"/>
+                </a:solidFill>
+                <a:hlinkClick r:id="rId3"/>
+              </a:rPr>
+              <a:t>cuinotes.com</a:t>
+            </a:r>
+            <a:r>
+              <a:rPr sz="1000">
+                <a:solidFill>
+                  <a:srgbClr val="8A939B"/>
+                </a:solidFill>
+              </a:rPr>
+              <a:t>  ·  1</a:t>
+            </a:r>
           </a:p>
         </p:txBody>
       </p:sp>
@@ -3931,6 +3896,10 @@
           </a:solidFill>
           <a:ln/>
         </p:spPr>
+        <p:txBody>
+          <a:bodyPr/>
+          <a:p/>
+        </p:txBody>
       </p:sp>
       <p:sp>
         <p:nvSpPr>
@@ -4029,6 +3998,10 @@
           </a:solidFill>
           <a:ln/>
         </p:spPr>
+        <p:txBody>
+          <a:bodyPr/>
+          <a:p/>
+        </p:txBody>
       </p:sp>
       <p:sp>
         <p:nvSpPr>
@@ -4110,79 +4083,44 @@
       </p:sp>
       <p:sp>
         <p:nvSpPr>
-          <p:cNvPr id="10" name="Text 8"/>
-          <p:cNvSpPr txBox="1"/>
-          <p:nvPr/>
-        </p:nvSpPr>
-        <p:spPr>
-          <a:xfrm>
-            <a:off x="640080" y="6446520"/>
-            <a:ext cx="8686800" cy="292608"/>
-          </a:xfrm>
-          <a:prstGeom prst="rect">
-            <a:avLst/>
-          </a:prstGeom>
-          <a:noFill/>
-          <a:ln/>
-        </p:spPr>
-        <p:txBody>
-          <a:bodyPr wrap="square" lIns="0" tIns="0" rIns="0" bIns="0" rtlCol="0" anchor="ctr"/>
-          <a:lstStyle/>
-          <a:p>
-            <a:pPr algn="l" indent="0" marL="0">
-              <a:buNone/>
-            </a:pPr>
-            <a:r>
-              <a:rPr lang="en-US" sz="900" dirty="0">
-                <a:solidFill>
-                  <a:srgbClr val="5D5D72"/>
-                </a:solidFill>
-                <a:latin typeface="Calibri" pitchFamily="34" charset="0"/>
-                <a:ea typeface="Calibri" pitchFamily="34" charset="-122"/>
-                <a:cs typeface="Calibri" pitchFamily="34" charset="-120"/>
-              </a:rPr>
-              <a:t>Usman Akram  •  COMSATS University Islamabad</a:t>
-            </a:r>
-            <a:endParaRPr lang="en-US" sz="900" dirty="0"/>
-          </a:p>
-        </p:txBody>
-      </p:sp>
-      <p:sp>
-        <p:nvSpPr>
-          <p:cNvPr id="11" name="Text 9"/>
-          <p:cNvSpPr txBox="1"/>
-          <p:nvPr/>
-        </p:nvSpPr>
-        <p:spPr>
-          <a:xfrm>
-            <a:off x="11155680" y="6446520"/>
-            <a:ext cx="457200" cy="292608"/>
-          </a:xfrm>
-          <a:prstGeom prst="rect">
-            <a:avLst/>
-          </a:prstGeom>
-          <a:noFill/>
-          <a:ln/>
-        </p:spPr>
-        <p:txBody>
-          <a:bodyPr wrap="square" lIns="0" tIns="0" rIns="0" bIns="0" rtlCol="0" anchor="ctr"/>
-          <a:lstStyle/>
-          <a:p>
-            <a:pPr algn="r" indent="0" marL="0">
-              <a:buNone/>
-            </a:pPr>
-            <a:r>
-              <a:rPr lang="en-US" sz="900" dirty="0">
-                <a:solidFill>
-                  <a:srgbClr val="5D5D72"/>
-                </a:solidFill>
-                <a:latin typeface="Calibri" pitchFamily="34" charset="0"/>
-                <a:ea typeface="Calibri" pitchFamily="34" charset="-122"/>
-                <a:cs typeface="Calibri" pitchFamily="34" charset="-120"/>
-              </a:rPr>
-              <a:t>10</a:t>
-            </a:r>
-            <a:endParaRPr lang="en-US" sz="900" dirty="0"/>
+          <p:cNvPr id="12" name="cuinotes-footer-mark"/>
+          <p:cNvSpPr txBox="1"/>
+          <p:nvPr/>
+        </p:nvSpPr>
+        <p:spPr>
+          <a:xfrm>
+            <a:off x="9951720" y="6455664"/>
+            <a:ext cx="2011680" cy="292608"/>
+          </a:xfrm>
+          <a:prstGeom prst="rect">
+            <a:avLst/>
+          </a:prstGeom>
+          <a:noFill/>
+        </p:spPr>
+        <p:txBody>
+          <a:bodyPr wrap="none" lIns="0" rIns="0" tIns="0" bIns="0">
+            <a:spAutoFit/>
+          </a:bodyPr>
+          <a:lstStyle/>
+          <a:p>
+            <a:pPr algn="r"/>
+            <a:r>
+              <a:rPr sz="1000">
+                <a:solidFill>
+                  <a:srgbClr val="8A939B"/>
+                </a:solidFill>
+                <a:hlinkClick r:id="rId3"/>
+              </a:rPr>
+              <a:t>cuinotes.com</a:t>
+            </a:r>
+            <a:r>
+              <a:rPr sz="1000">
+                <a:solidFill>
+                  <a:srgbClr val="8A939B"/>
+                </a:solidFill>
+              </a:rPr>
+              <a:t>  ·  10</a:t>
+            </a:r>
           </a:p>
         </p:txBody>
       </p:sp>
@@ -4317,6 +4255,10 @@
           </a:solidFill>
           <a:ln/>
         </p:spPr>
+        <p:txBody>
+          <a:bodyPr/>
+          <a:p/>
+        </p:txBody>
       </p:sp>
       <p:sp>
         <p:nvSpPr>
@@ -4682,79 +4624,44 @@
       </p:sp>
       <p:sp>
         <p:nvSpPr>
-          <p:cNvPr id="6" name="Text 4"/>
-          <p:cNvSpPr txBox="1"/>
-          <p:nvPr/>
-        </p:nvSpPr>
-        <p:spPr>
-          <a:xfrm>
-            <a:off x="640080" y="6446520"/>
-            <a:ext cx="8686800" cy="292608"/>
-          </a:xfrm>
-          <a:prstGeom prst="rect">
-            <a:avLst/>
-          </a:prstGeom>
-          <a:noFill/>
-          <a:ln/>
-        </p:spPr>
-        <p:txBody>
-          <a:bodyPr wrap="square" lIns="0" tIns="0" rIns="0" bIns="0" rtlCol="0" anchor="ctr"/>
-          <a:lstStyle/>
-          <a:p>
-            <a:pPr algn="l" indent="0" marL="0">
-              <a:buNone/>
-            </a:pPr>
-            <a:r>
-              <a:rPr lang="en-US" sz="900" dirty="0">
-                <a:solidFill>
-                  <a:srgbClr val="5D5D72"/>
-                </a:solidFill>
-                <a:latin typeface="Calibri" pitchFamily="34" charset="0"/>
-                <a:ea typeface="Calibri" pitchFamily="34" charset="-122"/>
-                <a:cs typeface="Calibri" pitchFamily="34" charset="-120"/>
-              </a:rPr>
-              <a:t>Usman Akram  •  COMSATS University Islamabad</a:t>
-            </a:r>
-            <a:endParaRPr lang="en-US" sz="900" dirty="0"/>
-          </a:p>
-        </p:txBody>
-      </p:sp>
-      <p:sp>
-        <p:nvSpPr>
-          <p:cNvPr id="7" name="Text 5"/>
-          <p:cNvSpPr txBox="1"/>
-          <p:nvPr/>
-        </p:nvSpPr>
-        <p:spPr>
-          <a:xfrm>
-            <a:off x="11155680" y="6446520"/>
-            <a:ext cx="457200" cy="292608"/>
-          </a:xfrm>
-          <a:prstGeom prst="rect">
-            <a:avLst/>
-          </a:prstGeom>
-          <a:noFill/>
-          <a:ln/>
-        </p:spPr>
-        <p:txBody>
-          <a:bodyPr wrap="square" lIns="0" tIns="0" rIns="0" bIns="0" rtlCol="0" anchor="ctr"/>
-          <a:lstStyle/>
-          <a:p>
-            <a:pPr algn="r" indent="0" marL="0">
-              <a:buNone/>
-            </a:pPr>
-            <a:r>
-              <a:rPr lang="en-US" sz="900" dirty="0">
-                <a:solidFill>
-                  <a:srgbClr val="5D5D72"/>
-                </a:solidFill>
-                <a:latin typeface="Calibri" pitchFamily="34" charset="0"/>
-                <a:ea typeface="Calibri" pitchFamily="34" charset="-122"/>
-                <a:cs typeface="Calibri" pitchFamily="34" charset="-120"/>
-              </a:rPr>
-              <a:t>11</a:t>
-            </a:r>
-            <a:endParaRPr lang="en-US" sz="900" dirty="0"/>
+          <p:cNvPr id="8" name="cuinotes-footer-mark"/>
+          <p:cNvSpPr txBox="1"/>
+          <p:nvPr/>
+        </p:nvSpPr>
+        <p:spPr>
+          <a:xfrm>
+            <a:off x="9951720" y="6455664"/>
+            <a:ext cx="2011680" cy="292608"/>
+          </a:xfrm>
+          <a:prstGeom prst="rect">
+            <a:avLst/>
+          </a:prstGeom>
+          <a:noFill/>
+        </p:spPr>
+        <p:txBody>
+          <a:bodyPr wrap="none" lIns="0" rIns="0" tIns="0" bIns="0">
+            <a:spAutoFit/>
+          </a:bodyPr>
+          <a:lstStyle/>
+          <a:p>
+            <a:pPr algn="r"/>
+            <a:r>
+              <a:rPr sz="1000">
+                <a:solidFill>
+                  <a:srgbClr val="8A939B"/>
+                </a:solidFill>
+                <a:hlinkClick r:id="rId3"/>
+              </a:rPr>
+              <a:t>cuinotes.com</a:t>
+            </a:r>
+            <a:r>
+              <a:rPr sz="1000">
+                <a:solidFill>
+                  <a:srgbClr val="8A939B"/>
+                </a:solidFill>
+              </a:rPr>
+              <a:t>  ·  11</a:t>
+            </a:r>
           </a:p>
         </p:txBody>
       </p:sp>
@@ -5452,79 +5359,44 @@
       </p:graphicFrame>
       <p:sp>
         <p:nvSpPr>
-          <p:cNvPr id="5" name="Text 2"/>
-          <p:cNvSpPr txBox="1"/>
-          <p:nvPr/>
-        </p:nvSpPr>
-        <p:spPr>
-          <a:xfrm>
-            <a:off x="640080" y="6446520"/>
-            <a:ext cx="8686800" cy="292608"/>
-          </a:xfrm>
-          <a:prstGeom prst="rect">
-            <a:avLst/>
-          </a:prstGeom>
-          <a:noFill/>
-          <a:ln/>
-        </p:spPr>
-        <p:txBody>
-          <a:bodyPr wrap="square" lIns="0" tIns="0" rIns="0" bIns="0" rtlCol="0" anchor="ctr"/>
-          <a:lstStyle/>
-          <a:p>
-            <a:pPr algn="l" indent="0" marL="0">
-              <a:buNone/>
-            </a:pPr>
-            <a:r>
-              <a:rPr lang="en-US" sz="900" dirty="0">
-                <a:solidFill>
-                  <a:srgbClr val="5D5D72"/>
-                </a:solidFill>
-                <a:latin typeface="Calibri" pitchFamily="34" charset="0"/>
-                <a:ea typeface="Calibri" pitchFamily="34" charset="-122"/>
-                <a:cs typeface="Calibri" pitchFamily="34" charset="-120"/>
-              </a:rPr>
-              <a:t>Usman Akram  •  COMSATS University Islamabad</a:t>
-            </a:r>
-            <a:endParaRPr lang="en-US" sz="900" dirty="0"/>
-          </a:p>
-        </p:txBody>
-      </p:sp>
-      <p:sp>
-        <p:nvSpPr>
-          <p:cNvPr id="6" name="Text 3"/>
-          <p:cNvSpPr txBox="1"/>
-          <p:nvPr/>
-        </p:nvSpPr>
-        <p:spPr>
-          <a:xfrm>
-            <a:off x="11155680" y="6446520"/>
-            <a:ext cx="457200" cy="292608"/>
-          </a:xfrm>
-          <a:prstGeom prst="rect">
-            <a:avLst/>
-          </a:prstGeom>
-          <a:noFill/>
-          <a:ln/>
-        </p:spPr>
-        <p:txBody>
-          <a:bodyPr wrap="square" lIns="0" tIns="0" rIns="0" bIns="0" rtlCol="0" anchor="ctr"/>
-          <a:lstStyle/>
-          <a:p>
-            <a:pPr algn="r" indent="0" marL="0">
-              <a:buNone/>
-            </a:pPr>
-            <a:r>
-              <a:rPr lang="en-US" sz="900" dirty="0">
-                <a:solidFill>
-                  <a:srgbClr val="5D5D72"/>
-                </a:solidFill>
-                <a:latin typeface="Calibri" pitchFamily="34" charset="0"/>
-                <a:ea typeface="Calibri" pitchFamily="34" charset="-122"/>
-                <a:cs typeface="Calibri" pitchFamily="34" charset="-120"/>
-              </a:rPr>
-              <a:t>12</a:t>
-            </a:r>
-            <a:endParaRPr lang="en-US" sz="900" dirty="0"/>
+          <p:cNvPr id="14" name="cuinotes-footer-mark"/>
+          <p:cNvSpPr txBox="1"/>
+          <p:nvPr/>
+        </p:nvSpPr>
+        <p:spPr>
+          <a:xfrm>
+            <a:off x="9951720" y="6455664"/>
+            <a:ext cx="2011680" cy="292608"/>
+          </a:xfrm>
+          <a:prstGeom prst="rect">
+            <a:avLst/>
+          </a:prstGeom>
+          <a:noFill/>
+        </p:spPr>
+        <p:txBody>
+          <a:bodyPr wrap="none" lIns="0" rIns="0" tIns="0" bIns="0">
+            <a:spAutoFit/>
+          </a:bodyPr>
+          <a:lstStyle/>
+          <a:p>
+            <a:pPr algn="r"/>
+            <a:r>
+              <a:rPr sz="1000">
+                <a:solidFill>
+                  <a:srgbClr val="8A939B"/>
+                </a:solidFill>
+                <a:hlinkClick r:id="rId3"/>
+              </a:rPr>
+              <a:t>cuinotes.com</a:t>
+            </a:r>
+            <a:r>
+              <a:rPr sz="1000">
+                <a:solidFill>
+                  <a:srgbClr val="8A939B"/>
+                </a:solidFill>
+              </a:rPr>
+              <a:t>  ·  12</a:t>
+            </a:r>
           </a:p>
         </p:txBody>
       </p:sp>
@@ -5664,6 +5536,10 @@
             <a:prstDash val="solid"/>
           </a:ln>
         </p:spPr>
+        <p:txBody>
+          <a:bodyPr/>
+          <a:p/>
+        </p:txBody>
       </p:sp>
       <p:sp>
         <p:nvSpPr>
@@ -5745,79 +5621,44 @@
       </p:sp>
       <p:sp>
         <p:nvSpPr>
-          <p:cNvPr id="7" name="Text 5"/>
-          <p:cNvSpPr txBox="1"/>
-          <p:nvPr/>
-        </p:nvSpPr>
-        <p:spPr>
-          <a:xfrm>
-            <a:off x="640080" y="6446520"/>
-            <a:ext cx="8686800" cy="292608"/>
-          </a:xfrm>
-          <a:prstGeom prst="rect">
-            <a:avLst/>
-          </a:prstGeom>
-          <a:noFill/>
-          <a:ln/>
-        </p:spPr>
-        <p:txBody>
-          <a:bodyPr wrap="square" lIns="0" tIns="0" rIns="0" bIns="0" rtlCol="0" anchor="ctr"/>
-          <a:lstStyle/>
-          <a:p>
-            <a:pPr algn="l" indent="0" marL="0">
-              <a:buNone/>
-            </a:pPr>
-            <a:r>
-              <a:rPr lang="en-US" sz="900" dirty="0">
-                <a:solidFill>
-                  <a:srgbClr val="5D5D72"/>
-                </a:solidFill>
-                <a:latin typeface="Calibri" pitchFamily="34" charset="0"/>
-                <a:ea typeface="Calibri" pitchFamily="34" charset="-122"/>
-                <a:cs typeface="Calibri" pitchFamily="34" charset="-120"/>
-              </a:rPr>
-              <a:t>Usman Akram  •  COMSATS University Islamabad</a:t>
-            </a:r>
-            <a:endParaRPr lang="en-US" sz="900" dirty="0"/>
-          </a:p>
-        </p:txBody>
-      </p:sp>
-      <p:sp>
-        <p:nvSpPr>
-          <p:cNvPr id="8" name="Text 6"/>
-          <p:cNvSpPr txBox="1"/>
-          <p:nvPr/>
-        </p:nvSpPr>
-        <p:spPr>
-          <a:xfrm>
-            <a:off x="11155680" y="6446520"/>
-            <a:ext cx="457200" cy="292608"/>
-          </a:xfrm>
-          <a:prstGeom prst="rect">
-            <a:avLst/>
-          </a:prstGeom>
-          <a:noFill/>
-          <a:ln/>
-        </p:spPr>
-        <p:txBody>
-          <a:bodyPr wrap="square" lIns="0" tIns="0" rIns="0" bIns="0" rtlCol="0" anchor="ctr"/>
-          <a:lstStyle/>
-          <a:p>
-            <a:pPr algn="r" indent="0" marL="0">
-              <a:buNone/>
-            </a:pPr>
-            <a:r>
-              <a:rPr lang="en-US" sz="900" dirty="0">
-                <a:solidFill>
-                  <a:srgbClr val="5D5D72"/>
-                </a:solidFill>
-                <a:latin typeface="Calibri" pitchFamily="34" charset="0"/>
-                <a:ea typeface="Calibri" pitchFamily="34" charset="-122"/>
-                <a:cs typeface="Calibri" pitchFamily="34" charset="-120"/>
-              </a:rPr>
-              <a:t>13</a:t>
-            </a:r>
-            <a:endParaRPr lang="en-US" sz="900" dirty="0"/>
+          <p:cNvPr id="9" name="cuinotes-footer-mark"/>
+          <p:cNvSpPr txBox="1"/>
+          <p:nvPr/>
+        </p:nvSpPr>
+        <p:spPr>
+          <a:xfrm>
+            <a:off x="9951720" y="6455664"/>
+            <a:ext cx="2011680" cy="292608"/>
+          </a:xfrm>
+          <a:prstGeom prst="rect">
+            <a:avLst/>
+          </a:prstGeom>
+          <a:noFill/>
+        </p:spPr>
+        <p:txBody>
+          <a:bodyPr wrap="none" lIns="0" rIns="0" tIns="0" bIns="0">
+            <a:spAutoFit/>
+          </a:bodyPr>
+          <a:lstStyle/>
+          <a:p>
+            <a:pPr algn="r"/>
+            <a:r>
+              <a:rPr sz="1000">
+                <a:solidFill>
+                  <a:srgbClr val="8A939B"/>
+                </a:solidFill>
+                <a:hlinkClick r:id="rId3"/>
+              </a:rPr>
+              <a:t>cuinotes.com</a:t>
+            </a:r>
+            <a:r>
+              <a:rPr sz="1000">
+                <a:solidFill>
+                  <a:srgbClr val="8A939B"/>
+                </a:solidFill>
+              </a:rPr>
+              <a:t>  ·  13</a:t>
+            </a:r>
           </a:p>
         </p:txBody>
       </p:sp>
@@ -5950,6 +5791,10 @@
           </a:solidFill>
           <a:ln/>
         </p:spPr>
+        <p:txBody>
+          <a:bodyPr/>
+          <a:p/>
+        </p:txBody>
       </p:sp>
       <p:sp>
         <p:nvSpPr>
@@ -6048,6 +5893,10 @@
           </a:solidFill>
           <a:ln/>
         </p:spPr>
+        <p:txBody>
+          <a:bodyPr/>
+          <a:p/>
+        </p:txBody>
       </p:sp>
       <p:sp>
         <p:nvSpPr>
@@ -6146,6 +5995,10 @@
           </a:solidFill>
           <a:ln/>
         </p:spPr>
+        <p:txBody>
+          <a:bodyPr/>
+          <a:p/>
+        </p:txBody>
       </p:sp>
       <p:sp>
         <p:nvSpPr>
@@ -6227,79 +6080,44 @@
       </p:sp>
       <p:sp>
         <p:nvSpPr>
-          <p:cNvPr id="13" name="Text 11"/>
-          <p:cNvSpPr txBox="1"/>
-          <p:nvPr/>
-        </p:nvSpPr>
-        <p:spPr>
-          <a:xfrm>
-            <a:off x="640080" y="6446520"/>
-            <a:ext cx="8686800" cy="292608"/>
-          </a:xfrm>
-          <a:prstGeom prst="rect">
-            <a:avLst/>
-          </a:prstGeom>
-          <a:noFill/>
-          <a:ln/>
-        </p:spPr>
-        <p:txBody>
-          <a:bodyPr wrap="square" lIns="0" tIns="0" rIns="0" bIns="0" rtlCol="0" anchor="ctr"/>
-          <a:lstStyle/>
-          <a:p>
-            <a:pPr algn="l" indent="0" marL="0">
-              <a:buNone/>
-            </a:pPr>
-            <a:r>
-              <a:rPr lang="en-US" sz="900" dirty="0">
-                <a:solidFill>
-                  <a:srgbClr val="5D5D72"/>
-                </a:solidFill>
-                <a:latin typeface="Calibri" pitchFamily="34" charset="0"/>
-                <a:ea typeface="Calibri" pitchFamily="34" charset="-122"/>
-                <a:cs typeface="Calibri" pitchFamily="34" charset="-120"/>
-              </a:rPr>
-              <a:t>Usman Akram  •  COMSATS University Islamabad</a:t>
-            </a:r>
-            <a:endParaRPr lang="en-US" sz="900" dirty="0"/>
-          </a:p>
-        </p:txBody>
-      </p:sp>
-      <p:sp>
-        <p:nvSpPr>
-          <p:cNvPr id="14" name="Text 12"/>
-          <p:cNvSpPr txBox="1"/>
-          <p:nvPr/>
-        </p:nvSpPr>
-        <p:spPr>
-          <a:xfrm>
-            <a:off x="11155680" y="6446520"/>
-            <a:ext cx="457200" cy="292608"/>
-          </a:xfrm>
-          <a:prstGeom prst="rect">
-            <a:avLst/>
-          </a:prstGeom>
-          <a:noFill/>
-          <a:ln/>
-        </p:spPr>
-        <p:txBody>
-          <a:bodyPr wrap="square" lIns="0" tIns="0" rIns="0" bIns="0" rtlCol="0" anchor="ctr"/>
-          <a:lstStyle/>
-          <a:p>
-            <a:pPr algn="r" indent="0" marL="0">
-              <a:buNone/>
-            </a:pPr>
-            <a:r>
-              <a:rPr lang="en-US" sz="900" dirty="0">
-                <a:solidFill>
-                  <a:srgbClr val="5D5D72"/>
-                </a:solidFill>
-                <a:latin typeface="Calibri" pitchFamily="34" charset="0"/>
-                <a:ea typeface="Calibri" pitchFamily="34" charset="-122"/>
-                <a:cs typeface="Calibri" pitchFamily="34" charset="-120"/>
-              </a:rPr>
-              <a:t>14</a:t>
-            </a:r>
-            <a:endParaRPr lang="en-US" sz="900" dirty="0"/>
+          <p:cNvPr id="15" name="cuinotes-footer-mark"/>
+          <p:cNvSpPr txBox="1"/>
+          <p:nvPr/>
+        </p:nvSpPr>
+        <p:spPr>
+          <a:xfrm>
+            <a:off x="9951720" y="6455664"/>
+            <a:ext cx="2011680" cy="292608"/>
+          </a:xfrm>
+          <a:prstGeom prst="rect">
+            <a:avLst/>
+          </a:prstGeom>
+          <a:noFill/>
+        </p:spPr>
+        <p:txBody>
+          <a:bodyPr wrap="none" lIns="0" rIns="0" tIns="0" bIns="0">
+            <a:spAutoFit/>
+          </a:bodyPr>
+          <a:lstStyle/>
+          <a:p>
+            <a:pPr algn="r"/>
+            <a:r>
+              <a:rPr sz="1000">
+                <a:solidFill>
+                  <a:srgbClr val="8A939B"/>
+                </a:solidFill>
+                <a:hlinkClick r:id="rId3"/>
+              </a:rPr>
+              <a:t>cuinotes.com</a:t>
+            </a:r>
+            <a:r>
+              <a:rPr sz="1000">
+                <a:solidFill>
+                  <a:srgbClr val="8A939B"/>
+                </a:solidFill>
+              </a:rPr>
+              <a:t>  ·  14</a:t>
+            </a:r>
           </a:p>
         </p:txBody>
       </p:sp>
@@ -6434,6 +6252,10 @@
           </a:solidFill>
           <a:ln/>
         </p:spPr>
+        <p:txBody>
+          <a:bodyPr/>
+          <a:p/>
+        </p:txBody>
       </p:sp>
       <p:sp>
         <p:nvSpPr>
@@ -6679,79 +6501,44 @@
       </p:sp>
       <p:sp>
         <p:nvSpPr>
-          <p:cNvPr id="6" name="Text 4"/>
-          <p:cNvSpPr txBox="1"/>
-          <p:nvPr/>
-        </p:nvSpPr>
-        <p:spPr>
-          <a:xfrm>
-            <a:off x="640080" y="6446520"/>
-            <a:ext cx="8686800" cy="292608"/>
-          </a:xfrm>
-          <a:prstGeom prst="rect">
-            <a:avLst/>
-          </a:prstGeom>
-          <a:noFill/>
-          <a:ln/>
-        </p:spPr>
-        <p:txBody>
-          <a:bodyPr wrap="square" lIns="0" tIns="0" rIns="0" bIns="0" rtlCol="0" anchor="ctr"/>
-          <a:lstStyle/>
-          <a:p>
-            <a:pPr algn="l" indent="0" marL="0">
-              <a:buNone/>
-            </a:pPr>
-            <a:r>
-              <a:rPr lang="en-US" sz="900" dirty="0">
-                <a:solidFill>
-                  <a:srgbClr val="5D5D72"/>
-                </a:solidFill>
-                <a:latin typeface="Calibri" pitchFamily="34" charset="0"/>
-                <a:ea typeface="Calibri" pitchFamily="34" charset="-122"/>
-                <a:cs typeface="Calibri" pitchFamily="34" charset="-120"/>
-              </a:rPr>
-              <a:t>Usman Akram  •  COMSATS University Islamabad</a:t>
-            </a:r>
-            <a:endParaRPr lang="en-US" sz="900" dirty="0"/>
-          </a:p>
-        </p:txBody>
-      </p:sp>
-      <p:sp>
-        <p:nvSpPr>
-          <p:cNvPr id="7" name="Text 5"/>
-          <p:cNvSpPr txBox="1"/>
-          <p:nvPr/>
-        </p:nvSpPr>
-        <p:spPr>
-          <a:xfrm>
-            <a:off x="11155680" y="6446520"/>
-            <a:ext cx="457200" cy="292608"/>
-          </a:xfrm>
-          <a:prstGeom prst="rect">
-            <a:avLst/>
-          </a:prstGeom>
-          <a:noFill/>
-          <a:ln/>
-        </p:spPr>
-        <p:txBody>
-          <a:bodyPr wrap="square" lIns="0" tIns="0" rIns="0" bIns="0" rtlCol="0" anchor="ctr"/>
-          <a:lstStyle/>
-          <a:p>
-            <a:pPr algn="r" indent="0" marL="0">
-              <a:buNone/>
-            </a:pPr>
-            <a:r>
-              <a:rPr lang="en-US" sz="900" dirty="0">
-                <a:solidFill>
-                  <a:srgbClr val="5D5D72"/>
-                </a:solidFill>
-                <a:latin typeface="Calibri" pitchFamily="34" charset="0"/>
-                <a:ea typeface="Calibri" pitchFamily="34" charset="-122"/>
-                <a:cs typeface="Calibri" pitchFamily="34" charset="-120"/>
-              </a:rPr>
-              <a:t>15</a:t>
-            </a:r>
-            <a:endParaRPr lang="en-US" sz="900" dirty="0"/>
+          <p:cNvPr id="8" name="cuinotes-footer-mark"/>
+          <p:cNvSpPr txBox="1"/>
+          <p:nvPr/>
+        </p:nvSpPr>
+        <p:spPr>
+          <a:xfrm>
+            <a:off x="9951720" y="6455664"/>
+            <a:ext cx="2011680" cy="292608"/>
+          </a:xfrm>
+          <a:prstGeom prst="rect">
+            <a:avLst/>
+          </a:prstGeom>
+          <a:noFill/>
+        </p:spPr>
+        <p:txBody>
+          <a:bodyPr wrap="none" lIns="0" rIns="0" tIns="0" bIns="0">
+            <a:spAutoFit/>
+          </a:bodyPr>
+          <a:lstStyle/>
+          <a:p>
+            <a:pPr algn="r"/>
+            <a:r>
+              <a:rPr sz="1000">
+                <a:solidFill>
+                  <a:srgbClr val="8A939B"/>
+                </a:solidFill>
+                <a:hlinkClick r:id="rId3"/>
+              </a:rPr>
+              <a:t>cuinotes.com</a:t>
+            </a:r>
+            <a:r>
+              <a:rPr sz="1000">
+                <a:solidFill>
+                  <a:srgbClr val="8A939B"/>
+                </a:solidFill>
+              </a:rPr>
+              <a:t>  ·  15</a:t>
+            </a:r>
           </a:p>
         </p:txBody>
       </p:sp>
@@ -6888,6 +6675,10 @@
             <a:tailEnd type="triangle"/>
           </a:ln>
         </p:spPr>
+        <p:txBody>
+          <a:bodyPr/>
+          <a:p/>
+        </p:txBody>
       </p:sp>
       <p:sp>
         <p:nvSpPr>
@@ -6912,6 +6703,10 @@
             <a:tailEnd type="triangle"/>
           </a:ln>
         </p:spPr>
+        <p:txBody>
+          <a:bodyPr/>
+          <a:p/>
+        </p:txBody>
       </p:sp>
       <p:sp>
         <p:nvSpPr>
@@ -6936,6 +6731,10 @@
             <a:tailEnd type="triangle"/>
           </a:ln>
         </p:spPr>
+        <p:txBody>
+          <a:bodyPr/>
+          <a:p/>
+        </p:txBody>
       </p:sp>
       <p:sp>
         <p:nvSpPr>
@@ -7001,6 +6800,10 @@
             <a:tailEnd type="triangle"/>
           </a:ln>
         </p:spPr>
+        <p:txBody>
+          <a:bodyPr/>
+          <a:p/>
+        </p:txBody>
       </p:sp>
       <p:sp>
         <p:nvSpPr>
@@ -7066,6 +6869,10 @@
             <a:tailEnd type="triangle"/>
           </a:ln>
         </p:spPr>
+        <p:txBody>
+          <a:bodyPr/>
+          <a:p/>
+        </p:txBody>
       </p:sp>
       <p:sp>
         <p:nvSpPr>
@@ -7127,6 +6934,10 @@
           </a:solidFill>
           <a:ln/>
         </p:spPr>
+        <p:txBody>
+          <a:bodyPr/>
+          <a:p/>
+        </p:txBody>
       </p:sp>
       <p:sp>
         <p:nvSpPr>
@@ -7209,6 +7020,10 @@
           </a:solidFill>
           <a:ln/>
         </p:spPr>
+        <p:txBody>
+          <a:bodyPr/>
+          <a:p/>
+        </p:txBody>
       </p:sp>
       <p:sp>
         <p:nvSpPr>
@@ -7291,6 +7106,10 @@
           </a:solidFill>
           <a:ln/>
         </p:spPr>
+        <p:txBody>
+          <a:bodyPr/>
+          <a:p/>
+        </p:txBody>
       </p:sp>
       <p:sp>
         <p:nvSpPr>
@@ -7373,6 +7192,10 @@
           </a:solidFill>
           <a:ln/>
         </p:spPr>
+        <p:txBody>
+          <a:bodyPr/>
+          <a:p/>
+        </p:txBody>
       </p:sp>
       <p:sp>
         <p:nvSpPr>
@@ -7455,6 +7278,10 @@
           </a:solidFill>
           <a:ln/>
         </p:spPr>
+        <p:txBody>
+          <a:bodyPr/>
+          <a:p/>
+        </p:txBody>
       </p:sp>
       <p:sp>
         <p:nvSpPr>
@@ -7559,79 +7386,44 @@
       </p:sp>
       <p:sp>
         <p:nvSpPr>
-          <p:cNvPr id="23" name="Text 21"/>
-          <p:cNvSpPr txBox="1"/>
-          <p:nvPr/>
-        </p:nvSpPr>
-        <p:spPr>
-          <a:xfrm>
-            <a:off x="640080" y="6446520"/>
-            <a:ext cx="8686800" cy="292608"/>
-          </a:xfrm>
-          <a:prstGeom prst="rect">
-            <a:avLst/>
-          </a:prstGeom>
-          <a:noFill/>
-          <a:ln/>
-        </p:spPr>
-        <p:txBody>
-          <a:bodyPr wrap="square" lIns="0" tIns="0" rIns="0" bIns="0" rtlCol="0" anchor="ctr"/>
-          <a:lstStyle/>
-          <a:p>
-            <a:pPr algn="l" indent="0" marL="0">
-              <a:buNone/>
-            </a:pPr>
-            <a:r>
-              <a:rPr lang="en-US" sz="900" dirty="0">
-                <a:solidFill>
-                  <a:srgbClr val="5D5D72"/>
-                </a:solidFill>
-                <a:latin typeface="Calibri" pitchFamily="34" charset="0"/>
-                <a:ea typeface="Calibri" pitchFamily="34" charset="-122"/>
-                <a:cs typeface="Calibri" pitchFamily="34" charset="-120"/>
-              </a:rPr>
-              <a:t>Usman Akram  •  COMSATS University Islamabad</a:t>
-            </a:r>
-            <a:endParaRPr lang="en-US" sz="900" dirty="0"/>
-          </a:p>
-        </p:txBody>
-      </p:sp>
-      <p:sp>
-        <p:nvSpPr>
-          <p:cNvPr id="24" name="Text 22"/>
-          <p:cNvSpPr txBox="1"/>
-          <p:nvPr/>
-        </p:nvSpPr>
-        <p:spPr>
-          <a:xfrm>
-            <a:off x="11155680" y="6446520"/>
-            <a:ext cx="457200" cy="292608"/>
-          </a:xfrm>
-          <a:prstGeom prst="rect">
-            <a:avLst/>
-          </a:prstGeom>
-          <a:noFill/>
-          <a:ln/>
-        </p:spPr>
-        <p:txBody>
-          <a:bodyPr wrap="square" lIns="0" tIns="0" rIns="0" bIns="0" rtlCol="0" anchor="ctr"/>
-          <a:lstStyle/>
-          <a:p>
-            <a:pPr algn="r" indent="0" marL="0">
-              <a:buNone/>
-            </a:pPr>
-            <a:r>
-              <a:rPr lang="en-US" sz="900" dirty="0">
-                <a:solidFill>
-                  <a:srgbClr val="5D5D72"/>
-                </a:solidFill>
-                <a:latin typeface="Calibri" pitchFamily="34" charset="0"/>
-                <a:ea typeface="Calibri" pitchFamily="34" charset="-122"/>
-                <a:cs typeface="Calibri" pitchFamily="34" charset="-120"/>
-              </a:rPr>
-              <a:t>16</a:t>
-            </a:r>
-            <a:endParaRPr lang="en-US" sz="900" dirty="0"/>
+          <p:cNvPr id="25" name="cuinotes-footer-mark"/>
+          <p:cNvSpPr txBox="1"/>
+          <p:nvPr/>
+        </p:nvSpPr>
+        <p:spPr>
+          <a:xfrm>
+            <a:off x="9951720" y="6455664"/>
+            <a:ext cx="2011680" cy="292608"/>
+          </a:xfrm>
+          <a:prstGeom prst="rect">
+            <a:avLst/>
+          </a:prstGeom>
+          <a:noFill/>
+        </p:spPr>
+        <p:txBody>
+          <a:bodyPr wrap="none" lIns="0" rIns="0" tIns="0" bIns="0">
+            <a:spAutoFit/>
+          </a:bodyPr>
+          <a:lstStyle/>
+          <a:p>
+            <a:pPr algn="r"/>
+            <a:r>
+              <a:rPr sz="1000">
+                <a:solidFill>
+                  <a:srgbClr val="8A939B"/>
+                </a:solidFill>
+                <a:hlinkClick r:id="rId3"/>
+              </a:rPr>
+              <a:t>cuinotes.com</a:t>
+            </a:r>
+            <a:r>
+              <a:rPr sz="1000">
+                <a:solidFill>
+                  <a:srgbClr val="8A939B"/>
+                </a:solidFill>
+              </a:rPr>
+              <a:t>  ·  16</a:t>
+            </a:r>
           </a:p>
         </p:txBody>
       </p:sp>
@@ -7764,6 +7556,10 @@
           </a:solidFill>
           <a:ln/>
         </p:spPr>
+        <p:txBody>
+          <a:bodyPr/>
+          <a:p/>
+        </p:txBody>
       </p:sp>
       <p:sp>
         <p:nvSpPr>
@@ -7862,6 +7658,10 @@
           </a:solidFill>
           <a:ln/>
         </p:spPr>
+        <p:txBody>
+          <a:bodyPr/>
+          <a:p/>
+        </p:txBody>
       </p:sp>
       <p:sp>
         <p:nvSpPr>
@@ -7960,6 +7760,10 @@
           </a:solidFill>
           <a:ln/>
         </p:spPr>
+        <p:txBody>
+          <a:bodyPr/>
+          <a:p/>
+        </p:txBody>
       </p:sp>
       <p:sp>
         <p:nvSpPr>
@@ -8041,79 +7845,44 @@
       </p:sp>
       <p:sp>
         <p:nvSpPr>
-          <p:cNvPr id="13" name="Text 11"/>
-          <p:cNvSpPr txBox="1"/>
-          <p:nvPr/>
-        </p:nvSpPr>
-        <p:spPr>
-          <a:xfrm>
-            <a:off x="640080" y="6446520"/>
-            <a:ext cx="8686800" cy="292608"/>
-          </a:xfrm>
-          <a:prstGeom prst="rect">
-            <a:avLst/>
-          </a:prstGeom>
-          <a:noFill/>
-          <a:ln/>
-        </p:spPr>
-        <p:txBody>
-          <a:bodyPr wrap="square" lIns="0" tIns="0" rIns="0" bIns="0" rtlCol="0" anchor="ctr"/>
-          <a:lstStyle/>
-          <a:p>
-            <a:pPr algn="l" indent="0" marL="0">
-              <a:buNone/>
-            </a:pPr>
-            <a:r>
-              <a:rPr lang="en-US" sz="900" dirty="0">
-                <a:solidFill>
-                  <a:srgbClr val="5D5D72"/>
-                </a:solidFill>
-                <a:latin typeface="Calibri" pitchFamily="34" charset="0"/>
-                <a:ea typeface="Calibri" pitchFamily="34" charset="-122"/>
-                <a:cs typeface="Calibri" pitchFamily="34" charset="-120"/>
-              </a:rPr>
-              <a:t>Usman Akram  •  COMSATS University Islamabad</a:t>
-            </a:r>
-            <a:endParaRPr lang="en-US" sz="900" dirty="0"/>
-          </a:p>
-        </p:txBody>
-      </p:sp>
-      <p:sp>
-        <p:nvSpPr>
-          <p:cNvPr id="14" name="Text 12"/>
-          <p:cNvSpPr txBox="1"/>
-          <p:nvPr/>
-        </p:nvSpPr>
-        <p:spPr>
-          <a:xfrm>
-            <a:off x="11155680" y="6446520"/>
-            <a:ext cx="457200" cy="292608"/>
-          </a:xfrm>
-          <a:prstGeom prst="rect">
-            <a:avLst/>
-          </a:prstGeom>
-          <a:noFill/>
-          <a:ln/>
-        </p:spPr>
-        <p:txBody>
-          <a:bodyPr wrap="square" lIns="0" tIns="0" rIns="0" bIns="0" rtlCol="0" anchor="ctr"/>
-          <a:lstStyle/>
-          <a:p>
-            <a:pPr algn="r" indent="0" marL="0">
-              <a:buNone/>
-            </a:pPr>
-            <a:r>
-              <a:rPr lang="en-US" sz="900" dirty="0">
-                <a:solidFill>
-                  <a:srgbClr val="5D5D72"/>
-                </a:solidFill>
-                <a:latin typeface="Calibri" pitchFamily="34" charset="0"/>
-                <a:ea typeface="Calibri" pitchFamily="34" charset="-122"/>
-                <a:cs typeface="Calibri" pitchFamily="34" charset="-120"/>
-              </a:rPr>
-              <a:t>17</a:t>
-            </a:r>
-            <a:endParaRPr lang="en-US" sz="900" dirty="0"/>
+          <p:cNvPr id="15" name="cuinotes-footer-mark"/>
+          <p:cNvSpPr txBox="1"/>
+          <p:nvPr/>
+        </p:nvSpPr>
+        <p:spPr>
+          <a:xfrm>
+            <a:off x="9951720" y="6455664"/>
+            <a:ext cx="2011680" cy="292608"/>
+          </a:xfrm>
+          <a:prstGeom prst="rect">
+            <a:avLst/>
+          </a:prstGeom>
+          <a:noFill/>
+        </p:spPr>
+        <p:txBody>
+          <a:bodyPr wrap="none" lIns="0" rIns="0" tIns="0" bIns="0">
+            <a:spAutoFit/>
+          </a:bodyPr>
+          <a:lstStyle/>
+          <a:p>
+            <a:pPr algn="r"/>
+            <a:r>
+              <a:rPr sz="1000">
+                <a:solidFill>
+                  <a:srgbClr val="8A939B"/>
+                </a:solidFill>
+                <a:hlinkClick r:id="rId3"/>
+              </a:rPr>
+              <a:t>cuinotes.com</a:t>
+            </a:r>
+            <a:r>
+              <a:rPr sz="1000">
+                <a:solidFill>
+                  <a:srgbClr val="8A939B"/>
+                </a:solidFill>
+              </a:rPr>
+              <a:t>  ·  17</a:t>
+            </a:r>
           </a:p>
         </p:txBody>
       </p:sp>
@@ -8248,6 +8017,10 @@
           </a:solidFill>
           <a:ln/>
         </p:spPr>
+        <p:txBody>
+          <a:bodyPr/>
+          <a:p/>
+        </p:txBody>
       </p:sp>
       <p:sp>
         <p:nvSpPr>
@@ -8502,6 +8275,10 @@
             </a:outerShdw>
           </a:effectLst>
         </p:spPr>
+        <p:txBody>
+          <a:bodyPr/>
+          <a:p/>
+        </p:txBody>
       </p:sp>
       <p:pic>
         <p:nvPicPr>
@@ -8529,79 +8306,44 @@
       </p:pic>
       <p:sp>
         <p:nvSpPr>
-          <p:cNvPr id="8" name="Text 5"/>
-          <p:cNvSpPr txBox="1"/>
-          <p:nvPr/>
-        </p:nvSpPr>
-        <p:spPr>
-          <a:xfrm>
-            <a:off x="640080" y="6446520"/>
-            <a:ext cx="8686800" cy="292608"/>
-          </a:xfrm>
-          <a:prstGeom prst="rect">
-            <a:avLst/>
-          </a:prstGeom>
-          <a:noFill/>
-          <a:ln/>
-        </p:spPr>
-        <p:txBody>
-          <a:bodyPr wrap="square" lIns="0" tIns="0" rIns="0" bIns="0" rtlCol="0" anchor="ctr"/>
-          <a:lstStyle/>
-          <a:p>
-            <a:pPr algn="l" indent="0" marL="0">
-              <a:buNone/>
-            </a:pPr>
-            <a:r>
-              <a:rPr lang="en-US" sz="900" dirty="0">
-                <a:solidFill>
-                  <a:srgbClr val="5D5D72"/>
-                </a:solidFill>
-                <a:latin typeface="Calibri" pitchFamily="34" charset="0"/>
-                <a:ea typeface="Calibri" pitchFamily="34" charset="-122"/>
-                <a:cs typeface="Calibri" pitchFamily="34" charset="-120"/>
-              </a:rPr>
-              <a:t>Usman Akram  •  COMSATS University Islamabad</a:t>
-            </a:r>
-            <a:endParaRPr lang="en-US" sz="900" dirty="0"/>
-          </a:p>
-        </p:txBody>
-      </p:sp>
-      <p:sp>
-        <p:nvSpPr>
-          <p:cNvPr id="9" name="Text 6"/>
-          <p:cNvSpPr txBox="1"/>
-          <p:nvPr/>
-        </p:nvSpPr>
-        <p:spPr>
-          <a:xfrm>
-            <a:off x="11155680" y="6446520"/>
-            <a:ext cx="457200" cy="292608"/>
-          </a:xfrm>
-          <a:prstGeom prst="rect">
-            <a:avLst/>
-          </a:prstGeom>
-          <a:noFill/>
-          <a:ln/>
-        </p:spPr>
-        <p:txBody>
-          <a:bodyPr wrap="square" lIns="0" tIns="0" rIns="0" bIns="0" rtlCol="0" anchor="ctr"/>
-          <a:lstStyle/>
-          <a:p>
-            <a:pPr algn="r" indent="0" marL="0">
-              <a:buNone/>
-            </a:pPr>
-            <a:r>
-              <a:rPr lang="en-US" sz="900" dirty="0">
-                <a:solidFill>
-                  <a:srgbClr val="5D5D72"/>
-                </a:solidFill>
-                <a:latin typeface="Calibri" pitchFamily="34" charset="0"/>
-                <a:ea typeface="Calibri" pitchFamily="34" charset="-122"/>
-                <a:cs typeface="Calibri" pitchFamily="34" charset="-120"/>
-              </a:rPr>
-              <a:t>18</a:t>
-            </a:r>
-            <a:endParaRPr lang="en-US" sz="900" dirty="0"/>
+          <p:cNvPr id="10" name="cuinotes-footer-mark"/>
+          <p:cNvSpPr txBox="1"/>
+          <p:nvPr/>
+        </p:nvSpPr>
+        <p:spPr>
+          <a:xfrm>
+            <a:off x="9951720" y="6455664"/>
+            <a:ext cx="2011680" cy="292608"/>
+          </a:xfrm>
+          <a:prstGeom prst="rect">
+            <a:avLst/>
+          </a:prstGeom>
+          <a:noFill/>
+        </p:spPr>
+        <p:txBody>
+          <a:bodyPr wrap="none" lIns="0" rIns="0" tIns="0" bIns="0">
+            <a:spAutoFit/>
+          </a:bodyPr>
+          <a:lstStyle/>
+          <a:p>
+            <a:pPr algn="r"/>
+            <a:r>
+              <a:rPr sz="1000">
+                <a:solidFill>
+                  <a:srgbClr val="8A939B"/>
+                </a:solidFill>
+                <a:hlinkClick r:id="rId4"/>
+              </a:rPr>
+              <a:t>cuinotes.com</a:t>
+            </a:r>
+            <a:r>
+              <a:rPr sz="1000">
+                <a:solidFill>
+                  <a:srgbClr val="8A939B"/>
+                </a:solidFill>
+              </a:rPr>
+              <a:t>  ·  18</a:t>
+            </a:r>
           </a:p>
         </p:txBody>
       </p:sp>
@@ -8734,6 +8476,10 @@
           </a:solidFill>
           <a:ln/>
         </p:spPr>
+        <p:txBody>
+          <a:bodyPr/>
+          <a:p/>
+        </p:txBody>
       </p:sp>
       <p:sp>
         <p:nvSpPr>
@@ -8832,6 +8578,10 @@
           </a:solidFill>
           <a:ln/>
         </p:spPr>
+        <p:txBody>
+          <a:bodyPr/>
+          <a:p/>
+        </p:txBody>
       </p:sp>
       <p:sp>
         <p:nvSpPr>
@@ -8930,6 +8680,10 @@
           </a:solidFill>
           <a:ln/>
         </p:spPr>
+        <p:txBody>
+          <a:bodyPr/>
+          <a:p/>
+        </p:txBody>
       </p:sp>
       <p:sp>
         <p:nvSpPr>
@@ -9011,79 +8765,44 @@
       </p:sp>
       <p:sp>
         <p:nvSpPr>
-          <p:cNvPr id="13" name="Text 11"/>
-          <p:cNvSpPr txBox="1"/>
-          <p:nvPr/>
-        </p:nvSpPr>
-        <p:spPr>
-          <a:xfrm>
-            <a:off x="640080" y="6446520"/>
-            <a:ext cx="8686800" cy="292608"/>
-          </a:xfrm>
-          <a:prstGeom prst="rect">
-            <a:avLst/>
-          </a:prstGeom>
-          <a:noFill/>
-          <a:ln/>
-        </p:spPr>
-        <p:txBody>
-          <a:bodyPr wrap="square" lIns="0" tIns="0" rIns="0" bIns="0" rtlCol="0" anchor="ctr"/>
-          <a:lstStyle/>
-          <a:p>
-            <a:pPr algn="l" indent="0" marL="0">
-              <a:buNone/>
-            </a:pPr>
-            <a:r>
-              <a:rPr lang="en-US" sz="900" dirty="0">
-                <a:solidFill>
-                  <a:srgbClr val="5D5D72"/>
-                </a:solidFill>
-                <a:latin typeface="Calibri" pitchFamily="34" charset="0"/>
-                <a:ea typeface="Calibri" pitchFamily="34" charset="-122"/>
-                <a:cs typeface="Calibri" pitchFamily="34" charset="-120"/>
-              </a:rPr>
-              <a:t>Usman Akram  •  COMSATS University Islamabad</a:t>
-            </a:r>
-            <a:endParaRPr lang="en-US" sz="900" dirty="0"/>
-          </a:p>
-        </p:txBody>
-      </p:sp>
-      <p:sp>
-        <p:nvSpPr>
-          <p:cNvPr id="14" name="Text 12"/>
-          <p:cNvSpPr txBox="1"/>
-          <p:nvPr/>
-        </p:nvSpPr>
-        <p:spPr>
-          <a:xfrm>
-            <a:off x="11155680" y="6446520"/>
-            <a:ext cx="457200" cy="292608"/>
-          </a:xfrm>
-          <a:prstGeom prst="rect">
-            <a:avLst/>
-          </a:prstGeom>
-          <a:noFill/>
-          <a:ln/>
-        </p:spPr>
-        <p:txBody>
-          <a:bodyPr wrap="square" lIns="0" tIns="0" rIns="0" bIns="0" rtlCol="0" anchor="ctr"/>
-          <a:lstStyle/>
-          <a:p>
-            <a:pPr algn="r" indent="0" marL="0">
-              <a:buNone/>
-            </a:pPr>
-            <a:r>
-              <a:rPr lang="en-US" sz="900" dirty="0">
-                <a:solidFill>
-                  <a:srgbClr val="5D5D72"/>
-                </a:solidFill>
-                <a:latin typeface="Calibri" pitchFamily="34" charset="0"/>
-                <a:ea typeface="Calibri" pitchFamily="34" charset="-122"/>
-                <a:cs typeface="Calibri" pitchFamily="34" charset="-120"/>
-              </a:rPr>
-              <a:t>19</a:t>
-            </a:r>
-            <a:endParaRPr lang="en-US" sz="900" dirty="0"/>
+          <p:cNvPr id="15" name="cuinotes-footer-mark"/>
+          <p:cNvSpPr txBox="1"/>
+          <p:nvPr/>
+        </p:nvSpPr>
+        <p:spPr>
+          <a:xfrm>
+            <a:off x="9951720" y="6455664"/>
+            <a:ext cx="2011680" cy="292608"/>
+          </a:xfrm>
+          <a:prstGeom prst="rect">
+            <a:avLst/>
+          </a:prstGeom>
+          <a:noFill/>
+        </p:spPr>
+        <p:txBody>
+          <a:bodyPr wrap="none" lIns="0" rIns="0" tIns="0" bIns="0">
+            <a:spAutoFit/>
+          </a:bodyPr>
+          <a:lstStyle/>
+          <a:p>
+            <a:pPr algn="r"/>
+            <a:r>
+              <a:rPr sz="1000">
+                <a:solidFill>
+                  <a:srgbClr val="8A939B"/>
+                </a:solidFill>
+                <a:hlinkClick r:id="rId3"/>
+              </a:rPr>
+              <a:t>cuinotes.com</a:t>
+            </a:r>
+            <a:r>
+              <a:rPr sz="1000">
+                <a:solidFill>
+                  <a:srgbClr val="8A939B"/>
+                </a:solidFill>
+              </a:rPr>
+              <a:t>  ·  19</a:t>
+            </a:r>
           </a:p>
         </p:txBody>
       </p:sp>
@@ -9216,6 +8935,10 @@
           </a:solidFill>
           <a:ln/>
         </p:spPr>
+        <p:txBody>
+          <a:bodyPr/>
+          <a:p/>
+        </p:txBody>
       </p:sp>
       <p:sp>
         <p:nvSpPr>
@@ -9314,6 +9037,10 @@
           </a:solidFill>
           <a:ln/>
         </p:spPr>
+        <p:txBody>
+          <a:bodyPr/>
+          <a:p/>
+        </p:txBody>
       </p:sp>
       <p:sp>
         <p:nvSpPr>
@@ -9412,6 +9139,10 @@
           </a:solidFill>
           <a:ln/>
         </p:spPr>
+        <p:txBody>
+          <a:bodyPr/>
+          <a:p/>
+        </p:txBody>
       </p:sp>
       <p:sp>
         <p:nvSpPr>
@@ -9510,6 +9241,10 @@
           </a:solidFill>
           <a:ln/>
         </p:spPr>
+        <p:txBody>
+          <a:bodyPr/>
+          <a:p/>
+        </p:txBody>
       </p:sp>
       <p:sp>
         <p:nvSpPr>
@@ -9608,6 +9343,10 @@
           </a:solidFill>
           <a:ln/>
         </p:spPr>
+        <p:txBody>
+          <a:bodyPr/>
+          <a:p/>
+        </p:txBody>
       </p:sp>
       <p:sp>
         <p:nvSpPr>
@@ -9689,79 +9428,44 @@
       </p:sp>
       <p:sp>
         <p:nvSpPr>
-          <p:cNvPr id="19" name="Text 17"/>
-          <p:cNvSpPr txBox="1"/>
-          <p:nvPr/>
-        </p:nvSpPr>
-        <p:spPr>
-          <a:xfrm>
-            <a:off x="640080" y="6446520"/>
-            <a:ext cx="8686800" cy="292608"/>
-          </a:xfrm>
-          <a:prstGeom prst="rect">
-            <a:avLst/>
-          </a:prstGeom>
-          <a:noFill/>
-          <a:ln/>
-        </p:spPr>
-        <p:txBody>
-          <a:bodyPr wrap="square" lIns="0" tIns="0" rIns="0" bIns="0" rtlCol="0" anchor="ctr"/>
-          <a:lstStyle/>
-          <a:p>
-            <a:pPr algn="l" indent="0" marL="0">
-              <a:buNone/>
-            </a:pPr>
-            <a:r>
-              <a:rPr lang="en-US" sz="900" dirty="0">
-                <a:solidFill>
-                  <a:srgbClr val="5D5D72"/>
-                </a:solidFill>
-                <a:latin typeface="Calibri" pitchFamily="34" charset="0"/>
-                <a:ea typeface="Calibri" pitchFamily="34" charset="-122"/>
-                <a:cs typeface="Calibri" pitchFamily="34" charset="-120"/>
-              </a:rPr>
-              <a:t>Usman Akram  •  COMSATS University Islamabad</a:t>
-            </a:r>
-            <a:endParaRPr lang="en-US" sz="900" dirty="0"/>
-          </a:p>
-        </p:txBody>
-      </p:sp>
-      <p:sp>
-        <p:nvSpPr>
-          <p:cNvPr id="20" name="Text 18"/>
-          <p:cNvSpPr txBox="1"/>
-          <p:nvPr/>
-        </p:nvSpPr>
-        <p:spPr>
-          <a:xfrm>
-            <a:off x="11155680" y="6446520"/>
-            <a:ext cx="457200" cy="292608"/>
-          </a:xfrm>
-          <a:prstGeom prst="rect">
-            <a:avLst/>
-          </a:prstGeom>
-          <a:noFill/>
-          <a:ln/>
-        </p:spPr>
-        <p:txBody>
-          <a:bodyPr wrap="square" lIns="0" tIns="0" rIns="0" bIns="0" rtlCol="0" anchor="ctr"/>
-          <a:lstStyle/>
-          <a:p>
-            <a:pPr algn="r" indent="0" marL="0">
-              <a:buNone/>
-            </a:pPr>
-            <a:r>
-              <a:rPr lang="en-US" sz="900" dirty="0">
-                <a:solidFill>
-                  <a:srgbClr val="5D5D72"/>
-                </a:solidFill>
-                <a:latin typeface="Calibri" pitchFamily="34" charset="0"/>
-                <a:ea typeface="Calibri" pitchFamily="34" charset="-122"/>
-                <a:cs typeface="Calibri" pitchFamily="34" charset="-120"/>
-              </a:rPr>
-              <a:t>2</a:t>
-            </a:r>
-            <a:endParaRPr lang="en-US" sz="900" dirty="0"/>
+          <p:cNvPr id="21" name="cuinotes-footer-mark"/>
+          <p:cNvSpPr txBox="1"/>
+          <p:nvPr/>
+        </p:nvSpPr>
+        <p:spPr>
+          <a:xfrm>
+            <a:off x="9951720" y="6455664"/>
+            <a:ext cx="2011680" cy="292608"/>
+          </a:xfrm>
+          <a:prstGeom prst="rect">
+            <a:avLst/>
+          </a:prstGeom>
+          <a:noFill/>
+        </p:spPr>
+        <p:txBody>
+          <a:bodyPr wrap="none" lIns="0" rIns="0" tIns="0" bIns="0">
+            <a:spAutoFit/>
+          </a:bodyPr>
+          <a:lstStyle/>
+          <a:p>
+            <a:pPr algn="r"/>
+            <a:r>
+              <a:rPr sz="1000">
+                <a:solidFill>
+                  <a:srgbClr val="8A939B"/>
+                </a:solidFill>
+                <a:hlinkClick r:id="rId3"/>
+              </a:rPr>
+              <a:t>cuinotes.com</a:t>
+            </a:r>
+            <a:r>
+              <a:rPr sz="1000">
+                <a:solidFill>
+                  <a:srgbClr val="8A939B"/>
+                </a:solidFill>
+              </a:rPr>
+              <a:t>  ·  2</a:t>
+            </a:r>
           </a:p>
         </p:txBody>
       </p:sp>
@@ -9896,6 +9600,10 @@
           </a:solidFill>
           <a:ln/>
         </p:spPr>
+        <p:txBody>
+          <a:bodyPr/>
+          <a:p/>
+        </p:txBody>
       </p:sp>
       <p:sp>
         <p:nvSpPr>
@@ -10230,79 +9938,44 @@
       </p:sp>
       <p:sp>
         <p:nvSpPr>
-          <p:cNvPr id="6" name="Text 4"/>
-          <p:cNvSpPr txBox="1"/>
-          <p:nvPr/>
-        </p:nvSpPr>
-        <p:spPr>
-          <a:xfrm>
-            <a:off x="640080" y="6446520"/>
-            <a:ext cx="8686800" cy="292608"/>
-          </a:xfrm>
-          <a:prstGeom prst="rect">
-            <a:avLst/>
-          </a:prstGeom>
-          <a:noFill/>
-          <a:ln/>
-        </p:spPr>
-        <p:txBody>
-          <a:bodyPr wrap="square" lIns="0" tIns="0" rIns="0" bIns="0" rtlCol="0" anchor="ctr"/>
-          <a:lstStyle/>
-          <a:p>
-            <a:pPr algn="l" indent="0" marL="0">
-              <a:buNone/>
-            </a:pPr>
-            <a:r>
-              <a:rPr lang="en-US" sz="900" dirty="0">
-                <a:solidFill>
-                  <a:srgbClr val="5D5D72"/>
-                </a:solidFill>
-                <a:latin typeface="Calibri" pitchFamily="34" charset="0"/>
-                <a:ea typeface="Calibri" pitchFamily="34" charset="-122"/>
-                <a:cs typeface="Calibri" pitchFamily="34" charset="-120"/>
-              </a:rPr>
-              <a:t>Usman Akram  •  COMSATS University Islamabad</a:t>
-            </a:r>
-            <a:endParaRPr lang="en-US" sz="900" dirty="0"/>
-          </a:p>
-        </p:txBody>
-      </p:sp>
-      <p:sp>
-        <p:nvSpPr>
-          <p:cNvPr id="7" name="Text 5"/>
-          <p:cNvSpPr txBox="1"/>
-          <p:nvPr/>
-        </p:nvSpPr>
-        <p:spPr>
-          <a:xfrm>
-            <a:off x="11155680" y="6446520"/>
-            <a:ext cx="457200" cy="292608"/>
-          </a:xfrm>
-          <a:prstGeom prst="rect">
-            <a:avLst/>
-          </a:prstGeom>
-          <a:noFill/>
-          <a:ln/>
-        </p:spPr>
-        <p:txBody>
-          <a:bodyPr wrap="square" lIns="0" tIns="0" rIns="0" bIns="0" rtlCol="0" anchor="ctr"/>
-          <a:lstStyle/>
-          <a:p>
-            <a:pPr algn="r" indent="0" marL="0">
-              <a:buNone/>
-            </a:pPr>
-            <a:r>
-              <a:rPr lang="en-US" sz="900" dirty="0">
-                <a:solidFill>
-                  <a:srgbClr val="5D5D72"/>
-                </a:solidFill>
-                <a:latin typeface="Calibri" pitchFamily="34" charset="0"/>
-                <a:ea typeface="Calibri" pitchFamily="34" charset="-122"/>
-                <a:cs typeface="Calibri" pitchFamily="34" charset="-120"/>
-              </a:rPr>
-              <a:t>20</a:t>
-            </a:r>
-            <a:endParaRPr lang="en-US" sz="900" dirty="0"/>
+          <p:cNvPr id="8" name="cuinotes-footer-mark"/>
+          <p:cNvSpPr txBox="1"/>
+          <p:nvPr/>
+        </p:nvSpPr>
+        <p:spPr>
+          <a:xfrm>
+            <a:off x="9951720" y="6455664"/>
+            <a:ext cx="2011680" cy="292608"/>
+          </a:xfrm>
+          <a:prstGeom prst="rect">
+            <a:avLst/>
+          </a:prstGeom>
+          <a:noFill/>
+        </p:spPr>
+        <p:txBody>
+          <a:bodyPr wrap="none" lIns="0" rIns="0" tIns="0" bIns="0">
+            <a:spAutoFit/>
+          </a:bodyPr>
+          <a:lstStyle/>
+          <a:p>
+            <a:pPr algn="r"/>
+            <a:r>
+              <a:rPr sz="1000">
+                <a:solidFill>
+                  <a:srgbClr val="8A939B"/>
+                </a:solidFill>
+                <a:hlinkClick r:id="rId3"/>
+              </a:rPr>
+              <a:t>cuinotes.com</a:t>
+            </a:r>
+            <a:r>
+              <a:rPr sz="1000">
+                <a:solidFill>
+                  <a:srgbClr val="8A939B"/>
+                </a:solidFill>
+              </a:rPr>
+              <a:t>  ·  20</a:t>
+            </a:r>
           </a:p>
         </p:txBody>
       </p:sp>
@@ -10437,6 +10110,10 @@
           </a:solidFill>
           <a:ln/>
         </p:spPr>
+        <p:txBody>
+          <a:bodyPr/>
+          <a:p/>
+        </p:txBody>
       </p:sp>
       <p:sp>
         <p:nvSpPr>
@@ -10701,79 +10378,44 @@
       </p:sp>
       <p:sp>
         <p:nvSpPr>
-          <p:cNvPr id="7" name="Text 5"/>
-          <p:cNvSpPr txBox="1"/>
-          <p:nvPr/>
-        </p:nvSpPr>
-        <p:spPr>
-          <a:xfrm>
-            <a:off x="640080" y="6446520"/>
-            <a:ext cx="8686800" cy="292608"/>
-          </a:xfrm>
-          <a:prstGeom prst="rect">
-            <a:avLst/>
-          </a:prstGeom>
-          <a:noFill/>
-          <a:ln/>
-        </p:spPr>
-        <p:txBody>
-          <a:bodyPr wrap="square" lIns="0" tIns="0" rIns="0" bIns="0" rtlCol="0" anchor="ctr"/>
-          <a:lstStyle/>
-          <a:p>
-            <a:pPr algn="l" indent="0" marL="0">
-              <a:buNone/>
-            </a:pPr>
-            <a:r>
-              <a:rPr lang="en-US" sz="900" dirty="0">
-                <a:solidFill>
-                  <a:srgbClr val="5D5D72"/>
-                </a:solidFill>
-                <a:latin typeface="Calibri" pitchFamily="34" charset="0"/>
-                <a:ea typeface="Calibri" pitchFamily="34" charset="-122"/>
-                <a:cs typeface="Calibri" pitchFamily="34" charset="-120"/>
-              </a:rPr>
-              <a:t>Usman Akram  •  COMSATS University Islamabad</a:t>
-            </a:r>
-            <a:endParaRPr lang="en-US" sz="900" dirty="0"/>
-          </a:p>
-        </p:txBody>
-      </p:sp>
-      <p:sp>
-        <p:nvSpPr>
-          <p:cNvPr id="8" name="Text 6"/>
-          <p:cNvSpPr txBox="1"/>
-          <p:nvPr/>
-        </p:nvSpPr>
-        <p:spPr>
-          <a:xfrm>
-            <a:off x="11155680" y="6446520"/>
-            <a:ext cx="457200" cy="292608"/>
-          </a:xfrm>
-          <a:prstGeom prst="rect">
-            <a:avLst/>
-          </a:prstGeom>
-          <a:noFill/>
-          <a:ln/>
-        </p:spPr>
-        <p:txBody>
-          <a:bodyPr wrap="square" lIns="0" tIns="0" rIns="0" bIns="0" rtlCol="0" anchor="ctr"/>
-          <a:lstStyle/>
-          <a:p>
-            <a:pPr algn="r" indent="0" marL="0">
-              <a:buNone/>
-            </a:pPr>
-            <a:r>
-              <a:rPr lang="en-US" sz="900" dirty="0">
-                <a:solidFill>
-                  <a:srgbClr val="5D5D72"/>
-                </a:solidFill>
-                <a:latin typeface="Calibri" pitchFamily="34" charset="0"/>
-                <a:ea typeface="Calibri" pitchFamily="34" charset="-122"/>
-                <a:cs typeface="Calibri" pitchFamily="34" charset="-120"/>
-              </a:rPr>
-              <a:t>21</a:t>
-            </a:r>
-            <a:endParaRPr lang="en-US" sz="900" dirty="0"/>
+          <p:cNvPr id="9" name="cuinotes-footer-mark"/>
+          <p:cNvSpPr txBox="1"/>
+          <p:nvPr/>
+        </p:nvSpPr>
+        <p:spPr>
+          <a:xfrm>
+            <a:off x="9951720" y="6455664"/>
+            <a:ext cx="2011680" cy="292608"/>
+          </a:xfrm>
+          <a:prstGeom prst="rect">
+            <a:avLst/>
+          </a:prstGeom>
+          <a:noFill/>
+        </p:spPr>
+        <p:txBody>
+          <a:bodyPr wrap="none" lIns="0" rIns="0" tIns="0" bIns="0">
+            <a:spAutoFit/>
+          </a:bodyPr>
+          <a:lstStyle/>
+          <a:p>
+            <a:pPr algn="r"/>
+            <a:r>
+              <a:rPr sz="1000">
+                <a:solidFill>
+                  <a:srgbClr val="8A939B"/>
+                </a:solidFill>
+                <a:hlinkClick r:id="rId3"/>
+              </a:rPr>
+              <a:t>cuinotes.com</a:t>
+            </a:r>
+            <a:r>
+              <a:rPr sz="1000">
+                <a:solidFill>
+                  <a:srgbClr val="8A939B"/>
+                </a:solidFill>
+              </a:rPr>
+              <a:t>  ·  21</a:t>
+            </a:r>
           </a:p>
         </p:txBody>
       </p:sp>
@@ -10913,6 +10555,10 @@
             <a:prstDash val="solid"/>
           </a:ln>
         </p:spPr>
+        <p:txBody>
+          <a:bodyPr/>
+          <a:p/>
+        </p:txBody>
       </p:sp>
       <p:sp>
         <p:nvSpPr>
@@ -10994,79 +10640,44 @@
       </p:sp>
       <p:sp>
         <p:nvSpPr>
-          <p:cNvPr id="7" name="Text 5"/>
-          <p:cNvSpPr txBox="1"/>
-          <p:nvPr/>
-        </p:nvSpPr>
-        <p:spPr>
-          <a:xfrm>
-            <a:off x="640080" y="6446520"/>
-            <a:ext cx="8686800" cy="292608"/>
-          </a:xfrm>
-          <a:prstGeom prst="rect">
-            <a:avLst/>
-          </a:prstGeom>
-          <a:noFill/>
-          <a:ln/>
-        </p:spPr>
-        <p:txBody>
-          <a:bodyPr wrap="square" lIns="0" tIns="0" rIns="0" bIns="0" rtlCol="0" anchor="ctr"/>
-          <a:lstStyle/>
-          <a:p>
-            <a:pPr algn="l" indent="0" marL="0">
-              <a:buNone/>
-            </a:pPr>
-            <a:r>
-              <a:rPr lang="en-US" sz="900" dirty="0">
-                <a:solidFill>
-                  <a:srgbClr val="5D5D72"/>
-                </a:solidFill>
-                <a:latin typeface="Calibri" pitchFamily="34" charset="0"/>
-                <a:ea typeface="Calibri" pitchFamily="34" charset="-122"/>
-                <a:cs typeface="Calibri" pitchFamily="34" charset="-120"/>
-              </a:rPr>
-              <a:t>Usman Akram  •  COMSATS University Islamabad</a:t>
-            </a:r>
-            <a:endParaRPr lang="en-US" sz="900" dirty="0"/>
-          </a:p>
-        </p:txBody>
-      </p:sp>
-      <p:sp>
-        <p:nvSpPr>
-          <p:cNvPr id="8" name="Text 6"/>
-          <p:cNvSpPr txBox="1"/>
-          <p:nvPr/>
-        </p:nvSpPr>
-        <p:spPr>
-          <a:xfrm>
-            <a:off x="11155680" y="6446520"/>
-            <a:ext cx="457200" cy="292608"/>
-          </a:xfrm>
-          <a:prstGeom prst="rect">
-            <a:avLst/>
-          </a:prstGeom>
-          <a:noFill/>
-          <a:ln/>
-        </p:spPr>
-        <p:txBody>
-          <a:bodyPr wrap="square" lIns="0" tIns="0" rIns="0" bIns="0" rtlCol="0" anchor="ctr"/>
-          <a:lstStyle/>
-          <a:p>
-            <a:pPr algn="r" indent="0" marL="0">
-              <a:buNone/>
-            </a:pPr>
-            <a:r>
-              <a:rPr lang="en-US" sz="900" dirty="0">
-                <a:solidFill>
-                  <a:srgbClr val="5D5D72"/>
-                </a:solidFill>
-                <a:latin typeface="Calibri" pitchFamily="34" charset="0"/>
-                <a:ea typeface="Calibri" pitchFamily="34" charset="-122"/>
-                <a:cs typeface="Calibri" pitchFamily="34" charset="-120"/>
-              </a:rPr>
-              <a:t>22</a:t>
-            </a:r>
-            <a:endParaRPr lang="en-US" sz="900" dirty="0"/>
+          <p:cNvPr id="9" name="cuinotes-footer-mark"/>
+          <p:cNvSpPr txBox="1"/>
+          <p:nvPr/>
+        </p:nvSpPr>
+        <p:spPr>
+          <a:xfrm>
+            <a:off x="9951720" y="6455664"/>
+            <a:ext cx="2011680" cy="292608"/>
+          </a:xfrm>
+          <a:prstGeom prst="rect">
+            <a:avLst/>
+          </a:prstGeom>
+          <a:noFill/>
+        </p:spPr>
+        <p:txBody>
+          <a:bodyPr wrap="none" lIns="0" rIns="0" tIns="0" bIns="0">
+            <a:spAutoFit/>
+          </a:bodyPr>
+          <a:lstStyle/>
+          <a:p>
+            <a:pPr algn="r"/>
+            <a:r>
+              <a:rPr sz="1000">
+                <a:solidFill>
+                  <a:srgbClr val="8A939B"/>
+                </a:solidFill>
+                <a:hlinkClick r:id="rId3"/>
+              </a:rPr>
+              <a:t>cuinotes.com</a:t>
+            </a:r>
+            <a:r>
+              <a:rPr sz="1000">
+                <a:solidFill>
+                  <a:srgbClr val="8A939B"/>
+                </a:solidFill>
+              </a:rPr>
+              <a:t>  ·  22</a:t>
+            </a:r>
           </a:p>
         </p:txBody>
       </p:sp>
@@ -11199,6 +10810,10 @@
           </a:solidFill>
           <a:ln/>
         </p:spPr>
+        <p:txBody>
+          <a:bodyPr/>
+          <a:p/>
+        </p:txBody>
       </p:sp>
       <p:sp>
         <p:nvSpPr>
@@ -11297,6 +10912,10 @@
           </a:solidFill>
           <a:ln/>
         </p:spPr>
+        <p:txBody>
+          <a:bodyPr/>
+          <a:p/>
+        </p:txBody>
       </p:sp>
       <p:sp>
         <p:nvSpPr>
@@ -11395,6 +11014,10 @@
           </a:solidFill>
           <a:ln/>
         </p:spPr>
+        <p:txBody>
+          <a:bodyPr/>
+          <a:p/>
+        </p:txBody>
       </p:sp>
       <p:sp>
         <p:nvSpPr>
@@ -11476,79 +11099,44 @@
       </p:sp>
       <p:sp>
         <p:nvSpPr>
-          <p:cNvPr id="13" name="Text 11"/>
-          <p:cNvSpPr txBox="1"/>
-          <p:nvPr/>
-        </p:nvSpPr>
-        <p:spPr>
-          <a:xfrm>
-            <a:off x="640080" y="6446520"/>
-            <a:ext cx="8686800" cy="292608"/>
-          </a:xfrm>
-          <a:prstGeom prst="rect">
-            <a:avLst/>
-          </a:prstGeom>
-          <a:noFill/>
-          <a:ln/>
-        </p:spPr>
-        <p:txBody>
-          <a:bodyPr wrap="square" lIns="0" tIns="0" rIns="0" bIns="0" rtlCol="0" anchor="ctr"/>
-          <a:lstStyle/>
-          <a:p>
-            <a:pPr algn="l" indent="0" marL="0">
-              <a:buNone/>
-            </a:pPr>
-            <a:r>
-              <a:rPr lang="en-US" sz="900" dirty="0">
-                <a:solidFill>
-                  <a:srgbClr val="5D5D72"/>
-                </a:solidFill>
-                <a:latin typeface="Calibri" pitchFamily="34" charset="0"/>
-                <a:ea typeface="Calibri" pitchFamily="34" charset="-122"/>
-                <a:cs typeface="Calibri" pitchFamily="34" charset="-120"/>
-              </a:rPr>
-              <a:t>Usman Akram  •  COMSATS University Islamabad</a:t>
-            </a:r>
-            <a:endParaRPr lang="en-US" sz="900" dirty="0"/>
-          </a:p>
-        </p:txBody>
-      </p:sp>
-      <p:sp>
-        <p:nvSpPr>
-          <p:cNvPr id="14" name="Text 12"/>
-          <p:cNvSpPr txBox="1"/>
-          <p:nvPr/>
-        </p:nvSpPr>
-        <p:spPr>
-          <a:xfrm>
-            <a:off x="11155680" y="6446520"/>
-            <a:ext cx="457200" cy="292608"/>
-          </a:xfrm>
-          <a:prstGeom prst="rect">
-            <a:avLst/>
-          </a:prstGeom>
-          <a:noFill/>
-          <a:ln/>
-        </p:spPr>
-        <p:txBody>
-          <a:bodyPr wrap="square" lIns="0" tIns="0" rIns="0" bIns="0" rtlCol="0" anchor="ctr"/>
-          <a:lstStyle/>
-          <a:p>
-            <a:pPr algn="r" indent="0" marL="0">
-              <a:buNone/>
-            </a:pPr>
-            <a:r>
-              <a:rPr lang="en-US" sz="900" dirty="0">
-                <a:solidFill>
-                  <a:srgbClr val="5D5D72"/>
-                </a:solidFill>
-                <a:latin typeface="Calibri" pitchFamily="34" charset="0"/>
-                <a:ea typeface="Calibri" pitchFamily="34" charset="-122"/>
-                <a:cs typeface="Calibri" pitchFamily="34" charset="-120"/>
-              </a:rPr>
-              <a:t>23</a:t>
-            </a:r>
-            <a:endParaRPr lang="en-US" sz="900" dirty="0"/>
+          <p:cNvPr id="15" name="cuinotes-footer-mark"/>
+          <p:cNvSpPr txBox="1"/>
+          <p:nvPr/>
+        </p:nvSpPr>
+        <p:spPr>
+          <a:xfrm>
+            <a:off x="9951720" y="6455664"/>
+            <a:ext cx="2011680" cy="292608"/>
+          </a:xfrm>
+          <a:prstGeom prst="rect">
+            <a:avLst/>
+          </a:prstGeom>
+          <a:noFill/>
+        </p:spPr>
+        <p:txBody>
+          <a:bodyPr wrap="none" lIns="0" rIns="0" tIns="0" bIns="0">
+            <a:spAutoFit/>
+          </a:bodyPr>
+          <a:lstStyle/>
+          <a:p>
+            <a:pPr algn="r"/>
+            <a:r>
+              <a:rPr sz="1000">
+                <a:solidFill>
+                  <a:srgbClr val="8A939B"/>
+                </a:solidFill>
+                <a:hlinkClick r:id="rId3"/>
+              </a:rPr>
+              <a:t>cuinotes.com</a:t>
+            </a:r>
+            <a:r>
+              <a:rPr sz="1000">
+                <a:solidFill>
+                  <a:srgbClr val="8A939B"/>
+                </a:solidFill>
+              </a:rPr>
+              <a:t>  ·  23</a:t>
+            </a:r>
           </a:p>
         </p:txBody>
       </p:sp>
@@ -11683,6 +11271,10 @@
           </a:solidFill>
           <a:ln/>
         </p:spPr>
+        <p:txBody>
+          <a:bodyPr/>
+          <a:p/>
+        </p:txBody>
       </p:sp>
       <p:sp>
         <p:nvSpPr>
@@ -12039,6 +11631,10 @@
             </a:outerShdw>
           </a:effectLst>
         </p:spPr>
+        <p:txBody>
+          <a:bodyPr/>
+          <a:p/>
+        </p:txBody>
       </p:sp>
       <p:pic>
         <p:nvPicPr>
@@ -12066,79 +11662,44 @@
       </p:pic>
       <p:sp>
         <p:nvSpPr>
-          <p:cNvPr id="8" name="Text 5"/>
-          <p:cNvSpPr txBox="1"/>
-          <p:nvPr/>
-        </p:nvSpPr>
-        <p:spPr>
-          <a:xfrm>
-            <a:off x="640080" y="6446520"/>
-            <a:ext cx="8686800" cy="292608"/>
-          </a:xfrm>
-          <a:prstGeom prst="rect">
-            <a:avLst/>
-          </a:prstGeom>
-          <a:noFill/>
-          <a:ln/>
-        </p:spPr>
-        <p:txBody>
-          <a:bodyPr wrap="square" lIns="0" tIns="0" rIns="0" bIns="0" rtlCol="0" anchor="ctr"/>
-          <a:lstStyle/>
-          <a:p>
-            <a:pPr algn="l" indent="0" marL="0">
-              <a:buNone/>
-            </a:pPr>
-            <a:r>
-              <a:rPr lang="en-US" sz="900" dirty="0">
-                <a:solidFill>
-                  <a:srgbClr val="5D5D72"/>
-                </a:solidFill>
-                <a:latin typeface="Calibri" pitchFamily="34" charset="0"/>
-                <a:ea typeface="Calibri" pitchFamily="34" charset="-122"/>
-                <a:cs typeface="Calibri" pitchFamily="34" charset="-120"/>
-              </a:rPr>
-              <a:t>Usman Akram  •  COMSATS University Islamabad</a:t>
-            </a:r>
-            <a:endParaRPr lang="en-US" sz="900" dirty="0"/>
-          </a:p>
-        </p:txBody>
-      </p:sp>
-      <p:sp>
-        <p:nvSpPr>
-          <p:cNvPr id="9" name="Text 6"/>
-          <p:cNvSpPr txBox="1"/>
-          <p:nvPr/>
-        </p:nvSpPr>
-        <p:spPr>
-          <a:xfrm>
-            <a:off x="11155680" y="6446520"/>
-            <a:ext cx="457200" cy="292608"/>
-          </a:xfrm>
-          <a:prstGeom prst="rect">
-            <a:avLst/>
-          </a:prstGeom>
-          <a:noFill/>
-          <a:ln/>
-        </p:spPr>
-        <p:txBody>
-          <a:bodyPr wrap="square" lIns="0" tIns="0" rIns="0" bIns="0" rtlCol="0" anchor="ctr"/>
-          <a:lstStyle/>
-          <a:p>
-            <a:pPr algn="r" indent="0" marL="0">
-              <a:buNone/>
-            </a:pPr>
-            <a:r>
-              <a:rPr lang="en-US" sz="900" dirty="0">
-                <a:solidFill>
-                  <a:srgbClr val="5D5D72"/>
-                </a:solidFill>
-                <a:latin typeface="Calibri" pitchFamily="34" charset="0"/>
-                <a:ea typeface="Calibri" pitchFamily="34" charset="-122"/>
-                <a:cs typeface="Calibri" pitchFamily="34" charset="-120"/>
-              </a:rPr>
-              <a:t>24</a:t>
-            </a:r>
-            <a:endParaRPr lang="en-US" sz="900" dirty="0"/>
+          <p:cNvPr id="10" name="cuinotes-footer-mark"/>
+          <p:cNvSpPr txBox="1"/>
+          <p:nvPr/>
+        </p:nvSpPr>
+        <p:spPr>
+          <a:xfrm>
+            <a:off x="9951720" y="6455664"/>
+            <a:ext cx="2011680" cy="292608"/>
+          </a:xfrm>
+          <a:prstGeom prst="rect">
+            <a:avLst/>
+          </a:prstGeom>
+          <a:noFill/>
+        </p:spPr>
+        <p:txBody>
+          <a:bodyPr wrap="none" lIns="0" rIns="0" tIns="0" bIns="0">
+            <a:spAutoFit/>
+          </a:bodyPr>
+          <a:lstStyle/>
+          <a:p>
+            <a:pPr algn="r"/>
+            <a:r>
+              <a:rPr sz="1000">
+                <a:solidFill>
+                  <a:srgbClr val="8A939B"/>
+                </a:solidFill>
+                <a:hlinkClick r:id="rId4"/>
+              </a:rPr>
+              <a:t>cuinotes.com</a:t>
+            </a:r>
+            <a:r>
+              <a:rPr sz="1000">
+                <a:solidFill>
+                  <a:srgbClr val="8A939B"/>
+                </a:solidFill>
+              </a:rPr>
+              <a:t>  ·  24</a:t>
+            </a:r>
           </a:p>
         </p:txBody>
       </p:sp>
@@ -12271,6 +11832,10 @@
           </a:solidFill>
           <a:ln/>
         </p:spPr>
+        <p:txBody>
+          <a:bodyPr/>
+          <a:p/>
+        </p:txBody>
       </p:sp>
       <p:sp>
         <p:nvSpPr>
@@ -12369,6 +11934,10 @@
           </a:solidFill>
           <a:ln/>
         </p:spPr>
+        <p:txBody>
+          <a:bodyPr/>
+          <a:p/>
+        </p:txBody>
       </p:sp>
       <p:sp>
         <p:nvSpPr>
@@ -12467,6 +12036,10 @@
           </a:solidFill>
           <a:ln/>
         </p:spPr>
+        <p:txBody>
+          <a:bodyPr/>
+          <a:p/>
+        </p:txBody>
       </p:sp>
       <p:sp>
         <p:nvSpPr>
@@ -12548,79 +12121,44 @@
       </p:sp>
       <p:sp>
         <p:nvSpPr>
-          <p:cNvPr id="13" name="Text 11"/>
-          <p:cNvSpPr txBox="1"/>
-          <p:nvPr/>
-        </p:nvSpPr>
-        <p:spPr>
-          <a:xfrm>
-            <a:off x="640080" y="6446520"/>
-            <a:ext cx="8686800" cy="292608"/>
-          </a:xfrm>
-          <a:prstGeom prst="rect">
-            <a:avLst/>
-          </a:prstGeom>
-          <a:noFill/>
-          <a:ln/>
-        </p:spPr>
-        <p:txBody>
-          <a:bodyPr wrap="square" lIns="0" tIns="0" rIns="0" bIns="0" rtlCol="0" anchor="ctr"/>
-          <a:lstStyle/>
-          <a:p>
-            <a:pPr algn="l" indent="0" marL="0">
-              <a:buNone/>
-            </a:pPr>
-            <a:r>
-              <a:rPr lang="en-US" sz="900" dirty="0">
-                <a:solidFill>
-                  <a:srgbClr val="5D5D72"/>
-                </a:solidFill>
-                <a:latin typeface="Calibri" pitchFamily="34" charset="0"/>
-                <a:ea typeface="Calibri" pitchFamily="34" charset="-122"/>
-                <a:cs typeface="Calibri" pitchFamily="34" charset="-120"/>
-              </a:rPr>
-              <a:t>Usman Akram  •  COMSATS University Islamabad</a:t>
-            </a:r>
-            <a:endParaRPr lang="en-US" sz="900" dirty="0"/>
-          </a:p>
-        </p:txBody>
-      </p:sp>
-      <p:sp>
-        <p:nvSpPr>
-          <p:cNvPr id="14" name="Text 12"/>
-          <p:cNvSpPr txBox="1"/>
-          <p:nvPr/>
-        </p:nvSpPr>
-        <p:spPr>
-          <a:xfrm>
-            <a:off x="11155680" y="6446520"/>
-            <a:ext cx="457200" cy="292608"/>
-          </a:xfrm>
-          <a:prstGeom prst="rect">
-            <a:avLst/>
-          </a:prstGeom>
-          <a:noFill/>
-          <a:ln/>
-        </p:spPr>
-        <p:txBody>
-          <a:bodyPr wrap="square" lIns="0" tIns="0" rIns="0" bIns="0" rtlCol="0" anchor="ctr"/>
-          <a:lstStyle/>
-          <a:p>
-            <a:pPr algn="r" indent="0" marL="0">
-              <a:buNone/>
-            </a:pPr>
-            <a:r>
-              <a:rPr lang="en-US" sz="900" dirty="0">
-                <a:solidFill>
-                  <a:srgbClr val="5D5D72"/>
-                </a:solidFill>
-                <a:latin typeface="Calibri" pitchFamily="34" charset="0"/>
-                <a:ea typeface="Calibri" pitchFamily="34" charset="-122"/>
-                <a:cs typeface="Calibri" pitchFamily="34" charset="-120"/>
-              </a:rPr>
-              <a:t>25</a:t>
-            </a:r>
-            <a:endParaRPr lang="en-US" sz="900" dirty="0"/>
+          <p:cNvPr id="15" name="cuinotes-footer-mark"/>
+          <p:cNvSpPr txBox="1"/>
+          <p:nvPr/>
+        </p:nvSpPr>
+        <p:spPr>
+          <a:xfrm>
+            <a:off x="9951720" y="6455664"/>
+            <a:ext cx="2011680" cy="292608"/>
+          </a:xfrm>
+          <a:prstGeom prst="rect">
+            <a:avLst/>
+          </a:prstGeom>
+          <a:noFill/>
+        </p:spPr>
+        <p:txBody>
+          <a:bodyPr wrap="none" lIns="0" rIns="0" tIns="0" bIns="0">
+            <a:spAutoFit/>
+          </a:bodyPr>
+          <a:lstStyle/>
+          <a:p>
+            <a:pPr algn="r"/>
+            <a:r>
+              <a:rPr sz="1000">
+                <a:solidFill>
+                  <a:srgbClr val="8A939B"/>
+                </a:solidFill>
+                <a:hlinkClick r:id="rId3"/>
+              </a:rPr>
+              <a:t>cuinotes.com</a:t>
+            </a:r>
+            <a:r>
+              <a:rPr sz="1000">
+                <a:solidFill>
+                  <a:srgbClr val="8A939B"/>
+                </a:solidFill>
+              </a:rPr>
+              <a:t>  ·  25</a:t>
+            </a:r>
           </a:p>
         </p:txBody>
       </p:sp>
@@ -12794,6 +12332,10 @@
           </a:solidFill>
           <a:ln/>
         </p:spPr>
+        <p:txBody>
+          <a:bodyPr/>
+          <a:p/>
+        </p:txBody>
       </p:sp>
       <p:sp>
         <p:nvSpPr>
@@ -13079,79 +12621,44 @@
       </p:sp>
       <p:sp>
         <p:nvSpPr>
-          <p:cNvPr id="7" name="Text 5"/>
-          <p:cNvSpPr txBox="1"/>
-          <p:nvPr/>
-        </p:nvSpPr>
-        <p:spPr>
-          <a:xfrm>
-            <a:off x="640080" y="6446520"/>
-            <a:ext cx="8686800" cy="292608"/>
-          </a:xfrm>
-          <a:prstGeom prst="rect">
-            <a:avLst/>
-          </a:prstGeom>
-          <a:noFill/>
-          <a:ln/>
-        </p:spPr>
-        <p:txBody>
-          <a:bodyPr wrap="square" lIns="0" tIns="0" rIns="0" bIns="0" rtlCol="0" anchor="ctr"/>
-          <a:lstStyle/>
-          <a:p>
-            <a:pPr algn="l" indent="0" marL="0">
-              <a:buNone/>
-            </a:pPr>
-            <a:r>
-              <a:rPr lang="en-US" sz="900" dirty="0">
-                <a:solidFill>
-                  <a:srgbClr val="5D5D72"/>
-                </a:solidFill>
-                <a:latin typeface="Calibri" pitchFamily="34" charset="0"/>
-                <a:ea typeface="Calibri" pitchFamily="34" charset="-122"/>
-                <a:cs typeface="Calibri" pitchFamily="34" charset="-120"/>
-              </a:rPr>
-              <a:t>Usman Akram  •  COMSATS University Islamabad</a:t>
-            </a:r>
-            <a:endParaRPr lang="en-US" sz="900" dirty="0"/>
-          </a:p>
-        </p:txBody>
-      </p:sp>
-      <p:sp>
-        <p:nvSpPr>
-          <p:cNvPr id="8" name="Text 6"/>
-          <p:cNvSpPr txBox="1"/>
-          <p:nvPr/>
-        </p:nvSpPr>
-        <p:spPr>
-          <a:xfrm>
-            <a:off x="11155680" y="6446520"/>
-            <a:ext cx="457200" cy="292608"/>
-          </a:xfrm>
-          <a:prstGeom prst="rect">
-            <a:avLst/>
-          </a:prstGeom>
-          <a:noFill/>
-          <a:ln/>
-        </p:spPr>
-        <p:txBody>
-          <a:bodyPr wrap="square" lIns="0" tIns="0" rIns="0" bIns="0" rtlCol="0" anchor="ctr"/>
-          <a:lstStyle/>
-          <a:p>
-            <a:pPr algn="r" indent="0" marL="0">
-              <a:buNone/>
-            </a:pPr>
-            <a:r>
-              <a:rPr lang="en-US" sz="900" dirty="0">
-                <a:solidFill>
-                  <a:srgbClr val="5D5D72"/>
-                </a:solidFill>
-                <a:latin typeface="Calibri" pitchFamily="34" charset="0"/>
-                <a:ea typeface="Calibri" pitchFamily="34" charset="-122"/>
-                <a:cs typeface="Calibri" pitchFamily="34" charset="-120"/>
-              </a:rPr>
-              <a:t>26</a:t>
-            </a:r>
-            <a:endParaRPr lang="en-US" sz="900" dirty="0"/>
+          <p:cNvPr id="9" name="cuinotes-footer-mark"/>
+          <p:cNvSpPr txBox="1"/>
+          <p:nvPr/>
+        </p:nvSpPr>
+        <p:spPr>
+          <a:xfrm>
+            <a:off x="9951720" y="6455664"/>
+            <a:ext cx="2011680" cy="292608"/>
+          </a:xfrm>
+          <a:prstGeom prst="rect">
+            <a:avLst/>
+          </a:prstGeom>
+          <a:noFill/>
+        </p:spPr>
+        <p:txBody>
+          <a:bodyPr wrap="none" lIns="0" rIns="0" tIns="0" bIns="0">
+            <a:spAutoFit/>
+          </a:bodyPr>
+          <a:lstStyle/>
+          <a:p>
+            <a:pPr algn="r"/>
+            <a:r>
+              <a:rPr sz="1000">
+                <a:solidFill>
+                  <a:srgbClr val="8A939B"/>
+                </a:solidFill>
+                <a:hlinkClick r:id="rId3"/>
+              </a:rPr>
+              <a:t>cuinotes.com</a:t>
+            </a:r>
+            <a:r>
+              <a:rPr sz="1000">
+                <a:solidFill>
+                  <a:srgbClr val="8A939B"/>
+                </a:solidFill>
+              </a:rPr>
+              <a:t>  ·  26</a:t>
+            </a:r>
           </a:p>
         </p:txBody>
       </p:sp>
@@ -13284,6 +12791,10 @@
           </a:solidFill>
           <a:ln/>
         </p:spPr>
+        <p:txBody>
+          <a:bodyPr/>
+          <a:p/>
+        </p:txBody>
       </p:sp>
       <p:sp>
         <p:nvSpPr>
@@ -13382,6 +12893,10 @@
           </a:solidFill>
           <a:ln/>
         </p:spPr>
+        <p:txBody>
+          <a:bodyPr/>
+          <a:p/>
+        </p:txBody>
       </p:sp>
       <p:sp>
         <p:nvSpPr>
@@ -13463,79 +12978,44 @@
       </p:sp>
       <p:sp>
         <p:nvSpPr>
-          <p:cNvPr id="10" name="Text 8"/>
-          <p:cNvSpPr txBox="1"/>
-          <p:nvPr/>
-        </p:nvSpPr>
-        <p:spPr>
-          <a:xfrm>
-            <a:off x="640080" y="6446520"/>
-            <a:ext cx="8686800" cy="292608"/>
-          </a:xfrm>
-          <a:prstGeom prst="rect">
-            <a:avLst/>
-          </a:prstGeom>
-          <a:noFill/>
-          <a:ln/>
-        </p:spPr>
-        <p:txBody>
-          <a:bodyPr wrap="square" lIns="0" tIns="0" rIns="0" bIns="0" rtlCol="0" anchor="ctr"/>
-          <a:lstStyle/>
-          <a:p>
-            <a:pPr algn="l" indent="0" marL="0">
-              <a:buNone/>
-            </a:pPr>
-            <a:r>
-              <a:rPr lang="en-US" sz="900" dirty="0">
-                <a:solidFill>
-                  <a:srgbClr val="5D5D72"/>
-                </a:solidFill>
-                <a:latin typeface="Calibri" pitchFamily="34" charset="0"/>
-                <a:ea typeface="Calibri" pitchFamily="34" charset="-122"/>
-                <a:cs typeface="Calibri" pitchFamily="34" charset="-120"/>
-              </a:rPr>
-              <a:t>Usman Akram  •  COMSATS University Islamabad</a:t>
-            </a:r>
-            <a:endParaRPr lang="en-US" sz="900" dirty="0"/>
-          </a:p>
-        </p:txBody>
-      </p:sp>
-      <p:sp>
-        <p:nvSpPr>
-          <p:cNvPr id="11" name="Text 9"/>
-          <p:cNvSpPr txBox="1"/>
-          <p:nvPr/>
-        </p:nvSpPr>
-        <p:spPr>
-          <a:xfrm>
-            <a:off x="11155680" y="6446520"/>
-            <a:ext cx="457200" cy="292608"/>
-          </a:xfrm>
-          <a:prstGeom prst="rect">
-            <a:avLst/>
-          </a:prstGeom>
-          <a:noFill/>
-          <a:ln/>
-        </p:spPr>
-        <p:txBody>
-          <a:bodyPr wrap="square" lIns="0" tIns="0" rIns="0" bIns="0" rtlCol="0" anchor="ctr"/>
-          <a:lstStyle/>
-          <a:p>
-            <a:pPr algn="r" indent="0" marL="0">
-              <a:buNone/>
-            </a:pPr>
-            <a:r>
-              <a:rPr lang="en-US" sz="900" dirty="0">
-                <a:solidFill>
-                  <a:srgbClr val="5D5D72"/>
-                </a:solidFill>
-                <a:latin typeface="Calibri" pitchFamily="34" charset="0"/>
-                <a:ea typeface="Calibri" pitchFamily="34" charset="-122"/>
-                <a:cs typeface="Calibri" pitchFamily="34" charset="-120"/>
-              </a:rPr>
-              <a:t>27</a:t>
-            </a:r>
-            <a:endParaRPr lang="en-US" sz="900" dirty="0"/>
+          <p:cNvPr id="12" name="cuinotes-footer-mark"/>
+          <p:cNvSpPr txBox="1"/>
+          <p:nvPr/>
+        </p:nvSpPr>
+        <p:spPr>
+          <a:xfrm>
+            <a:off x="9951720" y="6455664"/>
+            <a:ext cx="2011680" cy="292608"/>
+          </a:xfrm>
+          <a:prstGeom prst="rect">
+            <a:avLst/>
+          </a:prstGeom>
+          <a:noFill/>
+        </p:spPr>
+        <p:txBody>
+          <a:bodyPr wrap="none" lIns="0" rIns="0" tIns="0" bIns="0">
+            <a:spAutoFit/>
+          </a:bodyPr>
+          <a:lstStyle/>
+          <a:p>
+            <a:pPr algn="r"/>
+            <a:r>
+              <a:rPr sz="1000">
+                <a:solidFill>
+                  <a:srgbClr val="8A939B"/>
+                </a:solidFill>
+                <a:hlinkClick r:id="rId3"/>
+              </a:rPr>
+              <a:t>cuinotes.com</a:t>
+            </a:r>
+            <a:r>
+              <a:rPr sz="1000">
+                <a:solidFill>
+                  <a:srgbClr val="8A939B"/>
+                </a:solidFill>
+              </a:rPr>
+              <a:t>  ·  27</a:t>
+            </a:r>
           </a:p>
         </p:txBody>
       </p:sp>
@@ -13670,6 +13150,10 @@
           </a:solidFill>
           <a:ln/>
         </p:spPr>
+        <p:txBody>
+          <a:bodyPr/>
+          <a:p/>
+        </p:txBody>
       </p:sp>
       <p:sp>
         <p:nvSpPr>
@@ -14035,79 +13519,44 @@
       </p:sp>
       <p:sp>
         <p:nvSpPr>
-          <p:cNvPr id="6" name="Text 4"/>
-          <p:cNvSpPr txBox="1"/>
-          <p:nvPr/>
-        </p:nvSpPr>
-        <p:spPr>
-          <a:xfrm>
-            <a:off x="640080" y="6446520"/>
-            <a:ext cx="8686800" cy="292608"/>
-          </a:xfrm>
-          <a:prstGeom prst="rect">
-            <a:avLst/>
-          </a:prstGeom>
-          <a:noFill/>
-          <a:ln/>
-        </p:spPr>
-        <p:txBody>
-          <a:bodyPr wrap="square" lIns="0" tIns="0" rIns="0" bIns="0" rtlCol="0" anchor="ctr"/>
-          <a:lstStyle/>
-          <a:p>
-            <a:pPr algn="l" indent="0" marL="0">
-              <a:buNone/>
-            </a:pPr>
-            <a:r>
-              <a:rPr lang="en-US" sz="900" dirty="0">
-                <a:solidFill>
-                  <a:srgbClr val="5D5D72"/>
-                </a:solidFill>
-                <a:latin typeface="Calibri" pitchFamily="34" charset="0"/>
-                <a:ea typeface="Calibri" pitchFamily="34" charset="-122"/>
-                <a:cs typeface="Calibri" pitchFamily="34" charset="-120"/>
-              </a:rPr>
-              <a:t>Usman Akram  •  COMSATS University Islamabad</a:t>
-            </a:r>
-            <a:endParaRPr lang="en-US" sz="900" dirty="0"/>
-          </a:p>
-        </p:txBody>
-      </p:sp>
-      <p:sp>
-        <p:nvSpPr>
-          <p:cNvPr id="7" name="Text 5"/>
-          <p:cNvSpPr txBox="1"/>
-          <p:nvPr/>
-        </p:nvSpPr>
-        <p:spPr>
-          <a:xfrm>
-            <a:off x="11155680" y="6446520"/>
-            <a:ext cx="457200" cy="292608"/>
-          </a:xfrm>
-          <a:prstGeom prst="rect">
-            <a:avLst/>
-          </a:prstGeom>
-          <a:noFill/>
-          <a:ln/>
-        </p:spPr>
-        <p:txBody>
-          <a:bodyPr wrap="square" lIns="0" tIns="0" rIns="0" bIns="0" rtlCol="0" anchor="ctr"/>
-          <a:lstStyle/>
-          <a:p>
-            <a:pPr algn="r" indent="0" marL="0">
-              <a:buNone/>
-            </a:pPr>
-            <a:r>
-              <a:rPr lang="en-US" sz="900" dirty="0">
-                <a:solidFill>
-                  <a:srgbClr val="5D5D72"/>
-                </a:solidFill>
-                <a:latin typeface="Calibri" pitchFamily="34" charset="0"/>
-                <a:ea typeface="Calibri" pitchFamily="34" charset="-122"/>
-                <a:cs typeface="Calibri" pitchFamily="34" charset="-120"/>
-              </a:rPr>
-              <a:t>28</a:t>
-            </a:r>
-            <a:endParaRPr lang="en-US" sz="900" dirty="0"/>
+          <p:cNvPr id="8" name="cuinotes-footer-mark"/>
+          <p:cNvSpPr txBox="1"/>
+          <p:nvPr/>
+        </p:nvSpPr>
+        <p:spPr>
+          <a:xfrm>
+            <a:off x="9951720" y="6455664"/>
+            <a:ext cx="2011680" cy="292608"/>
+          </a:xfrm>
+          <a:prstGeom prst="rect">
+            <a:avLst/>
+          </a:prstGeom>
+          <a:noFill/>
+        </p:spPr>
+        <p:txBody>
+          <a:bodyPr wrap="none" lIns="0" rIns="0" tIns="0" bIns="0">
+            <a:spAutoFit/>
+          </a:bodyPr>
+          <a:lstStyle/>
+          <a:p>
+            <a:pPr algn="r"/>
+            <a:r>
+              <a:rPr sz="1000">
+                <a:solidFill>
+                  <a:srgbClr val="8A939B"/>
+                </a:solidFill>
+                <a:hlinkClick r:id="rId3"/>
+              </a:rPr>
+              <a:t>cuinotes.com</a:t>
+            </a:r>
+            <a:r>
+              <a:rPr sz="1000">
+                <a:solidFill>
+                  <a:srgbClr val="8A939B"/>
+                </a:solidFill>
+              </a:rPr>
+              <a:t>  ·  28</a:t>
+            </a:r>
           </a:p>
         </p:txBody>
       </p:sp>
@@ -15273,79 +14722,44 @@
       </p:graphicFrame>
       <p:sp>
         <p:nvSpPr>
-          <p:cNvPr id="5" name="Text 2"/>
-          <p:cNvSpPr txBox="1"/>
-          <p:nvPr/>
-        </p:nvSpPr>
-        <p:spPr>
-          <a:xfrm>
-            <a:off x="640080" y="6446520"/>
-            <a:ext cx="8686800" cy="292608"/>
-          </a:xfrm>
-          <a:prstGeom prst="rect">
-            <a:avLst/>
-          </a:prstGeom>
-          <a:noFill/>
-          <a:ln/>
-        </p:spPr>
-        <p:txBody>
-          <a:bodyPr wrap="square" lIns="0" tIns="0" rIns="0" bIns="0" rtlCol="0" anchor="ctr"/>
-          <a:lstStyle/>
-          <a:p>
-            <a:pPr algn="l" indent="0" marL="0">
-              <a:buNone/>
-            </a:pPr>
-            <a:r>
-              <a:rPr lang="en-US" sz="900" dirty="0">
-                <a:solidFill>
-                  <a:srgbClr val="5D5D72"/>
-                </a:solidFill>
-                <a:latin typeface="Calibri" pitchFamily="34" charset="0"/>
-                <a:ea typeface="Calibri" pitchFamily="34" charset="-122"/>
-                <a:cs typeface="Calibri" pitchFamily="34" charset="-120"/>
-              </a:rPr>
-              <a:t>Usman Akram  •  COMSATS University Islamabad</a:t>
-            </a:r>
-            <a:endParaRPr lang="en-US" sz="900" dirty="0"/>
-          </a:p>
-        </p:txBody>
-      </p:sp>
-      <p:sp>
-        <p:nvSpPr>
-          <p:cNvPr id="6" name="Text 3"/>
-          <p:cNvSpPr txBox="1"/>
-          <p:nvPr/>
-        </p:nvSpPr>
-        <p:spPr>
-          <a:xfrm>
-            <a:off x="11155680" y="6446520"/>
-            <a:ext cx="457200" cy="292608"/>
-          </a:xfrm>
-          <a:prstGeom prst="rect">
-            <a:avLst/>
-          </a:prstGeom>
-          <a:noFill/>
-          <a:ln/>
-        </p:spPr>
-        <p:txBody>
-          <a:bodyPr wrap="square" lIns="0" tIns="0" rIns="0" bIns="0" rtlCol="0" anchor="ctr"/>
-          <a:lstStyle/>
-          <a:p>
-            <a:pPr algn="r" indent="0" marL="0">
-              <a:buNone/>
-            </a:pPr>
-            <a:r>
-              <a:rPr lang="en-US" sz="900" dirty="0">
-                <a:solidFill>
-                  <a:srgbClr val="5D5D72"/>
-                </a:solidFill>
-                <a:latin typeface="Calibri" pitchFamily="34" charset="0"/>
-                <a:ea typeface="Calibri" pitchFamily="34" charset="-122"/>
-                <a:cs typeface="Calibri" pitchFamily="34" charset="-120"/>
-              </a:rPr>
-              <a:t>29</a:t>
-            </a:r>
-            <a:endParaRPr lang="en-US" sz="900" dirty="0"/>
+          <p:cNvPr id="31" name="cuinotes-footer-mark"/>
+          <p:cNvSpPr txBox="1"/>
+          <p:nvPr/>
+        </p:nvSpPr>
+        <p:spPr>
+          <a:xfrm>
+            <a:off x="9951720" y="6455664"/>
+            <a:ext cx="2011680" cy="292608"/>
+          </a:xfrm>
+          <a:prstGeom prst="rect">
+            <a:avLst/>
+          </a:prstGeom>
+          <a:noFill/>
+        </p:spPr>
+        <p:txBody>
+          <a:bodyPr wrap="none" lIns="0" rIns="0" tIns="0" bIns="0">
+            <a:spAutoFit/>
+          </a:bodyPr>
+          <a:lstStyle/>
+          <a:p>
+            <a:pPr algn="r"/>
+            <a:r>
+              <a:rPr sz="1000">
+                <a:solidFill>
+                  <a:srgbClr val="8A939B"/>
+                </a:solidFill>
+                <a:hlinkClick r:id="rId3"/>
+              </a:rPr>
+              <a:t>cuinotes.com</a:t>
+            </a:r>
+            <a:r>
+              <a:rPr sz="1000">
+                <a:solidFill>
+                  <a:srgbClr val="8A939B"/>
+                </a:solidFill>
+              </a:rPr>
+              <a:t>  ·  29</a:t>
+            </a:r>
           </a:p>
         </p:txBody>
       </p:sp>
@@ -15478,6 +14892,10 @@
           </a:solidFill>
           <a:ln/>
         </p:spPr>
+        <p:txBody>
+          <a:bodyPr/>
+          <a:p/>
+        </p:txBody>
       </p:sp>
       <p:sp>
         <p:nvSpPr>
@@ -15576,6 +14994,10 @@
           </a:solidFill>
           <a:ln/>
         </p:spPr>
+        <p:txBody>
+          <a:bodyPr/>
+          <a:p/>
+        </p:txBody>
       </p:sp>
       <p:sp>
         <p:nvSpPr>
@@ -15674,6 +15096,10 @@
           </a:solidFill>
           <a:ln/>
         </p:spPr>
+        <p:txBody>
+          <a:bodyPr/>
+          <a:p/>
+        </p:txBody>
       </p:sp>
       <p:sp>
         <p:nvSpPr>
@@ -15772,6 +15198,10 @@
           </a:solidFill>
           <a:ln/>
         </p:spPr>
+        <p:txBody>
+          <a:bodyPr/>
+          <a:p/>
+        </p:txBody>
       </p:sp>
       <p:sp>
         <p:nvSpPr>
@@ -15853,79 +15283,44 @@
       </p:sp>
       <p:sp>
         <p:nvSpPr>
-          <p:cNvPr id="16" name="Text 14"/>
-          <p:cNvSpPr txBox="1"/>
-          <p:nvPr/>
-        </p:nvSpPr>
-        <p:spPr>
-          <a:xfrm>
-            <a:off x="640080" y="6446520"/>
-            <a:ext cx="8686800" cy="292608"/>
-          </a:xfrm>
-          <a:prstGeom prst="rect">
-            <a:avLst/>
-          </a:prstGeom>
-          <a:noFill/>
-          <a:ln/>
-        </p:spPr>
-        <p:txBody>
-          <a:bodyPr wrap="square" lIns="0" tIns="0" rIns="0" bIns="0" rtlCol="0" anchor="ctr"/>
-          <a:lstStyle/>
-          <a:p>
-            <a:pPr algn="l" indent="0" marL="0">
-              <a:buNone/>
-            </a:pPr>
-            <a:r>
-              <a:rPr lang="en-US" sz="900" dirty="0">
-                <a:solidFill>
-                  <a:srgbClr val="5D5D72"/>
-                </a:solidFill>
-                <a:latin typeface="Calibri" pitchFamily="34" charset="0"/>
-                <a:ea typeface="Calibri" pitchFamily="34" charset="-122"/>
-                <a:cs typeface="Calibri" pitchFamily="34" charset="-120"/>
-              </a:rPr>
-              <a:t>Usman Akram  •  COMSATS University Islamabad</a:t>
-            </a:r>
-            <a:endParaRPr lang="en-US" sz="900" dirty="0"/>
-          </a:p>
-        </p:txBody>
-      </p:sp>
-      <p:sp>
-        <p:nvSpPr>
-          <p:cNvPr id="17" name="Text 15"/>
-          <p:cNvSpPr txBox="1"/>
-          <p:nvPr/>
-        </p:nvSpPr>
-        <p:spPr>
-          <a:xfrm>
-            <a:off x="11155680" y="6446520"/>
-            <a:ext cx="457200" cy="292608"/>
-          </a:xfrm>
-          <a:prstGeom prst="rect">
-            <a:avLst/>
-          </a:prstGeom>
-          <a:noFill/>
-          <a:ln/>
-        </p:spPr>
-        <p:txBody>
-          <a:bodyPr wrap="square" lIns="0" tIns="0" rIns="0" bIns="0" rtlCol="0" anchor="ctr"/>
-          <a:lstStyle/>
-          <a:p>
-            <a:pPr algn="r" indent="0" marL="0">
-              <a:buNone/>
-            </a:pPr>
-            <a:r>
-              <a:rPr lang="en-US" sz="900" dirty="0">
-                <a:solidFill>
-                  <a:srgbClr val="5D5D72"/>
-                </a:solidFill>
-                <a:latin typeface="Calibri" pitchFamily="34" charset="0"/>
-                <a:ea typeface="Calibri" pitchFamily="34" charset="-122"/>
-                <a:cs typeface="Calibri" pitchFamily="34" charset="-120"/>
-              </a:rPr>
-              <a:t>3</a:t>
-            </a:r>
-            <a:endParaRPr lang="en-US" sz="900" dirty="0"/>
+          <p:cNvPr id="18" name="cuinotes-footer-mark"/>
+          <p:cNvSpPr txBox="1"/>
+          <p:nvPr/>
+        </p:nvSpPr>
+        <p:spPr>
+          <a:xfrm>
+            <a:off x="9951720" y="6455664"/>
+            <a:ext cx="2011680" cy="292608"/>
+          </a:xfrm>
+          <a:prstGeom prst="rect">
+            <a:avLst/>
+          </a:prstGeom>
+          <a:noFill/>
+        </p:spPr>
+        <p:txBody>
+          <a:bodyPr wrap="none" lIns="0" rIns="0" tIns="0" bIns="0">
+            <a:spAutoFit/>
+          </a:bodyPr>
+          <a:lstStyle/>
+          <a:p>
+            <a:pPr algn="r"/>
+            <a:r>
+              <a:rPr sz="1000">
+                <a:solidFill>
+                  <a:srgbClr val="8A939B"/>
+                </a:solidFill>
+                <a:hlinkClick r:id="rId3"/>
+              </a:rPr>
+              <a:t>cuinotes.com</a:t>
+            </a:r>
+            <a:r>
+              <a:rPr sz="1000">
+                <a:solidFill>
+                  <a:srgbClr val="8A939B"/>
+                </a:solidFill>
+              </a:rPr>
+              <a:t>  ·  3</a:t>
+            </a:r>
           </a:p>
         </p:txBody>
       </p:sp>
@@ -16065,6 +15460,10 @@
             <a:prstDash val="solid"/>
           </a:ln>
         </p:spPr>
+        <p:txBody>
+          <a:bodyPr/>
+          <a:p/>
+        </p:txBody>
       </p:sp>
       <p:sp>
         <p:nvSpPr>
@@ -16146,79 +15545,44 @@
       </p:sp>
       <p:sp>
         <p:nvSpPr>
-          <p:cNvPr id="7" name="Text 5"/>
-          <p:cNvSpPr txBox="1"/>
-          <p:nvPr/>
-        </p:nvSpPr>
-        <p:spPr>
-          <a:xfrm>
-            <a:off x="640080" y="6446520"/>
-            <a:ext cx="8686800" cy="292608"/>
-          </a:xfrm>
-          <a:prstGeom prst="rect">
-            <a:avLst/>
-          </a:prstGeom>
-          <a:noFill/>
-          <a:ln/>
-        </p:spPr>
-        <p:txBody>
-          <a:bodyPr wrap="square" lIns="0" tIns="0" rIns="0" bIns="0" rtlCol="0" anchor="ctr"/>
-          <a:lstStyle/>
-          <a:p>
-            <a:pPr algn="l" indent="0" marL="0">
-              <a:buNone/>
-            </a:pPr>
-            <a:r>
-              <a:rPr lang="en-US" sz="900" dirty="0">
-                <a:solidFill>
-                  <a:srgbClr val="5D5D72"/>
-                </a:solidFill>
-                <a:latin typeface="Calibri" pitchFamily="34" charset="0"/>
-                <a:ea typeface="Calibri" pitchFamily="34" charset="-122"/>
-                <a:cs typeface="Calibri" pitchFamily="34" charset="-120"/>
-              </a:rPr>
-              <a:t>Usman Akram  •  COMSATS University Islamabad</a:t>
-            </a:r>
-            <a:endParaRPr lang="en-US" sz="900" dirty="0"/>
-          </a:p>
-        </p:txBody>
-      </p:sp>
-      <p:sp>
-        <p:nvSpPr>
-          <p:cNvPr id="8" name="Text 6"/>
-          <p:cNvSpPr txBox="1"/>
-          <p:nvPr/>
-        </p:nvSpPr>
-        <p:spPr>
-          <a:xfrm>
-            <a:off x="11155680" y="6446520"/>
-            <a:ext cx="457200" cy="292608"/>
-          </a:xfrm>
-          <a:prstGeom prst="rect">
-            <a:avLst/>
-          </a:prstGeom>
-          <a:noFill/>
-          <a:ln/>
-        </p:spPr>
-        <p:txBody>
-          <a:bodyPr wrap="square" lIns="0" tIns="0" rIns="0" bIns="0" rtlCol="0" anchor="ctr"/>
-          <a:lstStyle/>
-          <a:p>
-            <a:pPr algn="r" indent="0" marL="0">
-              <a:buNone/>
-            </a:pPr>
-            <a:r>
-              <a:rPr lang="en-US" sz="900" dirty="0">
-                <a:solidFill>
-                  <a:srgbClr val="5D5D72"/>
-                </a:solidFill>
-                <a:latin typeface="Calibri" pitchFamily="34" charset="0"/>
-                <a:ea typeface="Calibri" pitchFamily="34" charset="-122"/>
-                <a:cs typeface="Calibri" pitchFamily="34" charset="-120"/>
-              </a:rPr>
-              <a:t>30</a:t>
-            </a:r>
-            <a:endParaRPr lang="en-US" sz="900" dirty="0"/>
+          <p:cNvPr id="9" name="cuinotes-footer-mark"/>
+          <p:cNvSpPr txBox="1"/>
+          <p:nvPr/>
+        </p:nvSpPr>
+        <p:spPr>
+          <a:xfrm>
+            <a:off x="9951720" y="6455664"/>
+            <a:ext cx="2011680" cy="292608"/>
+          </a:xfrm>
+          <a:prstGeom prst="rect">
+            <a:avLst/>
+          </a:prstGeom>
+          <a:noFill/>
+        </p:spPr>
+        <p:txBody>
+          <a:bodyPr wrap="none" lIns="0" rIns="0" tIns="0" bIns="0">
+            <a:spAutoFit/>
+          </a:bodyPr>
+          <a:lstStyle/>
+          <a:p>
+            <a:pPr algn="r"/>
+            <a:r>
+              <a:rPr sz="1000">
+                <a:solidFill>
+                  <a:srgbClr val="8A939B"/>
+                </a:solidFill>
+                <a:hlinkClick r:id="rId3"/>
+              </a:rPr>
+              <a:t>cuinotes.com</a:t>
+            </a:r>
+            <a:r>
+              <a:rPr sz="1000">
+                <a:solidFill>
+                  <a:srgbClr val="8A939B"/>
+                </a:solidFill>
+              </a:rPr>
+              <a:t>  ·  30</a:t>
+            </a:r>
           </a:p>
         </p:txBody>
       </p:sp>
@@ -16351,6 +15715,10 @@
           </a:solidFill>
           <a:ln/>
         </p:spPr>
+        <p:txBody>
+          <a:bodyPr/>
+          <a:p/>
+        </p:txBody>
       </p:sp>
       <p:sp>
         <p:nvSpPr>
@@ -16449,6 +15817,10 @@
           </a:solidFill>
           <a:ln/>
         </p:spPr>
+        <p:txBody>
+          <a:bodyPr/>
+          <a:p/>
+        </p:txBody>
       </p:sp>
       <p:sp>
         <p:nvSpPr>
@@ -16547,6 +15919,10 @@
           </a:solidFill>
           <a:ln/>
         </p:spPr>
+        <p:txBody>
+          <a:bodyPr/>
+          <a:p/>
+        </p:txBody>
       </p:sp>
       <p:sp>
         <p:nvSpPr>
@@ -16645,6 +16021,10 @@
           </a:solidFill>
           <a:ln/>
         </p:spPr>
+        <p:txBody>
+          <a:bodyPr/>
+          <a:p/>
+        </p:txBody>
       </p:sp>
       <p:sp>
         <p:nvSpPr>
@@ -16743,6 +16123,10 @@
           </a:solidFill>
           <a:ln/>
         </p:spPr>
+        <p:txBody>
+          <a:bodyPr/>
+          <a:p/>
+        </p:txBody>
       </p:sp>
       <p:sp>
         <p:nvSpPr>
@@ -16841,6 +16225,10 @@
           </a:solidFill>
           <a:ln/>
         </p:spPr>
+        <p:txBody>
+          <a:bodyPr/>
+          <a:p/>
+        </p:txBody>
       </p:sp>
       <p:sp>
         <p:nvSpPr>
@@ -16922,79 +16310,44 @@
       </p:sp>
       <p:sp>
         <p:nvSpPr>
-          <p:cNvPr id="22" name="Text 20"/>
-          <p:cNvSpPr txBox="1"/>
-          <p:nvPr/>
-        </p:nvSpPr>
-        <p:spPr>
-          <a:xfrm>
-            <a:off x="640080" y="6446520"/>
-            <a:ext cx="8686800" cy="292608"/>
-          </a:xfrm>
-          <a:prstGeom prst="rect">
-            <a:avLst/>
-          </a:prstGeom>
-          <a:noFill/>
-          <a:ln/>
-        </p:spPr>
-        <p:txBody>
-          <a:bodyPr wrap="square" lIns="0" tIns="0" rIns="0" bIns="0" rtlCol="0" anchor="ctr"/>
-          <a:lstStyle/>
-          <a:p>
-            <a:pPr algn="l" indent="0" marL="0">
-              <a:buNone/>
-            </a:pPr>
-            <a:r>
-              <a:rPr lang="en-US" sz="900" dirty="0">
-                <a:solidFill>
-                  <a:srgbClr val="9AA3D8"/>
-                </a:solidFill>
-                <a:latin typeface="Calibri" pitchFamily="34" charset="0"/>
-                <a:ea typeface="Calibri" pitchFamily="34" charset="-122"/>
-                <a:cs typeface="Calibri" pitchFamily="34" charset="-120"/>
-              </a:rPr>
-              <a:t>Usman Akram  •  COMSATS University Islamabad</a:t>
-            </a:r>
-            <a:endParaRPr lang="en-US" sz="900" dirty="0"/>
-          </a:p>
-        </p:txBody>
-      </p:sp>
-      <p:sp>
-        <p:nvSpPr>
-          <p:cNvPr id="23" name="Text 21"/>
-          <p:cNvSpPr txBox="1"/>
-          <p:nvPr/>
-        </p:nvSpPr>
-        <p:spPr>
-          <a:xfrm>
-            <a:off x="11155680" y="6446520"/>
-            <a:ext cx="457200" cy="292608"/>
-          </a:xfrm>
-          <a:prstGeom prst="rect">
-            <a:avLst/>
-          </a:prstGeom>
-          <a:noFill/>
-          <a:ln/>
-        </p:spPr>
-        <p:txBody>
-          <a:bodyPr wrap="square" lIns="0" tIns="0" rIns="0" bIns="0" rtlCol="0" anchor="ctr"/>
-          <a:lstStyle/>
-          <a:p>
-            <a:pPr algn="r" indent="0" marL="0">
-              <a:buNone/>
-            </a:pPr>
-            <a:r>
-              <a:rPr lang="en-US" sz="900" dirty="0">
-                <a:solidFill>
-                  <a:srgbClr val="9AA3D8"/>
-                </a:solidFill>
-                <a:latin typeface="Calibri" pitchFamily="34" charset="0"/>
-                <a:ea typeface="Calibri" pitchFamily="34" charset="-122"/>
-                <a:cs typeface="Calibri" pitchFamily="34" charset="-120"/>
-              </a:rPr>
-              <a:t>31</a:t>
-            </a:r>
-            <a:endParaRPr lang="en-US" sz="900" dirty="0"/>
+          <p:cNvPr id="24" name="cuinotes-footer-mark"/>
+          <p:cNvSpPr txBox="1"/>
+          <p:nvPr/>
+        </p:nvSpPr>
+        <p:spPr>
+          <a:xfrm>
+            <a:off x="9951720" y="6455664"/>
+            <a:ext cx="2011680" cy="292608"/>
+          </a:xfrm>
+          <a:prstGeom prst="rect">
+            <a:avLst/>
+          </a:prstGeom>
+          <a:noFill/>
+        </p:spPr>
+        <p:txBody>
+          <a:bodyPr wrap="none" lIns="0" rIns="0" tIns="0" bIns="0">
+            <a:spAutoFit/>
+          </a:bodyPr>
+          <a:lstStyle/>
+          <a:p>
+            <a:pPr algn="r"/>
+            <a:r>
+              <a:rPr sz="1000">
+                <a:solidFill>
+                  <a:srgbClr val="8A939B"/>
+                </a:solidFill>
+                <a:hlinkClick r:id="rId3"/>
+              </a:rPr>
+              <a:t>cuinotes.com</a:t>
+            </a:r>
+            <a:r>
+              <a:rPr sz="1000">
+                <a:solidFill>
+                  <a:srgbClr val="8A939B"/>
+                </a:solidFill>
+              </a:rPr>
+              <a:t>  ·  31</a:t>
+            </a:r>
           </a:p>
         </p:txBody>
       </p:sp>
@@ -17129,6 +16482,10 @@
           </a:solidFill>
           <a:ln/>
         </p:spPr>
+        <p:txBody>
+          <a:bodyPr/>
+          <a:p/>
+        </p:txBody>
       </p:sp>
       <p:sp>
         <p:nvSpPr>
@@ -17383,79 +16740,44 @@
       </p:sp>
       <p:sp>
         <p:nvSpPr>
-          <p:cNvPr id="6" name="Text 4"/>
-          <p:cNvSpPr txBox="1"/>
-          <p:nvPr/>
-        </p:nvSpPr>
-        <p:spPr>
-          <a:xfrm>
-            <a:off x="640080" y="6446520"/>
-            <a:ext cx="8686800" cy="292608"/>
-          </a:xfrm>
-          <a:prstGeom prst="rect">
-            <a:avLst/>
-          </a:prstGeom>
-          <a:noFill/>
-          <a:ln/>
-        </p:spPr>
-        <p:txBody>
-          <a:bodyPr wrap="square" lIns="0" tIns="0" rIns="0" bIns="0" rtlCol="0" anchor="ctr"/>
-          <a:lstStyle/>
-          <a:p>
-            <a:pPr algn="l" indent="0" marL="0">
-              <a:buNone/>
-            </a:pPr>
-            <a:r>
-              <a:rPr lang="en-US" sz="900" dirty="0">
-                <a:solidFill>
-                  <a:srgbClr val="5D5D72"/>
-                </a:solidFill>
-                <a:latin typeface="Calibri" pitchFamily="34" charset="0"/>
-                <a:ea typeface="Calibri" pitchFamily="34" charset="-122"/>
-                <a:cs typeface="Calibri" pitchFamily="34" charset="-120"/>
-              </a:rPr>
-              <a:t>Usman Akram  •  COMSATS University Islamabad</a:t>
-            </a:r>
-            <a:endParaRPr lang="en-US" sz="900" dirty="0"/>
-          </a:p>
-        </p:txBody>
-      </p:sp>
-      <p:sp>
-        <p:nvSpPr>
-          <p:cNvPr id="7" name="Text 5"/>
-          <p:cNvSpPr txBox="1"/>
-          <p:nvPr/>
-        </p:nvSpPr>
-        <p:spPr>
-          <a:xfrm>
-            <a:off x="11155680" y="6446520"/>
-            <a:ext cx="457200" cy="292608"/>
-          </a:xfrm>
-          <a:prstGeom prst="rect">
-            <a:avLst/>
-          </a:prstGeom>
-          <a:noFill/>
-          <a:ln/>
-        </p:spPr>
-        <p:txBody>
-          <a:bodyPr wrap="square" lIns="0" tIns="0" rIns="0" bIns="0" rtlCol="0" anchor="ctr"/>
-          <a:lstStyle/>
-          <a:p>
-            <a:pPr algn="r" indent="0" marL="0">
-              <a:buNone/>
-            </a:pPr>
-            <a:r>
-              <a:rPr lang="en-US" sz="900" dirty="0">
-                <a:solidFill>
-                  <a:srgbClr val="5D5D72"/>
-                </a:solidFill>
-                <a:latin typeface="Calibri" pitchFamily="34" charset="0"/>
-                <a:ea typeface="Calibri" pitchFamily="34" charset="-122"/>
-                <a:cs typeface="Calibri" pitchFamily="34" charset="-120"/>
-              </a:rPr>
-              <a:t>4</a:t>
-            </a:r>
-            <a:endParaRPr lang="en-US" sz="900" dirty="0"/>
+          <p:cNvPr id="8" name="cuinotes-footer-mark"/>
+          <p:cNvSpPr txBox="1"/>
+          <p:nvPr/>
+        </p:nvSpPr>
+        <p:spPr>
+          <a:xfrm>
+            <a:off x="9951720" y="6455664"/>
+            <a:ext cx="2011680" cy="292608"/>
+          </a:xfrm>
+          <a:prstGeom prst="rect">
+            <a:avLst/>
+          </a:prstGeom>
+          <a:noFill/>
+        </p:spPr>
+        <p:txBody>
+          <a:bodyPr wrap="none" lIns="0" rIns="0" tIns="0" bIns="0">
+            <a:spAutoFit/>
+          </a:bodyPr>
+          <a:lstStyle/>
+          <a:p>
+            <a:pPr algn="r"/>
+            <a:r>
+              <a:rPr sz="1000">
+                <a:solidFill>
+                  <a:srgbClr val="8A939B"/>
+                </a:solidFill>
+                <a:hlinkClick r:id="rId3"/>
+              </a:rPr>
+              <a:t>cuinotes.com</a:t>
+            </a:r>
+            <a:r>
+              <a:rPr sz="1000">
+                <a:solidFill>
+                  <a:srgbClr val="8A939B"/>
+                </a:solidFill>
+              </a:rPr>
+              <a:t>  ·  4</a:t>
+            </a:r>
           </a:p>
         </p:txBody>
       </p:sp>
@@ -17595,6 +16917,10 @@
             <a:prstDash val="solid"/>
           </a:ln>
         </p:spPr>
+        <p:txBody>
+          <a:bodyPr/>
+          <a:p/>
+        </p:txBody>
       </p:sp>
       <p:sp>
         <p:nvSpPr>
@@ -17676,79 +17002,44 @@
       </p:sp>
       <p:sp>
         <p:nvSpPr>
-          <p:cNvPr id="7" name="Text 5"/>
-          <p:cNvSpPr txBox="1"/>
-          <p:nvPr/>
-        </p:nvSpPr>
-        <p:spPr>
-          <a:xfrm>
-            <a:off x="640080" y="6446520"/>
-            <a:ext cx="8686800" cy="292608"/>
-          </a:xfrm>
-          <a:prstGeom prst="rect">
-            <a:avLst/>
-          </a:prstGeom>
-          <a:noFill/>
-          <a:ln/>
-        </p:spPr>
-        <p:txBody>
-          <a:bodyPr wrap="square" lIns="0" tIns="0" rIns="0" bIns="0" rtlCol="0" anchor="ctr"/>
-          <a:lstStyle/>
-          <a:p>
-            <a:pPr algn="l" indent="0" marL="0">
-              <a:buNone/>
-            </a:pPr>
-            <a:r>
-              <a:rPr lang="en-US" sz="900" dirty="0">
-                <a:solidFill>
-                  <a:srgbClr val="5D5D72"/>
-                </a:solidFill>
-                <a:latin typeface="Calibri" pitchFamily="34" charset="0"/>
-                <a:ea typeface="Calibri" pitchFamily="34" charset="-122"/>
-                <a:cs typeface="Calibri" pitchFamily="34" charset="-120"/>
-              </a:rPr>
-              <a:t>Usman Akram  •  COMSATS University Islamabad</a:t>
-            </a:r>
-            <a:endParaRPr lang="en-US" sz="900" dirty="0"/>
-          </a:p>
-        </p:txBody>
-      </p:sp>
-      <p:sp>
-        <p:nvSpPr>
-          <p:cNvPr id="8" name="Text 6"/>
-          <p:cNvSpPr txBox="1"/>
-          <p:nvPr/>
-        </p:nvSpPr>
-        <p:spPr>
-          <a:xfrm>
-            <a:off x="11155680" y="6446520"/>
-            <a:ext cx="457200" cy="292608"/>
-          </a:xfrm>
-          <a:prstGeom prst="rect">
-            <a:avLst/>
-          </a:prstGeom>
-          <a:noFill/>
-          <a:ln/>
-        </p:spPr>
-        <p:txBody>
-          <a:bodyPr wrap="square" lIns="0" tIns="0" rIns="0" bIns="0" rtlCol="0" anchor="ctr"/>
-          <a:lstStyle/>
-          <a:p>
-            <a:pPr algn="r" indent="0" marL="0">
-              <a:buNone/>
-            </a:pPr>
-            <a:r>
-              <a:rPr lang="en-US" sz="900" dirty="0">
-                <a:solidFill>
-                  <a:srgbClr val="5D5D72"/>
-                </a:solidFill>
-                <a:latin typeface="Calibri" pitchFamily="34" charset="0"/>
-                <a:ea typeface="Calibri" pitchFamily="34" charset="-122"/>
-                <a:cs typeface="Calibri" pitchFamily="34" charset="-120"/>
-              </a:rPr>
-              <a:t>5</a:t>
-            </a:r>
-            <a:endParaRPr lang="en-US" sz="900" dirty="0"/>
+          <p:cNvPr id="9" name="cuinotes-footer-mark"/>
+          <p:cNvSpPr txBox="1"/>
+          <p:nvPr/>
+        </p:nvSpPr>
+        <p:spPr>
+          <a:xfrm>
+            <a:off x="9951720" y="6455664"/>
+            <a:ext cx="2011680" cy="292608"/>
+          </a:xfrm>
+          <a:prstGeom prst="rect">
+            <a:avLst/>
+          </a:prstGeom>
+          <a:noFill/>
+        </p:spPr>
+        <p:txBody>
+          <a:bodyPr wrap="none" lIns="0" rIns="0" tIns="0" bIns="0">
+            <a:spAutoFit/>
+          </a:bodyPr>
+          <a:lstStyle/>
+          <a:p>
+            <a:pPr algn="r"/>
+            <a:r>
+              <a:rPr sz="1000">
+                <a:solidFill>
+                  <a:srgbClr val="8A939B"/>
+                </a:solidFill>
+                <a:hlinkClick r:id="rId3"/>
+              </a:rPr>
+              <a:t>cuinotes.com</a:t>
+            </a:r>
+            <a:r>
+              <a:rPr sz="1000">
+                <a:solidFill>
+                  <a:srgbClr val="8A939B"/>
+                </a:solidFill>
+              </a:rPr>
+              <a:t>  ·  5</a:t>
+            </a:r>
           </a:p>
         </p:txBody>
       </p:sp>
@@ -17881,6 +17172,10 @@
           </a:solidFill>
           <a:ln/>
         </p:spPr>
+        <p:txBody>
+          <a:bodyPr/>
+          <a:p/>
+        </p:txBody>
       </p:sp>
       <p:sp>
         <p:nvSpPr>
@@ -17979,6 +17274,10 @@
           </a:solidFill>
           <a:ln/>
         </p:spPr>
+        <p:txBody>
+          <a:bodyPr/>
+          <a:p/>
+        </p:txBody>
       </p:sp>
       <p:sp>
         <p:nvSpPr>
@@ -18077,6 +17376,10 @@
           </a:solidFill>
           <a:ln/>
         </p:spPr>
+        <p:txBody>
+          <a:bodyPr/>
+          <a:p/>
+        </p:txBody>
       </p:sp>
       <p:sp>
         <p:nvSpPr>
@@ -18158,79 +17461,44 @@
       </p:sp>
       <p:sp>
         <p:nvSpPr>
-          <p:cNvPr id="13" name="Text 11"/>
-          <p:cNvSpPr txBox="1"/>
-          <p:nvPr/>
-        </p:nvSpPr>
-        <p:spPr>
-          <a:xfrm>
-            <a:off x="640080" y="6446520"/>
-            <a:ext cx="8686800" cy="292608"/>
-          </a:xfrm>
-          <a:prstGeom prst="rect">
-            <a:avLst/>
-          </a:prstGeom>
-          <a:noFill/>
-          <a:ln/>
-        </p:spPr>
-        <p:txBody>
-          <a:bodyPr wrap="square" lIns="0" tIns="0" rIns="0" bIns="0" rtlCol="0" anchor="ctr"/>
-          <a:lstStyle/>
-          <a:p>
-            <a:pPr algn="l" indent="0" marL="0">
-              <a:buNone/>
-            </a:pPr>
-            <a:r>
-              <a:rPr lang="en-US" sz="900" dirty="0">
-                <a:solidFill>
-                  <a:srgbClr val="5D5D72"/>
-                </a:solidFill>
-                <a:latin typeface="Calibri" pitchFamily="34" charset="0"/>
-                <a:ea typeface="Calibri" pitchFamily="34" charset="-122"/>
-                <a:cs typeface="Calibri" pitchFamily="34" charset="-120"/>
-              </a:rPr>
-              <a:t>Usman Akram  •  COMSATS University Islamabad</a:t>
-            </a:r>
-            <a:endParaRPr lang="en-US" sz="900" dirty="0"/>
-          </a:p>
-        </p:txBody>
-      </p:sp>
-      <p:sp>
-        <p:nvSpPr>
-          <p:cNvPr id="14" name="Text 12"/>
-          <p:cNvSpPr txBox="1"/>
-          <p:nvPr/>
-        </p:nvSpPr>
-        <p:spPr>
-          <a:xfrm>
-            <a:off x="11155680" y="6446520"/>
-            <a:ext cx="457200" cy="292608"/>
-          </a:xfrm>
-          <a:prstGeom prst="rect">
-            <a:avLst/>
-          </a:prstGeom>
-          <a:noFill/>
-          <a:ln/>
-        </p:spPr>
-        <p:txBody>
-          <a:bodyPr wrap="square" lIns="0" tIns="0" rIns="0" bIns="0" rtlCol="0" anchor="ctr"/>
-          <a:lstStyle/>
-          <a:p>
-            <a:pPr algn="r" indent="0" marL="0">
-              <a:buNone/>
-            </a:pPr>
-            <a:r>
-              <a:rPr lang="en-US" sz="900" dirty="0">
-                <a:solidFill>
-                  <a:srgbClr val="5D5D72"/>
-                </a:solidFill>
-                <a:latin typeface="Calibri" pitchFamily="34" charset="0"/>
-                <a:ea typeface="Calibri" pitchFamily="34" charset="-122"/>
-                <a:cs typeface="Calibri" pitchFamily="34" charset="-120"/>
-              </a:rPr>
-              <a:t>6</a:t>
-            </a:r>
-            <a:endParaRPr lang="en-US" sz="900" dirty="0"/>
+          <p:cNvPr id="15" name="cuinotes-footer-mark"/>
+          <p:cNvSpPr txBox="1"/>
+          <p:nvPr/>
+        </p:nvSpPr>
+        <p:spPr>
+          <a:xfrm>
+            <a:off x="9951720" y="6455664"/>
+            <a:ext cx="2011680" cy="292608"/>
+          </a:xfrm>
+          <a:prstGeom prst="rect">
+            <a:avLst/>
+          </a:prstGeom>
+          <a:noFill/>
+        </p:spPr>
+        <p:txBody>
+          <a:bodyPr wrap="none" lIns="0" rIns="0" tIns="0" bIns="0">
+            <a:spAutoFit/>
+          </a:bodyPr>
+          <a:lstStyle/>
+          <a:p>
+            <a:pPr algn="r"/>
+            <a:r>
+              <a:rPr sz="1000">
+                <a:solidFill>
+                  <a:srgbClr val="8A939B"/>
+                </a:solidFill>
+                <a:hlinkClick r:id="rId3"/>
+              </a:rPr>
+              <a:t>cuinotes.com</a:t>
+            </a:r>
+            <a:r>
+              <a:rPr sz="1000">
+                <a:solidFill>
+                  <a:srgbClr val="8A939B"/>
+                </a:solidFill>
+              </a:rPr>
+              <a:t>  ·  6</a:t>
+            </a:r>
           </a:p>
         </p:txBody>
       </p:sp>
@@ -18365,6 +17633,10 @@
           </a:solidFill>
           <a:ln/>
         </p:spPr>
+        <p:txBody>
+          <a:bodyPr/>
+          <a:p/>
+        </p:txBody>
       </p:sp>
       <p:sp>
         <p:nvSpPr>
@@ -18701,6 +17973,10 @@
             </a:outerShdw>
           </a:effectLst>
         </p:spPr>
+        <p:txBody>
+          <a:bodyPr/>
+          <a:p/>
+        </p:txBody>
       </p:sp>
       <p:pic>
         <p:nvPicPr>
@@ -18728,79 +18004,44 @@
       </p:pic>
       <p:sp>
         <p:nvSpPr>
-          <p:cNvPr id="8" name="Text 5"/>
-          <p:cNvSpPr txBox="1"/>
-          <p:nvPr/>
-        </p:nvSpPr>
-        <p:spPr>
-          <a:xfrm>
-            <a:off x="640080" y="6446520"/>
-            <a:ext cx="8686800" cy="292608"/>
-          </a:xfrm>
-          <a:prstGeom prst="rect">
-            <a:avLst/>
-          </a:prstGeom>
-          <a:noFill/>
-          <a:ln/>
-        </p:spPr>
-        <p:txBody>
-          <a:bodyPr wrap="square" lIns="0" tIns="0" rIns="0" bIns="0" rtlCol="0" anchor="ctr"/>
-          <a:lstStyle/>
-          <a:p>
-            <a:pPr algn="l" indent="0" marL="0">
-              <a:buNone/>
-            </a:pPr>
-            <a:r>
-              <a:rPr lang="en-US" sz="900" dirty="0">
-                <a:solidFill>
-                  <a:srgbClr val="5D5D72"/>
-                </a:solidFill>
-                <a:latin typeface="Calibri" pitchFamily="34" charset="0"/>
-                <a:ea typeface="Calibri" pitchFamily="34" charset="-122"/>
-                <a:cs typeface="Calibri" pitchFamily="34" charset="-120"/>
-              </a:rPr>
-              <a:t>Usman Akram  •  COMSATS University Islamabad</a:t>
-            </a:r>
-            <a:endParaRPr lang="en-US" sz="900" dirty="0"/>
-          </a:p>
-        </p:txBody>
-      </p:sp>
-      <p:sp>
-        <p:nvSpPr>
-          <p:cNvPr id="9" name="Text 6"/>
-          <p:cNvSpPr txBox="1"/>
-          <p:nvPr/>
-        </p:nvSpPr>
-        <p:spPr>
-          <a:xfrm>
-            <a:off x="11155680" y="6446520"/>
-            <a:ext cx="457200" cy="292608"/>
-          </a:xfrm>
-          <a:prstGeom prst="rect">
-            <a:avLst/>
-          </a:prstGeom>
-          <a:noFill/>
-          <a:ln/>
-        </p:spPr>
-        <p:txBody>
-          <a:bodyPr wrap="square" lIns="0" tIns="0" rIns="0" bIns="0" rtlCol="0" anchor="ctr"/>
-          <a:lstStyle/>
-          <a:p>
-            <a:pPr algn="r" indent="0" marL="0">
-              <a:buNone/>
-            </a:pPr>
-            <a:r>
-              <a:rPr lang="en-US" sz="900" dirty="0">
-                <a:solidFill>
-                  <a:srgbClr val="5D5D72"/>
-                </a:solidFill>
-                <a:latin typeface="Calibri" pitchFamily="34" charset="0"/>
-                <a:ea typeface="Calibri" pitchFamily="34" charset="-122"/>
-                <a:cs typeface="Calibri" pitchFamily="34" charset="-120"/>
-              </a:rPr>
-              <a:t>7</a:t>
-            </a:r>
-            <a:endParaRPr lang="en-US" sz="900" dirty="0"/>
+          <p:cNvPr id="10" name="cuinotes-footer-mark"/>
+          <p:cNvSpPr txBox="1"/>
+          <p:nvPr/>
+        </p:nvSpPr>
+        <p:spPr>
+          <a:xfrm>
+            <a:off x="9951720" y="6455664"/>
+            <a:ext cx="2011680" cy="292608"/>
+          </a:xfrm>
+          <a:prstGeom prst="rect">
+            <a:avLst/>
+          </a:prstGeom>
+          <a:noFill/>
+        </p:spPr>
+        <p:txBody>
+          <a:bodyPr wrap="none" lIns="0" rIns="0" tIns="0" bIns="0">
+            <a:spAutoFit/>
+          </a:bodyPr>
+          <a:lstStyle/>
+          <a:p>
+            <a:pPr algn="r"/>
+            <a:r>
+              <a:rPr sz="1000">
+                <a:solidFill>
+                  <a:srgbClr val="8A939B"/>
+                </a:solidFill>
+                <a:hlinkClick r:id="rId4"/>
+              </a:rPr>
+              <a:t>cuinotes.com</a:t>
+            </a:r>
+            <a:r>
+              <a:rPr sz="1000">
+                <a:solidFill>
+                  <a:srgbClr val="8A939B"/>
+                </a:solidFill>
+              </a:rPr>
+              <a:t>  ·  7</a:t>
+            </a:r>
           </a:p>
         </p:txBody>
       </p:sp>
@@ -18940,6 +18181,10 @@
             <a:prstDash val="solid"/>
           </a:ln>
         </p:spPr>
+        <p:txBody>
+          <a:bodyPr/>
+          <a:p/>
+        </p:txBody>
       </p:sp>
       <p:sp>
         <p:nvSpPr>
@@ -19021,79 +18266,44 @@
       </p:sp>
       <p:sp>
         <p:nvSpPr>
-          <p:cNvPr id="7" name="Text 5"/>
-          <p:cNvSpPr txBox="1"/>
-          <p:nvPr/>
-        </p:nvSpPr>
-        <p:spPr>
-          <a:xfrm>
-            <a:off x="640080" y="6446520"/>
-            <a:ext cx="8686800" cy="292608"/>
-          </a:xfrm>
-          <a:prstGeom prst="rect">
-            <a:avLst/>
-          </a:prstGeom>
-          <a:noFill/>
-          <a:ln/>
-        </p:spPr>
-        <p:txBody>
-          <a:bodyPr wrap="square" lIns="0" tIns="0" rIns="0" bIns="0" rtlCol="0" anchor="ctr"/>
-          <a:lstStyle/>
-          <a:p>
-            <a:pPr algn="l" indent="0" marL="0">
-              <a:buNone/>
-            </a:pPr>
-            <a:r>
-              <a:rPr lang="en-US" sz="900" dirty="0">
-                <a:solidFill>
-                  <a:srgbClr val="5D5D72"/>
-                </a:solidFill>
-                <a:latin typeface="Calibri" pitchFamily="34" charset="0"/>
-                <a:ea typeface="Calibri" pitchFamily="34" charset="-122"/>
-                <a:cs typeface="Calibri" pitchFamily="34" charset="-120"/>
-              </a:rPr>
-              <a:t>Usman Akram  •  COMSATS University Islamabad</a:t>
-            </a:r>
-            <a:endParaRPr lang="en-US" sz="900" dirty="0"/>
-          </a:p>
-        </p:txBody>
-      </p:sp>
-      <p:sp>
-        <p:nvSpPr>
-          <p:cNvPr id="8" name="Text 6"/>
-          <p:cNvSpPr txBox="1"/>
-          <p:nvPr/>
-        </p:nvSpPr>
-        <p:spPr>
-          <a:xfrm>
-            <a:off x="11155680" y="6446520"/>
-            <a:ext cx="457200" cy="292608"/>
-          </a:xfrm>
-          <a:prstGeom prst="rect">
-            <a:avLst/>
-          </a:prstGeom>
-          <a:noFill/>
-          <a:ln/>
-        </p:spPr>
-        <p:txBody>
-          <a:bodyPr wrap="square" lIns="0" tIns="0" rIns="0" bIns="0" rtlCol="0" anchor="ctr"/>
-          <a:lstStyle/>
-          <a:p>
-            <a:pPr algn="r" indent="0" marL="0">
-              <a:buNone/>
-            </a:pPr>
-            <a:r>
-              <a:rPr lang="en-US" sz="900" dirty="0">
-                <a:solidFill>
-                  <a:srgbClr val="5D5D72"/>
-                </a:solidFill>
-                <a:latin typeface="Calibri" pitchFamily="34" charset="0"/>
-                <a:ea typeface="Calibri" pitchFamily="34" charset="-122"/>
-                <a:cs typeface="Calibri" pitchFamily="34" charset="-120"/>
-              </a:rPr>
-              <a:t>8</a:t>
-            </a:r>
-            <a:endParaRPr lang="en-US" sz="900" dirty="0"/>
+          <p:cNvPr id="9" name="cuinotes-footer-mark"/>
+          <p:cNvSpPr txBox="1"/>
+          <p:nvPr/>
+        </p:nvSpPr>
+        <p:spPr>
+          <a:xfrm>
+            <a:off x="9951720" y="6455664"/>
+            <a:ext cx="2011680" cy="292608"/>
+          </a:xfrm>
+          <a:prstGeom prst="rect">
+            <a:avLst/>
+          </a:prstGeom>
+          <a:noFill/>
+        </p:spPr>
+        <p:txBody>
+          <a:bodyPr wrap="none" lIns="0" rIns="0" tIns="0" bIns="0">
+            <a:spAutoFit/>
+          </a:bodyPr>
+          <a:lstStyle/>
+          <a:p>
+            <a:pPr algn="r"/>
+            <a:r>
+              <a:rPr sz="1000">
+                <a:solidFill>
+                  <a:srgbClr val="8A939B"/>
+                </a:solidFill>
+                <a:hlinkClick r:id="rId3"/>
+              </a:rPr>
+              <a:t>cuinotes.com</a:t>
+            </a:r>
+            <a:r>
+              <a:rPr sz="1000">
+                <a:solidFill>
+                  <a:srgbClr val="8A939B"/>
+                </a:solidFill>
+              </a:rPr>
+              <a:t>  ·  8</a:t>
+            </a:r>
           </a:p>
         </p:txBody>
       </p:sp>
@@ -19228,6 +18438,10 @@
           </a:solidFill>
           <a:ln/>
         </p:spPr>
+        <p:txBody>
+          <a:bodyPr/>
+          <a:p/>
+        </p:txBody>
       </p:sp>
       <p:sp>
         <p:nvSpPr>
@@ -19481,79 +18695,44 @@
       </p:sp>
       <p:sp>
         <p:nvSpPr>
-          <p:cNvPr id="7" name="Text 5"/>
-          <p:cNvSpPr txBox="1"/>
-          <p:nvPr/>
-        </p:nvSpPr>
-        <p:spPr>
-          <a:xfrm>
-            <a:off x="640080" y="6446520"/>
-            <a:ext cx="8686800" cy="292608"/>
-          </a:xfrm>
-          <a:prstGeom prst="rect">
-            <a:avLst/>
-          </a:prstGeom>
-          <a:noFill/>
-          <a:ln/>
-        </p:spPr>
-        <p:txBody>
-          <a:bodyPr wrap="square" lIns="0" tIns="0" rIns="0" bIns="0" rtlCol="0" anchor="ctr"/>
-          <a:lstStyle/>
-          <a:p>
-            <a:pPr algn="l" indent="0" marL="0">
-              <a:buNone/>
-            </a:pPr>
-            <a:r>
-              <a:rPr lang="en-US" sz="900" dirty="0">
-                <a:solidFill>
-                  <a:srgbClr val="5D5D72"/>
-                </a:solidFill>
-                <a:latin typeface="Calibri" pitchFamily="34" charset="0"/>
-                <a:ea typeface="Calibri" pitchFamily="34" charset="-122"/>
-                <a:cs typeface="Calibri" pitchFamily="34" charset="-120"/>
-              </a:rPr>
-              <a:t>Usman Akram  •  COMSATS University Islamabad</a:t>
-            </a:r>
-            <a:endParaRPr lang="en-US" sz="900" dirty="0"/>
-          </a:p>
-        </p:txBody>
-      </p:sp>
-      <p:sp>
-        <p:nvSpPr>
-          <p:cNvPr id="8" name="Text 6"/>
-          <p:cNvSpPr txBox="1"/>
-          <p:nvPr/>
-        </p:nvSpPr>
-        <p:spPr>
-          <a:xfrm>
-            <a:off x="11155680" y="6446520"/>
-            <a:ext cx="457200" cy="292608"/>
-          </a:xfrm>
-          <a:prstGeom prst="rect">
-            <a:avLst/>
-          </a:prstGeom>
-          <a:noFill/>
-          <a:ln/>
-        </p:spPr>
-        <p:txBody>
-          <a:bodyPr wrap="square" lIns="0" tIns="0" rIns="0" bIns="0" rtlCol="0" anchor="ctr"/>
-          <a:lstStyle/>
-          <a:p>
-            <a:pPr algn="r" indent="0" marL="0">
-              <a:buNone/>
-            </a:pPr>
-            <a:r>
-              <a:rPr lang="en-US" sz="900" dirty="0">
-                <a:solidFill>
-                  <a:srgbClr val="5D5D72"/>
-                </a:solidFill>
-                <a:latin typeface="Calibri" pitchFamily="34" charset="0"/>
-                <a:ea typeface="Calibri" pitchFamily="34" charset="-122"/>
-                <a:cs typeface="Calibri" pitchFamily="34" charset="-120"/>
-              </a:rPr>
-              <a:t>9</a:t>
-            </a:r>
-            <a:endParaRPr lang="en-US" sz="900" dirty="0"/>
+          <p:cNvPr id="9" name="cuinotes-footer-mark"/>
+          <p:cNvSpPr txBox="1"/>
+          <p:nvPr/>
+        </p:nvSpPr>
+        <p:spPr>
+          <a:xfrm>
+            <a:off x="9951720" y="6455664"/>
+            <a:ext cx="2011680" cy="292608"/>
+          </a:xfrm>
+          <a:prstGeom prst="rect">
+            <a:avLst/>
+          </a:prstGeom>
+          <a:noFill/>
+        </p:spPr>
+        <p:txBody>
+          <a:bodyPr wrap="none" lIns="0" rIns="0" tIns="0" bIns="0">
+            <a:spAutoFit/>
+          </a:bodyPr>
+          <a:lstStyle/>
+          <a:p>
+            <a:pPr algn="r"/>
+            <a:r>
+              <a:rPr sz="1000">
+                <a:solidFill>
+                  <a:srgbClr val="8A939B"/>
+                </a:solidFill>
+                <a:hlinkClick r:id="rId3"/>
+              </a:rPr>
+              <a:t>cuinotes.com</a:t>
+            </a:r>
+            <a:r>
+              <a:rPr sz="1000">
+                <a:solidFill>
+                  <a:srgbClr val="8A939B"/>
+                </a:solidFill>
+              </a:rPr>
+              <a:t>  ·  9</a:t>
+            </a:r>
           </a:p>
         </p:txBody>
       </p:sp>

--- a/slides/CSC336-Lecture-28-Hooks-and-State-Management.pptx
+++ b/slides/CSC336-Lecture-28-Hooks-and-State-Management.pptx
@@ -4251,9 +4251,13 @@
             </a:avLst>
           </a:prstGeom>
           <a:solidFill>
-            <a:srgbClr val="1E1E4C"/>
+            <a:srgbClr val="F7F8F9"/>
           </a:solidFill>
-          <a:ln/>
+          <a:ln w="9525">
+            <a:solidFill>
+              <a:srgbClr val="D0D5DD"/>
+            </a:solidFill>
+          </a:ln>
         </p:spPr>
         <p:txBody>
           <a:bodyPr/>
@@ -4290,7 +4294,7 @@
             <a:r>
               <a:rPr lang="en-US" sz="1045" dirty="0">
                 <a:solidFill>
-                  <a:srgbClr val="C9D3F5"/>
+                  <a:srgbClr val="1F2429"/>
                 </a:solidFill>
                 <a:latin typeface="Courier New" pitchFamily="34" charset="0"/>
                 <a:ea typeface="Courier New" pitchFamily="34" charset="-122"/>
@@ -4310,7 +4314,7 @@
             <a:r>
               <a:rPr lang="en-US" sz="1045" dirty="0">
                 <a:solidFill>
-                  <a:srgbClr val="C9D3F5"/>
+                  <a:srgbClr val="1F2429"/>
                 </a:solidFill>
                 <a:latin typeface="Courier New" pitchFamily="34" charset="0"/>
                 <a:ea typeface="Courier New" pitchFamily="34" charset="-122"/>
@@ -4330,7 +4334,7 @@
             <a:r>
               <a:rPr lang="en-US" sz="1045" dirty="0">
                 <a:solidFill>
-                  <a:srgbClr val="C9D3F5"/>
+                  <a:srgbClr val="1F2429"/>
                 </a:solidFill>
                 <a:latin typeface="Courier New" pitchFamily="34" charset="0"/>
                 <a:ea typeface="Courier New" pitchFamily="34" charset="-122"/>
@@ -4350,7 +4354,7 @@
             <a:r>
               <a:rPr lang="en-US" sz="1045" dirty="0">
                 <a:solidFill>
-                  <a:srgbClr val="C9D3F5"/>
+                  <a:srgbClr val="1F2429"/>
                 </a:solidFill>
                 <a:latin typeface="Courier New" pitchFamily="34" charset="0"/>
                 <a:ea typeface="Courier New" pitchFamily="34" charset="-122"/>
@@ -4370,7 +4374,7 @@
             <a:r>
               <a:rPr lang="en-US" sz="1045" dirty="0">
                 <a:solidFill>
-                  <a:srgbClr val="C9D3F5"/>
+                  <a:srgbClr val="1F2429"/>
                 </a:solidFill>
                 <a:latin typeface="Courier New" pitchFamily="34" charset="0"/>
                 <a:ea typeface="Courier New" pitchFamily="34" charset="-122"/>
@@ -4390,7 +4394,7 @@
             <a:r>
               <a:rPr lang="en-US" sz="1045" dirty="0">
                 <a:solidFill>
-                  <a:srgbClr val="C9D3F5"/>
+                  <a:srgbClr val="1F2429"/>
                 </a:solidFill>
                 <a:latin typeface="Courier New" pitchFamily="34" charset="0"/>
                 <a:ea typeface="Courier New" pitchFamily="34" charset="-122"/>
@@ -4410,7 +4414,7 @@
             <a:r>
               <a:rPr lang="en-US" sz="1045" dirty="0">
                 <a:solidFill>
-                  <a:srgbClr val="C9D3F5"/>
+                  <a:srgbClr val="1F2429"/>
                 </a:solidFill>
                 <a:latin typeface="Courier New" pitchFamily="34" charset="0"/>
                 <a:ea typeface="Courier New" pitchFamily="34" charset="-122"/>
@@ -4430,7 +4434,7 @@
             <a:r>
               <a:rPr lang="en-US" sz="1045" dirty="0">
                 <a:solidFill>
-                  <a:srgbClr val="C9D3F5"/>
+                  <a:srgbClr val="1F2429"/>
                 </a:solidFill>
                 <a:latin typeface="Courier New" pitchFamily="34" charset="0"/>
                 <a:ea typeface="Courier New" pitchFamily="34" charset="-122"/>
@@ -4450,7 +4454,7 @@
             <a:r>
               <a:rPr lang="en-US" sz="1045" dirty="0">
                 <a:solidFill>
-                  <a:srgbClr val="C9D3F5"/>
+                  <a:srgbClr val="1F2429"/>
                 </a:solidFill>
                 <a:latin typeface="Courier New" pitchFamily="34" charset="0"/>
                 <a:ea typeface="Courier New" pitchFamily="34" charset="-122"/>
@@ -4470,7 +4474,7 @@
             <a:r>
               <a:rPr lang="en-US" sz="1045" dirty="0">
                 <a:solidFill>
-                  <a:srgbClr val="C9D3F5"/>
+                  <a:srgbClr val="1F2429"/>
                 </a:solidFill>
                 <a:latin typeface="Courier New" pitchFamily="34" charset="0"/>
                 <a:ea typeface="Courier New" pitchFamily="34" charset="-122"/>
@@ -4490,7 +4494,7 @@
             <a:r>
               <a:rPr lang="en-US" sz="1045" dirty="0">
                 <a:solidFill>
-                  <a:srgbClr val="C9D3F5"/>
+                  <a:srgbClr val="1F2429"/>
                 </a:solidFill>
                 <a:latin typeface="Courier New" pitchFamily="34" charset="0"/>
                 <a:ea typeface="Courier New" pitchFamily="34" charset="-122"/>
@@ -4510,7 +4514,7 @@
             <a:r>
               <a:rPr lang="en-US" sz="1045" dirty="0">
                 <a:solidFill>
-                  <a:srgbClr val="C9D3F5"/>
+                  <a:srgbClr val="1F2429"/>
                 </a:solidFill>
                 <a:latin typeface="Courier New" pitchFamily="34" charset="0"/>
                 <a:ea typeface="Courier New" pitchFamily="34" charset="-122"/>
@@ -4530,7 +4534,7 @@
             <a:r>
               <a:rPr lang="en-US" sz="1045" dirty="0">
                 <a:solidFill>
-                  <a:srgbClr val="C9D3F5"/>
+                  <a:srgbClr val="1F2429"/>
                 </a:solidFill>
                 <a:latin typeface="Courier New" pitchFamily="34" charset="0"/>
                 <a:ea typeface="Courier New" pitchFamily="34" charset="-122"/>
@@ -4550,7 +4554,7 @@
             <a:r>
               <a:rPr lang="en-US" sz="1045" dirty="0">
                 <a:solidFill>
-                  <a:srgbClr val="C9D3F5"/>
+                  <a:srgbClr val="1F2429"/>
                 </a:solidFill>
                 <a:latin typeface="Courier New" pitchFamily="34" charset="0"/>
                 <a:ea typeface="Courier New" pitchFamily="34" charset="-122"/>
@@ -4570,7 +4574,7 @@
             <a:r>
               <a:rPr lang="en-US" sz="1045" dirty="0">
                 <a:solidFill>
-                  <a:srgbClr val="C9D3F5"/>
+                  <a:srgbClr val="1F2429"/>
                 </a:solidFill>
                 <a:latin typeface="Courier New" pitchFamily="34" charset="0"/>
                 <a:ea typeface="Courier New" pitchFamily="34" charset="-122"/>
@@ -4590,7 +4594,7 @@
             <a:r>
               <a:rPr lang="en-US" sz="1045" dirty="0">
                 <a:solidFill>
-                  <a:srgbClr val="C9D3F5"/>
+                  <a:srgbClr val="1F2429"/>
                 </a:solidFill>
                 <a:latin typeface="Courier New" pitchFamily="34" charset="0"/>
                 <a:ea typeface="Courier New" pitchFamily="34" charset="-122"/>
@@ -4610,7 +4614,7 @@
             <a:r>
               <a:rPr lang="en-US" sz="1045" dirty="0">
                 <a:solidFill>
-                  <a:srgbClr val="C9D3F5"/>
+                  <a:srgbClr val="1F2429"/>
                 </a:solidFill>
                 <a:latin typeface="Courier New" pitchFamily="34" charset="0"/>
                 <a:ea typeface="Courier New" pitchFamily="34" charset="-122"/>
@@ -5519,7 +5523,7 @@
         <p:spPr>
           <a:xfrm>
             <a:off x="640080" y="1965960"/>
-            <a:ext cx="10911535" cy="1828800"/>
+            <a:ext cx="10911535" cy="3657600"/>
           </a:xfrm>
           <a:prstGeom prst="roundRect">
             <a:avLst>
@@ -5550,7 +5554,7 @@
         <p:spPr>
           <a:xfrm>
             <a:off x="868680" y="2103120"/>
-            <a:ext cx="10454335" cy="274320"/>
+            <a:ext cx="10454335" cy="400000"/>
           </a:xfrm>
           <a:prstGeom prst="rect">
             <a:avLst/>
@@ -5566,7 +5570,7 @@
               <a:buNone/>
             </a:pPr>
             <a:r>
-              <a:rPr lang="en-US" sz="1000" b="1" spc="200" kern="0" dirty="0">
+              <a:rPr lang="en-US" sz="1800" b="1" spc="200" kern="0" dirty="0">
                 <a:solidFill>
                   <a:srgbClr val="8A3A12"/>
                 </a:solidFill>
@@ -5576,7 +5580,7 @@
               </a:rPr>
               <a:t>WARNING</a:t>
             </a:r>
-            <a:endParaRPr lang="en-US" sz="1000" dirty="0"/>
+            <a:endParaRPr lang="en-US" sz="1800" dirty="0"/>
           </a:p>
         </p:txBody>
       </p:sp>
@@ -5588,24 +5592,24 @@
         </p:nvSpPr>
         <p:spPr>
           <a:xfrm>
-            <a:off x="868680" y="2404872"/>
-            <a:ext cx="10454335" cy="1234440"/>
-          </a:xfrm>
-          <a:prstGeom prst="rect">
-            <a:avLst/>
-          </a:prstGeom>
-          <a:noFill/>
-          <a:ln/>
-        </p:spPr>
-        <p:txBody>
-          <a:bodyPr wrap="square" lIns="0" tIns="0" rIns="0" bIns="0" rtlCol="0" anchor="t"/>
-          <a:lstStyle/>
-          <a:p>
-            <a:pPr indent="0" marL="0">
-              <a:buNone/>
-            </a:pPr>
-            <a:r>
-              <a:rPr lang="en-US" sz="1250" dirty="0">
+            <a:off x="868680" y="2795960"/>
+            <a:ext cx="10454335" cy="2500000"/>
+          </a:xfrm>
+          <a:prstGeom prst="rect">
+            <a:avLst/>
+          </a:prstGeom>
+          <a:noFill/>
+          <a:ln/>
+        </p:spPr>
+        <p:txBody>
+          <a:bodyPr wrap="square" lIns="0" tIns="0" rIns="0" bIns="0" rtlCol="0" anchor="ctr"/>
+          <a:lstStyle/>
+          <a:p>
+            <a:pPr indent="0" marL="0">
+              <a:buNone/>
+            </a:pPr>
+            <a:r>
+              <a:rPr lang="en-US" sz="2800" dirty="0">
                 <a:solidFill>
                   <a:srgbClr val="26262F"/>
                 </a:solidFill>
@@ -5615,7 +5619,7 @@
               </a:rPr>
               <a:t>Any prop or state variable the effect reads should generally be listed in the dependency array. Leaving one out is a common source of bugs where the effect keeps using a stale, outdated value — most ESLint React setups warn about this.</a:t>
             </a:r>
-            <a:endParaRPr lang="en-US" sz="1250" dirty="0"/>
+            <a:endParaRPr lang="en-US" sz="2800" dirty="0"/>
           </a:p>
         </p:txBody>
       </p:sp>
@@ -6248,9 +6252,13 @@
             </a:avLst>
           </a:prstGeom>
           <a:solidFill>
-            <a:srgbClr val="1E1E4C"/>
+            <a:srgbClr val="F7F8F9"/>
           </a:solidFill>
-          <a:ln/>
+          <a:ln w="9525">
+            <a:solidFill>
+              <a:srgbClr val="D0D5DD"/>
+            </a:solidFill>
+          </a:ln>
         </p:spPr>
         <p:txBody>
           <a:bodyPr/>
@@ -6287,7 +6295,7 @@
             <a:r>
               <a:rPr lang="en-US" sz="1400" dirty="0">
                 <a:solidFill>
-                  <a:srgbClr val="C9D3F5"/>
+                  <a:srgbClr val="1F2429"/>
                 </a:solidFill>
                 <a:latin typeface="Courier New" pitchFamily="34" charset="0"/>
                 <a:ea typeface="Courier New" pitchFamily="34" charset="-122"/>
@@ -6307,7 +6315,7 @@
             <a:r>
               <a:rPr lang="en-US" sz="1400" dirty="0">
                 <a:solidFill>
-                  <a:srgbClr val="C9D3F5"/>
+                  <a:srgbClr val="1F2429"/>
                 </a:solidFill>
                 <a:latin typeface="Courier New" pitchFamily="34" charset="0"/>
                 <a:ea typeface="Courier New" pitchFamily="34" charset="-122"/>
@@ -6327,7 +6335,7 @@
             <a:r>
               <a:rPr lang="en-US" sz="1400" dirty="0">
                 <a:solidFill>
-                  <a:srgbClr val="C9D3F5"/>
+                  <a:srgbClr val="1F2429"/>
                 </a:solidFill>
                 <a:latin typeface="Courier New" pitchFamily="34" charset="0"/>
                 <a:ea typeface="Courier New" pitchFamily="34" charset="-122"/>
@@ -6347,7 +6355,7 @@
             <a:r>
               <a:rPr lang="en-US" sz="1400" dirty="0">
                 <a:solidFill>
-                  <a:srgbClr val="C9D3F5"/>
+                  <a:srgbClr val="1F2429"/>
                 </a:solidFill>
                 <a:latin typeface="Courier New" pitchFamily="34" charset="0"/>
                 <a:ea typeface="Courier New" pitchFamily="34" charset="-122"/>
@@ -6367,7 +6375,7 @@
             <a:r>
               <a:rPr lang="en-US" sz="1400" dirty="0">
                 <a:solidFill>
-                  <a:srgbClr val="C9D3F5"/>
+                  <a:srgbClr val="1F2429"/>
                 </a:solidFill>
                 <a:latin typeface="Courier New" pitchFamily="34" charset="0"/>
                 <a:ea typeface="Courier New" pitchFamily="34" charset="-122"/>
@@ -6387,7 +6395,7 @@
             <a:r>
               <a:rPr lang="en-US" sz="1400" dirty="0">
                 <a:solidFill>
-                  <a:srgbClr val="C9D3F5"/>
+                  <a:srgbClr val="1F2429"/>
                 </a:solidFill>
                 <a:latin typeface="Courier New" pitchFamily="34" charset="0"/>
                 <a:ea typeface="Courier New" pitchFamily="34" charset="-122"/>
@@ -6407,7 +6415,7 @@
             <a:r>
               <a:rPr lang="en-US" sz="1400" dirty="0">
                 <a:solidFill>
-                  <a:srgbClr val="C9D3F5"/>
+                  <a:srgbClr val="1F2429"/>
                 </a:solidFill>
                 <a:latin typeface="Courier New" pitchFamily="34" charset="0"/>
                 <a:ea typeface="Courier New" pitchFamily="34" charset="-122"/>
@@ -6427,7 +6435,7 @@
             <a:r>
               <a:rPr lang="en-US" sz="1400" dirty="0">
                 <a:solidFill>
-                  <a:srgbClr val="C9D3F5"/>
+                  <a:srgbClr val="1F2429"/>
                 </a:solidFill>
                 <a:latin typeface="Courier New" pitchFamily="34" charset="0"/>
                 <a:ea typeface="Courier New" pitchFamily="34" charset="-122"/>
@@ -6447,7 +6455,7 @@
             <a:r>
               <a:rPr lang="en-US" sz="1400" dirty="0">
                 <a:solidFill>
-                  <a:srgbClr val="C9D3F5"/>
+                  <a:srgbClr val="1F2429"/>
                 </a:solidFill>
                 <a:latin typeface="Courier New" pitchFamily="34" charset="0"/>
                 <a:ea typeface="Courier New" pitchFamily="34" charset="-122"/>
@@ -6467,7 +6475,7 @@
             <a:r>
               <a:rPr lang="en-US" sz="1400" dirty="0">
                 <a:solidFill>
-                  <a:srgbClr val="C9D3F5"/>
+                  <a:srgbClr val="1F2429"/>
                 </a:solidFill>
                 <a:latin typeface="Courier New" pitchFamily="34" charset="0"/>
                 <a:ea typeface="Courier New" pitchFamily="34" charset="-122"/>
@@ -6487,7 +6495,7 @@
             <a:r>
               <a:rPr lang="en-US" sz="1400" dirty="0">
                 <a:solidFill>
-                  <a:srgbClr val="C9D3F5"/>
+                  <a:srgbClr val="1F2429"/>
                 </a:solidFill>
                 <a:latin typeface="Courier New" pitchFamily="34" charset="0"/>
                 <a:ea typeface="Courier New" pitchFamily="34" charset="-122"/>
@@ -8013,9 +8021,13 @@
             </a:avLst>
           </a:prstGeom>
           <a:solidFill>
-            <a:srgbClr val="1E1E4C"/>
+            <a:srgbClr val="F7F8F9"/>
           </a:solidFill>
-          <a:ln/>
+          <a:ln w="9525">
+            <a:solidFill>
+              <a:srgbClr val="D0D5DD"/>
+            </a:solidFill>
+          </a:ln>
         </p:spPr>
         <p:txBody>
           <a:bodyPr/>
@@ -8052,7 +8064,7 @@
             <a:r>
               <a:rPr lang="en-US" sz="1300" dirty="0">
                 <a:solidFill>
-                  <a:srgbClr val="C9D3F5"/>
+                  <a:srgbClr val="1F2429"/>
                 </a:solidFill>
                 <a:latin typeface="Courier New" pitchFamily="34" charset="0"/>
                 <a:ea typeface="Courier New" pitchFamily="34" charset="-122"/>
@@ -8072,7 +8084,7 @@
             <a:r>
               <a:rPr lang="en-US" sz="1300" dirty="0">
                 <a:solidFill>
-                  <a:srgbClr val="C9D3F5"/>
+                  <a:srgbClr val="1F2429"/>
                 </a:solidFill>
                 <a:latin typeface="Courier New" pitchFamily="34" charset="0"/>
                 <a:ea typeface="Courier New" pitchFamily="34" charset="-122"/>
@@ -8101,7 +8113,7 @@
             <a:r>
               <a:rPr lang="en-US" sz="1300" dirty="0">
                 <a:solidFill>
-                  <a:srgbClr val="C9D3F5"/>
+                  <a:srgbClr val="1F2429"/>
                 </a:solidFill>
                 <a:latin typeface="Courier New" pitchFamily="34" charset="0"/>
                 <a:ea typeface="Courier New" pitchFamily="34" charset="-122"/>
@@ -8121,7 +8133,7 @@
             <a:r>
               <a:rPr lang="en-US" sz="1300" dirty="0">
                 <a:solidFill>
-                  <a:srgbClr val="C9D3F5"/>
+                  <a:srgbClr val="1F2429"/>
                 </a:solidFill>
                 <a:latin typeface="Courier New" pitchFamily="34" charset="0"/>
                 <a:ea typeface="Courier New" pitchFamily="34" charset="-122"/>
@@ -8141,7 +8153,7 @@
             <a:r>
               <a:rPr lang="en-US" sz="1300" dirty="0">
                 <a:solidFill>
-                  <a:srgbClr val="C9D3F5"/>
+                  <a:srgbClr val="1F2429"/>
                 </a:solidFill>
                 <a:latin typeface="Courier New" pitchFamily="34" charset="0"/>
                 <a:ea typeface="Courier New" pitchFamily="34" charset="-122"/>
@@ -8170,7 +8182,7 @@
             <a:r>
               <a:rPr lang="en-US" sz="1300" dirty="0">
                 <a:solidFill>
-                  <a:srgbClr val="C9D3F5"/>
+                  <a:srgbClr val="1F2429"/>
                 </a:solidFill>
                 <a:latin typeface="Courier New" pitchFamily="34" charset="0"/>
                 <a:ea typeface="Courier New" pitchFamily="34" charset="-122"/>
@@ -8190,7 +8202,7 @@
             <a:r>
               <a:rPr lang="en-US" sz="1300" dirty="0">
                 <a:solidFill>
-                  <a:srgbClr val="C9D3F5"/>
+                  <a:srgbClr val="1F2429"/>
                 </a:solidFill>
                 <a:latin typeface="Courier New" pitchFamily="34" charset="0"/>
                 <a:ea typeface="Courier New" pitchFamily="34" charset="-122"/>
@@ -8210,7 +8222,7 @@
             <a:r>
               <a:rPr lang="en-US" sz="1300" dirty="0">
                 <a:solidFill>
-                  <a:srgbClr val="C9D3F5"/>
+                  <a:srgbClr val="1F2429"/>
                 </a:solidFill>
                 <a:latin typeface="Courier New" pitchFamily="34" charset="0"/>
                 <a:ea typeface="Courier New" pitchFamily="34" charset="-122"/>
@@ -8230,7 +8242,7 @@
             <a:r>
               <a:rPr lang="en-US" sz="1300" dirty="0">
                 <a:solidFill>
-                  <a:srgbClr val="C9D3F5"/>
+                  <a:srgbClr val="1F2429"/>
                 </a:solidFill>
                 <a:latin typeface="Courier New" pitchFamily="34" charset="0"/>
                 <a:ea typeface="Courier New" pitchFamily="34" charset="-122"/>
@@ -9596,9 +9608,13 @@
             </a:avLst>
           </a:prstGeom>
           <a:solidFill>
-            <a:srgbClr val="1E1E4C"/>
+            <a:srgbClr val="F7F8F9"/>
           </a:solidFill>
-          <a:ln/>
+          <a:ln w="9525">
+            <a:solidFill>
+              <a:srgbClr val="D0D5DD"/>
+            </a:solidFill>
+          </a:ln>
         </p:spPr>
         <p:txBody>
           <a:bodyPr/>
@@ -9635,7 +9651,7 @@
             <a:r>
               <a:rPr lang="en-US" sz="1110" dirty="0">
                 <a:solidFill>
-                  <a:srgbClr val="C9D3F5"/>
+                  <a:srgbClr val="1F2429"/>
                 </a:solidFill>
                 <a:latin typeface="Courier New" pitchFamily="34" charset="0"/>
                 <a:ea typeface="Courier New" pitchFamily="34" charset="-122"/>
@@ -9655,7 +9671,7 @@
             <a:r>
               <a:rPr lang="en-US" sz="1110" dirty="0">
                 <a:solidFill>
-                  <a:srgbClr val="C9D3F5"/>
+                  <a:srgbClr val="1F2429"/>
                 </a:solidFill>
                 <a:latin typeface="Courier New" pitchFamily="34" charset="0"/>
                 <a:ea typeface="Courier New" pitchFamily="34" charset="-122"/>
@@ -9675,7 +9691,7 @@
             <a:r>
               <a:rPr lang="en-US" sz="1110" dirty="0">
                 <a:solidFill>
-                  <a:srgbClr val="C9D3F5"/>
+                  <a:srgbClr val="1F2429"/>
                 </a:solidFill>
                 <a:latin typeface="Courier New" pitchFamily="34" charset="0"/>
                 <a:ea typeface="Courier New" pitchFamily="34" charset="-122"/>
@@ -9695,7 +9711,7 @@
             <a:r>
               <a:rPr lang="en-US" sz="1110" dirty="0">
                 <a:solidFill>
-                  <a:srgbClr val="C9D3F5"/>
+                  <a:srgbClr val="1F2429"/>
                 </a:solidFill>
                 <a:latin typeface="Courier New" pitchFamily="34" charset="0"/>
                 <a:ea typeface="Courier New" pitchFamily="34" charset="-122"/>
@@ -9715,7 +9731,7 @@
             <a:r>
               <a:rPr lang="en-US" sz="1110" dirty="0">
                 <a:solidFill>
-                  <a:srgbClr val="C9D3F5"/>
+                  <a:srgbClr val="1F2429"/>
                 </a:solidFill>
                 <a:latin typeface="Courier New" pitchFamily="34" charset="0"/>
                 <a:ea typeface="Courier New" pitchFamily="34" charset="-122"/>
@@ -9735,7 +9751,7 @@
             <a:r>
               <a:rPr lang="en-US" sz="1110" dirty="0">
                 <a:solidFill>
-                  <a:srgbClr val="C9D3F5"/>
+                  <a:srgbClr val="1F2429"/>
                 </a:solidFill>
                 <a:latin typeface="Courier New" pitchFamily="34" charset="0"/>
                 <a:ea typeface="Courier New" pitchFamily="34" charset="-122"/>
@@ -9755,7 +9771,7 @@
             <a:r>
               <a:rPr lang="en-US" sz="1110" dirty="0">
                 <a:solidFill>
-                  <a:srgbClr val="C9D3F5"/>
+                  <a:srgbClr val="1F2429"/>
                 </a:solidFill>
                 <a:latin typeface="Courier New" pitchFamily="34" charset="0"/>
                 <a:ea typeface="Courier New" pitchFamily="34" charset="-122"/>
@@ -9784,7 +9800,7 @@
             <a:r>
               <a:rPr lang="en-US" sz="1110" dirty="0">
                 <a:solidFill>
-                  <a:srgbClr val="C9D3F5"/>
+                  <a:srgbClr val="1F2429"/>
                 </a:solidFill>
                 <a:latin typeface="Courier New" pitchFamily="34" charset="0"/>
                 <a:ea typeface="Courier New" pitchFamily="34" charset="-122"/>
@@ -9804,7 +9820,7 @@
             <a:r>
               <a:rPr lang="en-US" sz="1110" dirty="0">
                 <a:solidFill>
-                  <a:srgbClr val="C9D3F5"/>
+                  <a:srgbClr val="1F2429"/>
                 </a:solidFill>
                 <a:latin typeface="Courier New" pitchFamily="34" charset="0"/>
                 <a:ea typeface="Courier New" pitchFamily="34" charset="-122"/>
@@ -9824,7 +9840,7 @@
             <a:r>
               <a:rPr lang="en-US" sz="1110" dirty="0">
                 <a:solidFill>
-                  <a:srgbClr val="C9D3F5"/>
+                  <a:srgbClr val="1F2429"/>
                 </a:solidFill>
                 <a:latin typeface="Courier New" pitchFamily="34" charset="0"/>
                 <a:ea typeface="Courier New" pitchFamily="34" charset="-122"/>
@@ -9844,7 +9860,7 @@
             <a:r>
               <a:rPr lang="en-US" sz="1110" dirty="0">
                 <a:solidFill>
-                  <a:srgbClr val="C9D3F5"/>
+                  <a:srgbClr val="1F2429"/>
                 </a:solidFill>
                 <a:latin typeface="Courier New" pitchFamily="34" charset="0"/>
                 <a:ea typeface="Courier New" pitchFamily="34" charset="-122"/>
@@ -9864,7 +9880,7 @@
             <a:r>
               <a:rPr lang="en-US" sz="1110" dirty="0">
                 <a:solidFill>
-                  <a:srgbClr val="C9D3F5"/>
+                  <a:srgbClr val="1F2429"/>
                 </a:solidFill>
                 <a:latin typeface="Courier New" pitchFamily="34" charset="0"/>
                 <a:ea typeface="Courier New" pitchFamily="34" charset="-122"/>
@@ -9884,7 +9900,7 @@
             <a:r>
               <a:rPr lang="en-US" sz="1110" dirty="0">
                 <a:solidFill>
-                  <a:srgbClr val="C9D3F5"/>
+                  <a:srgbClr val="1F2429"/>
                 </a:solidFill>
                 <a:latin typeface="Courier New" pitchFamily="34" charset="0"/>
                 <a:ea typeface="Courier New" pitchFamily="34" charset="-122"/>
@@ -9904,7 +9920,7 @@
             <a:r>
               <a:rPr lang="en-US" sz="1110" dirty="0">
                 <a:solidFill>
-                  <a:srgbClr val="C9D3F5"/>
+                  <a:srgbClr val="1F2429"/>
                 </a:solidFill>
                 <a:latin typeface="Courier New" pitchFamily="34" charset="0"/>
                 <a:ea typeface="Courier New" pitchFamily="34" charset="-122"/>
@@ -9924,7 +9940,7 @@
             <a:r>
               <a:rPr lang="en-US" sz="1110" dirty="0">
                 <a:solidFill>
-                  <a:srgbClr val="C9D3F5"/>
+                  <a:srgbClr val="1F2429"/>
                 </a:solidFill>
                 <a:latin typeface="Courier New" pitchFamily="34" charset="0"/>
                 <a:ea typeface="Courier New" pitchFamily="34" charset="-122"/>
@@ -10106,9 +10122,13 @@
             </a:avLst>
           </a:prstGeom>
           <a:solidFill>
-            <a:srgbClr val="1E1E4C"/>
+            <a:srgbClr val="F7F8F9"/>
           </a:solidFill>
-          <a:ln/>
+          <a:ln w="9525">
+            <a:solidFill>
+              <a:srgbClr val="D0D5DD"/>
+            </a:solidFill>
+          </a:ln>
         </p:spPr>
         <p:txBody>
           <a:bodyPr/>
@@ -10145,7 +10165,7 @@
             <a:r>
               <a:rPr lang="en-US" sz="1400" dirty="0">
                 <a:solidFill>
-                  <a:srgbClr val="C9D3F5"/>
+                  <a:srgbClr val="1F2429"/>
                 </a:solidFill>
                 <a:latin typeface="Courier New" pitchFamily="34" charset="0"/>
                 <a:ea typeface="Courier New" pitchFamily="34" charset="-122"/>
@@ -10165,7 +10185,7 @@
             <a:r>
               <a:rPr lang="en-US" sz="1400" dirty="0">
                 <a:solidFill>
-                  <a:srgbClr val="C9D3F5"/>
+                  <a:srgbClr val="1F2429"/>
                 </a:solidFill>
                 <a:latin typeface="Courier New" pitchFamily="34" charset="0"/>
                 <a:ea typeface="Courier New" pitchFamily="34" charset="-122"/>
@@ -10185,7 +10205,7 @@
             <a:r>
               <a:rPr lang="en-US" sz="1400" dirty="0">
                 <a:solidFill>
-                  <a:srgbClr val="C9D3F5"/>
+                  <a:srgbClr val="1F2429"/>
                 </a:solidFill>
                 <a:latin typeface="Courier New" pitchFamily="34" charset="0"/>
                 <a:ea typeface="Courier New" pitchFamily="34" charset="-122"/>
@@ -10205,7 +10225,7 @@
             <a:r>
               <a:rPr lang="en-US" sz="1400" dirty="0">
                 <a:solidFill>
-                  <a:srgbClr val="C9D3F5"/>
+                  <a:srgbClr val="1F2429"/>
                 </a:solidFill>
                 <a:latin typeface="Courier New" pitchFamily="34" charset="0"/>
                 <a:ea typeface="Courier New" pitchFamily="34" charset="-122"/>
@@ -10225,7 +10245,7 @@
             <a:r>
               <a:rPr lang="en-US" sz="1400" dirty="0">
                 <a:solidFill>
-                  <a:srgbClr val="C9D3F5"/>
+                  <a:srgbClr val="1F2429"/>
                 </a:solidFill>
                 <a:latin typeface="Courier New" pitchFamily="34" charset="0"/>
                 <a:ea typeface="Courier New" pitchFamily="34" charset="-122"/>
@@ -10245,7 +10265,7 @@
             <a:r>
               <a:rPr lang="en-US" sz="1400" dirty="0">
                 <a:solidFill>
-                  <a:srgbClr val="C9D3F5"/>
+                  <a:srgbClr val="1F2429"/>
                 </a:solidFill>
                 <a:latin typeface="Courier New" pitchFamily="34" charset="0"/>
                 <a:ea typeface="Courier New" pitchFamily="34" charset="-122"/>
@@ -10265,7 +10285,7 @@
             <a:r>
               <a:rPr lang="en-US" sz="1400" dirty="0">
                 <a:solidFill>
-                  <a:srgbClr val="C9D3F5"/>
+                  <a:srgbClr val="1F2429"/>
                 </a:solidFill>
                 <a:latin typeface="Courier New" pitchFamily="34" charset="0"/>
                 <a:ea typeface="Courier New" pitchFamily="34" charset="-122"/>
@@ -10285,7 +10305,7 @@
             <a:r>
               <a:rPr lang="en-US" sz="1400" dirty="0">
                 <a:solidFill>
-                  <a:srgbClr val="C9D3F5"/>
+                  <a:srgbClr val="1F2429"/>
                 </a:solidFill>
                 <a:latin typeface="Courier New" pitchFamily="34" charset="0"/>
                 <a:ea typeface="Courier New" pitchFamily="34" charset="-122"/>
@@ -10305,7 +10325,7 @@
             <a:r>
               <a:rPr lang="en-US" sz="1400" dirty="0">
                 <a:solidFill>
-                  <a:srgbClr val="C9D3F5"/>
+                  <a:srgbClr val="1F2429"/>
                 </a:solidFill>
                 <a:latin typeface="Courier New" pitchFamily="34" charset="0"/>
                 <a:ea typeface="Courier New" pitchFamily="34" charset="-122"/>
@@ -10325,7 +10345,7 @@
             <a:r>
               <a:rPr lang="en-US" sz="1400" dirty="0">
                 <a:solidFill>
-                  <a:srgbClr val="C9D3F5"/>
+                  <a:srgbClr val="1F2429"/>
                 </a:solidFill>
                 <a:latin typeface="Courier New" pitchFamily="34" charset="0"/>
                 <a:ea typeface="Courier New" pitchFamily="34" charset="-122"/>
@@ -10538,7 +10558,7 @@
         <p:spPr>
           <a:xfrm>
             <a:off x="640080" y="1965960"/>
-            <a:ext cx="10911535" cy="1737360"/>
+            <a:ext cx="10911535" cy="3657600"/>
           </a:xfrm>
           <a:prstGeom prst="roundRect">
             <a:avLst>
@@ -10569,7 +10589,7 @@
         <p:spPr>
           <a:xfrm>
             <a:off x="868680" y="2103120"/>
-            <a:ext cx="10454335" cy="274320"/>
+            <a:ext cx="10454335" cy="400000"/>
           </a:xfrm>
           <a:prstGeom prst="rect">
             <a:avLst/>
@@ -10585,7 +10605,7 @@
               <a:buNone/>
             </a:pPr>
             <a:r>
-              <a:rPr lang="en-US" sz="1000" b="1" spc="200" kern="0" dirty="0">
+              <a:rPr lang="en-US" sz="1800" b="1" spc="200" kern="0" dirty="0">
                 <a:solidFill>
                   <a:srgbClr val="1F7A46"/>
                 </a:solidFill>
@@ -10595,7 +10615,7 @@
               </a:rPr>
               <a:t>TIP</a:t>
             </a:r>
-            <a:endParaRPr lang="en-US" sz="1000" dirty="0"/>
+            <a:endParaRPr lang="en-US" sz="1800" dirty="0"/>
           </a:p>
         </p:txBody>
       </p:sp>
@@ -10607,24 +10627,24 @@
         </p:nvSpPr>
         <p:spPr>
           <a:xfrm>
-            <a:off x="868680" y="2404872"/>
-            <a:ext cx="10454335" cy="1143000"/>
-          </a:xfrm>
-          <a:prstGeom prst="rect">
-            <a:avLst/>
-          </a:prstGeom>
-          <a:noFill/>
-          <a:ln/>
-        </p:spPr>
-        <p:txBody>
-          <a:bodyPr wrap="square" lIns="0" tIns="0" rIns="0" bIns="0" rtlCol="0" anchor="t"/>
-          <a:lstStyle/>
-          <a:p>
-            <a:pPr indent="0" marL="0">
-              <a:buNone/>
-            </a:pPr>
-            <a:r>
-              <a:rPr lang="en-US" sz="1250" dirty="0">
+            <a:off x="868680" y="2795960"/>
+            <a:ext cx="10454335" cy="2500000"/>
+          </a:xfrm>
+          <a:prstGeom prst="rect">
+            <a:avLst/>
+          </a:prstGeom>
+          <a:noFill/>
+          <a:ln/>
+        </p:spPr>
+        <p:txBody>
+          <a:bodyPr wrap="square" lIns="0" tIns="0" rIns="0" bIns="0" rtlCol="0" anchor="ctr"/>
+          <a:lstStyle/>
+          <a:p>
+            <a:pPr indent="0" marL="0">
+              <a:buNone/>
+            </a:pPr>
+            <a:r>
+              <a:rPr lang="en-US" sz="2800" dirty="0">
                 <a:solidFill>
                   <a:srgbClr val="26262F"/>
                 </a:solidFill>
@@ -10634,7 +10654,7 @@
               </a:rPr>
               <a:t>useMemo and useCallback are optimization tools, not something you need on every value or function — they add a small overhead themselves. Reach for them for a genuinely expensive calculation or a measured performance problem, not by default.</a:t>
             </a:r>
-            <a:endParaRPr lang="en-US" sz="1250" dirty="0"/>
+            <a:endParaRPr lang="en-US" sz="2800" dirty="0"/>
           </a:p>
         </p:txBody>
       </p:sp>
@@ -11267,9 +11287,13 @@
             </a:avLst>
           </a:prstGeom>
           <a:solidFill>
-            <a:srgbClr val="1E1E4C"/>
+            <a:srgbClr val="F7F8F9"/>
           </a:solidFill>
-          <a:ln/>
+          <a:ln w="9525">
+            <a:solidFill>
+              <a:srgbClr val="D0D5DD"/>
+            </a:solidFill>
+          </a:ln>
         </p:spPr>
         <p:txBody>
           <a:bodyPr/>
@@ -11306,7 +11330,7 @@
             <a:r>
               <a:rPr lang="en-US" sz="1264" dirty="0">
                 <a:solidFill>
-                  <a:srgbClr val="C9D3F5"/>
+                  <a:srgbClr val="1F2429"/>
                 </a:solidFill>
                 <a:latin typeface="Courier New" pitchFamily="34" charset="0"/>
                 <a:ea typeface="Courier New" pitchFamily="34" charset="-122"/>
@@ -11326,7 +11350,7 @@
             <a:r>
               <a:rPr lang="en-US" sz="1264" dirty="0">
                 <a:solidFill>
-                  <a:srgbClr val="C9D3F5"/>
+                  <a:srgbClr val="1F2429"/>
                 </a:solidFill>
                 <a:latin typeface="Courier New" pitchFamily="34" charset="0"/>
                 <a:ea typeface="Courier New" pitchFamily="34" charset="-122"/>
@@ -11346,7 +11370,7 @@
             <a:r>
               <a:rPr lang="en-US" sz="1264" dirty="0">
                 <a:solidFill>
-                  <a:srgbClr val="C9D3F5"/>
+                  <a:srgbClr val="1F2429"/>
                 </a:solidFill>
                 <a:latin typeface="Courier New" pitchFamily="34" charset="0"/>
                 <a:ea typeface="Courier New" pitchFamily="34" charset="-122"/>
@@ -11366,7 +11390,7 @@
             <a:r>
               <a:rPr lang="en-US" sz="1264" dirty="0">
                 <a:solidFill>
-                  <a:srgbClr val="C9D3F5"/>
+                  <a:srgbClr val="1F2429"/>
                 </a:solidFill>
                 <a:latin typeface="Courier New" pitchFamily="34" charset="0"/>
                 <a:ea typeface="Courier New" pitchFamily="34" charset="-122"/>
@@ -11386,7 +11410,7 @@
             <a:r>
               <a:rPr lang="en-US" sz="1264" dirty="0">
                 <a:solidFill>
-                  <a:srgbClr val="C9D3F5"/>
+                  <a:srgbClr val="1F2429"/>
                 </a:solidFill>
                 <a:latin typeface="Courier New" pitchFamily="34" charset="0"/>
                 <a:ea typeface="Courier New" pitchFamily="34" charset="-122"/>
@@ -11406,7 +11430,7 @@
             <a:r>
               <a:rPr lang="en-US" sz="1264" dirty="0">
                 <a:solidFill>
-                  <a:srgbClr val="C9D3F5"/>
+                  <a:srgbClr val="1F2429"/>
                 </a:solidFill>
                 <a:latin typeface="Courier New" pitchFamily="34" charset="0"/>
                 <a:ea typeface="Courier New" pitchFamily="34" charset="-122"/>
@@ -11426,7 +11450,7 @@
             <a:r>
               <a:rPr lang="en-US" sz="1264" dirty="0">
                 <a:solidFill>
-                  <a:srgbClr val="C9D3F5"/>
+                  <a:srgbClr val="1F2429"/>
                 </a:solidFill>
                 <a:latin typeface="Courier New" pitchFamily="34" charset="0"/>
                 <a:ea typeface="Courier New" pitchFamily="34" charset="-122"/>
@@ -11446,7 +11470,7 @@
             <a:r>
               <a:rPr lang="en-US" sz="1264" dirty="0">
                 <a:solidFill>
-                  <a:srgbClr val="C9D3F5"/>
+                  <a:srgbClr val="1F2429"/>
                 </a:solidFill>
                 <a:latin typeface="Courier New" pitchFamily="34" charset="0"/>
                 <a:ea typeface="Courier New" pitchFamily="34" charset="-122"/>
@@ -11466,7 +11490,7 @@
             <a:r>
               <a:rPr lang="en-US" sz="1264" dirty="0">
                 <a:solidFill>
-                  <a:srgbClr val="C9D3F5"/>
+                  <a:srgbClr val="1F2429"/>
                 </a:solidFill>
                 <a:latin typeface="Courier New" pitchFamily="34" charset="0"/>
                 <a:ea typeface="Courier New" pitchFamily="34" charset="-122"/>
@@ -11486,7 +11510,7 @@
             <a:r>
               <a:rPr lang="en-US" sz="1264" dirty="0">
                 <a:solidFill>
-                  <a:srgbClr val="C9D3F5"/>
+                  <a:srgbClr val="1F2429"/>
                 </a:solidFill>
                 <a:latin typeface="Courier New" pitchFamily="34" charset="0"/>
                 <a:ea typeface="Courier New" pitchFamily="34" charset="-122"/>
@@ -11506,7 +11530,7 @@
             <a:r>
               <a:rPr lang="en-US" sz="1264" dirty="0">
                 <a:solidFill>
-                  <a:srgbClr val="C9D3F5"/>
+                  <a:srgbClr val="1F2429"/>
                 </a:solidFill>
                 <a:latin typeface="Courier New" pitchFamily="34" charset="0"/>
                 <a:ea typeface="Courier New" pitchFamily="34" charset="-122"/>
@@ -11526,7 +11550,7 @@
             <a:r>
               <a:rPr lang="en-US" sz="1264" dirty="0">
                 <a:solidFill>
-                  <a:srgbClr val="C9D3F5"/>
+                  <a:srgbClr val="1F2429"/>
                 </a:solidFill>
                 <a:latin typeface="Courier New" pitchFamily="34" charset="0"/>
                 <a:ea typeface="Courier New" pitchFamily="34" charset="-122"/>
@@ -11546,7 +11570,7 @@
             <a:r>
               <a:rPr lang="en-US" sz="1264" dirty="0">
                 <a:solidFill>
-                  <a:srgbClr val="C9D3F5"/>
+                  <a:srgbClr val="1F2429"/>
                 </a:solidFill>
                 <a:latin typeface="Courier New" pitchFamily="34" charset="0"/>
                 <a:ea typeface="Courier New" pitchFamily="34" charset="-122"/>
@@ -11566,7 +11590,7 @@
             <a:r>
               <a:rPr lang="en-US" sz="1264" dirty="0">
                 <a:solidFill>
-                  <a:srgbClr val="C9D3F5"/>
+                  <a:srgbClr val="1F2429"/>
                 </a:solidFill>
                 <a:latin typeface="Courier New" pitchFamily="34" charset="0"/>
                 <a:ea typeface="Courier New" pitchFamily="34" charset="-122"/>
@@ -11586,7 +11610,7 @@
             <a:r>
               <a:rPr lang="en-US" sz="1264" dirty="0">
                 <a:solidFill>
-                  <a:srgbClr val="C9D3F5"/>
+                  <a:srgbClr val="1F2429"/>
                 </a:solidFill>
                 <a:latin typeface="Courier New" pitchFamily="34" charset="0"/>
                 <a:ea typeface="Courier New" pitchFamily="34" charset="-122"/>
@@ -12328,9 +12352,13 @@
             </a:avLst>
           </a:prstGeom>
           <a:solidFill>
-            <a:srgbClr val="1E1E4C"/>
+            <a:srgbClr val="F7F8F9"/>
           </a:solidFill>
-          <a:ln/>
+          <a:ln w="9525">
+            <a:solidFill>
+              <a:srgbClr val="D0D5DD"/>
+            </a:solidFill>
+          </a:ln>
         </p:spPr>
         <p:txBody>
           <a:bodyPr/>
@@ -12367,7 +12395,7 @@
             <a:r>
               <a:rPr lang="en-US" sz="1366" dirty="0">
                 <a:solidFill>
-                  <a:srgbClr val="C9D3F5"/>
+                  <a:srgbClr val="1F2429"/>
                 </a:solidFill>
                 <a:latin typeface="Courier New" pitchFamily="34" charset="0"/>
                 <a:ea typeface="Courier New" pitchFamily="34" charset="-122"/>
@@ -12387,7 +12415,7 @@
             <a:r>
               <a:rPr lang="en-US" sz="1366" dirty="0">
                 <a:solidFill>
-                  <a:srgbClr val="C9D3F5"/>
+                  <a:srgbClr val="1F2429"/>
                 </a:solidFill>
                 <a:latin typeface="Courier New" pitchFamily="34" charset="0"/>
                 <a:ea typeface="Courier New" pitchFamily="34" charset="-122"/>
@@ -12407,7 +12435,7 @@
             <a:r>
               <a:rPr lang="en-US" sz="1366" dirty="0">
                 <a:solidFill>
-                  <a:srgbClr val="C9D3F5"/>
+                  <a:srgbClr val="1F2429"/>
                 </a:solidFill>
                 <a:latin typeface="Courier New" pitchFamily="34" charset="0"/>
                 <a:ea typeface="Courier New" pitchFamily="34" charset="-122"/>
@@ -12427,7 +12455,7 @@
             <a:r>
               <a:rPr lang="en-US" sz="1366" dirty="0">
                 <a:solidFill>
-                  <a:srgbClr val="C9D3F5"/>
+                  <a:srgbClr val="1F2429"/>
                 </a:solidFill>
                 <a:latin typeface="Courier New" pitchFamily="34" charset="0"/>
                 <a:ea typeface="Courier New" pitchFamily="34" charset="-122"/>
@@ -12447,7 +12475,7 @@
             <a:r>
               <a:rPr lang="en-US" sz="1366" dirty="0">
                 <a:solidFill>
-                  <a:srgbClr val="C9D3F5"/>
+                  <a:srgbClr val="1F2429"/>
                 </a:solidFill>
                 <a:latin typeface="Courier New" pitchFamily="34" charset="0"/>
                 <a:ea typeface="Courier New" pitchFamily="34" charset="-122"/>
@@ -12467,7 +12495,7 @@
             <a:r>
               <a:rPr lang="en-US" sz="1366" dirty="0">
                 <a:solidFill>
-                  <a:srgbClr val="C9D3F5"/>
+                  <a:srgbClr val="1F2429"/>
                 </a:solidFill>
                 <a:latin typeface="Courier New" pitchFamily="34" charset="0"/>
                 <a:ea typeface="Courier New" pitchFamily="34" charset="-122"/>
@@ -12487,7 +12515,7 @@
             <a:r>
               <a:rPr lang="en-US" sz="1366" dirty="0">
                 <a:solidFill>
-                  <a:srgbClr val="C9D3F5"/>
+                  <a:srgbClr val="1F2429"/>
                 </a:solidFill>
                 <a:latin typeface="Courier New" pitchFamily="34" charset="0"/>
                 <a:ea typeface="Courier New" pitchFamily="34" charset="-122"/>
@@ -12507,7 +12535,7 @@
             <a:r>
               <a:rPr lang="en-US" sz="1366" dirty="0">
                 <a:solidFill>
-                  <a:srgbClr val="C9D3F5"/>
+                  <a:srgbClr val="1F2429"/>
                 </a:solidFill>
                 <a:latin typeface="Courier New" pitchFamily="34" charset="0"/>
                 <a:ea typeface="Courier New" pitchFamily="34" charset="-122"/>
@@ -12527,7 +12555,7 @@
             <a:r>
               <a:rPr lang="en-US" sz="1366" dirty="0">
                 <a:solidFill>
-                  <a:srgbClr val="C9D3F5"/>
+                  <a:srgbClr val="1F2429"/>
                 </a:solidFill>
                 <a:latin typeface="Courier New" pitchFamily="34" charset="0"/>
                 <a:ea typeface="Courier New" pitchFamily="34" charset="-122"/>
@@ -12547,7 +12575,7 @@
             <a:r>
               <a:rPr lang="en-US" sz="1366" dirty="0">
                 <a:solidFill>
-                  <a:srgbClr val="C9D3F5"/>
+                  <a:srgbClr val="1F2429"/>
                 </a:solidFill>
                 <a:latin typeface="Courier New" pitchFamily="34" charset="0"/>
                 <a:ea typeface="Courier New" pitchFamily="34" charset="-122"/>
@@ -12567,7 +12595,7 @@
             <a:r>
               <a:rPr lang="en-US" sz="1366" dirty="0">
                 <a:solidFill>
-                  <a:srgbClr val="C9D3F5"/>
+                  <a:srgbClr val="1F2429"/>
                 </a:solidFill>
                 <a:latin typeface="Courier New" pitchFamily="34" charset="0"/>
                 <a:ea typeface="Courier New" pitchFamily="34" charset="-122"/>
@@ -12587,7 +12615,7 @@
             <a:r>
               <a:rPr lang="en-US" sz="1366" dirty="0">
                 <a:solidFill>
-                  <a:srgbClr val="C9D3F5"/>
+                  <a:srgbClr val="1F2429"/>
                 </a:solidFill>
                 <a:latin typeface="Courier New" pitchFamily="34" charset="0"/>
                 <a:ea typeface="Courier New" pitchFamily="34" charset="-122"/>
@@ -12607,7 +12635,7 @@
             <a:r>
               <a:rPr lang="en-US" sz="1366" dirty="0">
                 <a:solidFill>
-                  <a:srgbClr val="C9D3F5"/>
+                  <a:srgbClr val="1F2429"/>
                 </a:solidFill>
                 <a:latin typeface="Courier New" pitchFamily="34" charset="0"/>
                 <a:ea typeface="Courier New" pitchFamily="34" charset="-122"/>
@@ -13146,9 +13174,13 @@
             </a:avLst>
           </a:prstGeom>
           <a:solidFill>
-            <a:srgbClr val="1E1E4C"/>
+            <a:srgbClr val="F7F8F9"/>
           </a:solidFill>
-          <a:ln/>
+          <a:ln w="9525">
+            <a:solidFill>
+              <a:srgbClr val="D0D5DD"/>
+            </a:solidFill>
+          </a:ln>
         </p:spPr>
         <p:txBody>
           <a:bodyPr/>
@@ -13185,7 +13217,7 @@
             <a:r>
               <a:rPr lang="en-US" sz="1045" dirty="0">
                 <a:solidFill>
-                  <a:srgbClr val="C9D3F5"/>
+                  <a:srgbClr val="1F2429"/>
                 </a:solidFill>
                 <a:latin typeface="Courier New" pitchFamily="34" charset="0"/>
                 <a:ea typeface="Courier New" pitchFamily="34" charset="-122"/>
@@ -13205,7 +13237,7 @@
             <a:r>
               <a:rPr lang="en-US" sz="1045" dirty="0">
                 <a:solidFill>
-                  <a:srgbClr val="C9D3F5"/>
+                  <a:srgbClr val="1F2429"/>
                 </a:solidFill>
                 <a:latin typeface="Courier New" pitchFamily="34" charset="0"/>
                 <a:ea typeface="Courier New" pitchFamily="34" charset="-122"/>
@@ -13225,7 +13257,7 @@
             <a:r>
               <a:rPr lang="en-US" sz="1045" dirty="0">
                 <a:solidFill>
-                  <a:srgbClr val="C9D3F5"/>
+                  <a:srgbClr val="1F2429"/>
                 </a:solidFill>
                 <a:latin typeface="Courier New" pitchFamily="34" charset="0"/>
                 <a:ea typeface="Courier New" pitchFamily="34" charset="-122"/>
@@ -13245,7 +13277,7 @@
             <a:r>
               <a:rPr lang="en-US" sz="1045" dirty="0">
                 <a:solidFill>
-                  <a:srgbClr val="C9D3F5"/>
+                  <a:srgbClr val="1F2429"/>
                 </a:solidFill>
                 <a:latin typeface="Courier New" pitchFamily="34" charset="0"/>
                 <a:ea typeface="Courier New" pitchFamily="34" charset="-122"/>
@@ -13265,7 +13297,7 @@
             <a:r>
               <a:rPr lang="en-US" sz="1045" dirty="0">
                 <a:solidFill>
-                  <a:srgbClr val="C9D3F5"/>
+                  <a:srgbClr val="1F2429"/>
                 </a:solidFill>
                 <a:latin typeface="Courier New" pitchFamily="34" charset="0"/>
                 <a:ea typeface="Courier New" pitchFamily="34" charset="-122"/>
@@ -13285,7 +13317,7 @@
             <a:r>
               <a:rPr lang="en-US" sz="1045" dirty="0">
                 <a:solidFill>
-                  <a:srgbClr val="C9D3F5"/>
+                  <a:srgbClr val="1F2429"/>
                 </a:solidFill>
                 <a:latin typeface="Courier New" pitchFamily="34" charset="0"/>
                 <a:ea typeface="Courier New" pitchFamily="34" charset="-122"/>
@@ -13305,7 +13337,7 @@
             <a:r>
               <a:rPr lang="en-US" sz="1045" dirty="0">
                 <a:solidFill>
-                  <a:srgbClr val="C9D3F5"/>
+                  <a:srgbClr val="1F2429"/>
                 </a:solidFill>
                 <a:latin typeface="Courier New" pitchFamily="34" charset="0"/>
                 <a:ea typeface="Courier New" pitchFamily="34" charset="-122"/>
@@ -13325,7 +13357,7 @@
             <a:r>
               <a:rPr lang="en-US" sz="1045" dirty="0">
                 <a:solidFill>
-                  <a:srgbClr val="C9D3F5"/>
+                  <a:srgbClr val="1F2429"/>
                 </a:solidFill>
                 <a:latin typeface="Courier New" pitchFamily="34" charset="0"/>
                 <a:ea typeface="Courier New" pitchFamily="34" charset="-122"/>
@@ -13345,7 +13377,7 @@
             <a:r>
               <a:rPr lang="en-US" sz="1045" dirty="0">
                 <a:solidFill>
-                  <a:srgbClr val="C9D3F5"/>
+                  <a:srgbClr val="1F2429"/>
                 </a:solidFill>
                 <a:latin typeface="Courier New" pitchFamily="34" charset="0"/>
                 <a:ea typeface="Courier New" pitchFamily="34" charset="-122"/>
@@ -13365,7 +13397,7 @@
             <a:r>
               <a:rPr lang="en-US" sz="1045" dirty="0">
                 <a:solidFill>
-                  <a:srgbClr val="C9D3F5"/>
+                  <a:srgbClr val="1F2429"/>
                 </a:solidFill>
                 <a:latin typeface="Courier New" pitchFamily="34" charset="0"/>
                 <a:ea typeface="Courier New" pitchFamily="34" charset="-122"/>
@@ -13385,7 +13417,7 @@
             <a:r>
               <a:rPr lang="en-US" sz="1045" dirty="0">
                 <a:solidFill>
-                  <a:srgbClr val="C9D3F5"/>
+                  <a:srgbClr val="1F2429"/>
                 </a:solidFill>
                 <a:latin typeface="Courier New" pitchFamily="34" charset="0"/>
                 <a:ea typeface="Courier New" pitchFamily="34" charset="-122"/>
@@ -13405,7 +13437,7 @@
             <a:r>
               <a:rPr lang="en-US" sz="1045" dirty="0">
                 <a:solidFill>
-                  <a:srgbClr val="C9D3F5"/>
+                  <a:srgbClr val="1F2429"/>
                 </a:solidFill>
                 <a:latin typeface="Courier New" pitchFamily="34" charset="0"/>
                 <a:ea typeface="Courier New" pitchFamily="34" charset="-122"/>
@@ -13425,7 +13457,7 @@
             <a:r>
               <a:rPr lang="en-US" sz="1045" dirty="0">
                 <a:solidFill>
-                  <a:srgbClr val="C9D3F5"/>
+                  <a:srgbClr val="1F2429"/>
                 </a:solidFill>
                 <a:latin typeface="Courier New" pitchFamily="34" charset="0"/>
                 <a:ea typeface="Courier New" pitchFamily="34" charset="-122"/>
@@ -13445,7 +13477,7 @@
             <a:r>
               <a:rPr lang="en-US" sz="1045" dirty="0">
                 <a:solidFill>
-                  <a:srgbClr val="C9D3F5"/>
+                  <a:srgbClr val="1F2429"/>
                 </a:solidFill>
                 <a:latin typeface="Courier New" pitchFamily="34" charset="0"/>
                 <a:ea typeface="Courier New" pitchFamily="34" charset="-122"/>
@@ -13465,7 +13497,7 @@
             <a:r>
               <a:rPr lang="en-US" sz="1045" dirty="0">
                 <a:solidFill>
-                  <a:srgbClr val="C9D3F5"/>
+                  <a:srgbClr val="1F2429"/>
                 </a:solidFill>
                 <a:latin typeface="Courier New" pitchFamily="34" charset="0"/>
                 <a:ea typeface="Courier New" pitchFamily="34" charset="-122"/>
@@ -13485,7 +13517,7 @@
             <a:r>
               <a:rPr lang="en-US" sz="1045" dirty="0">
                 <a:solidFill>
-                  <a:srgbClr val="C9D3F5"/>
+                  <a:srgbClr val="1F2429"/>
                 </a:solidFill>
                 <a:latin typeface="Courier New" pitchFamily="34" charset="0"/>
                 <a:ea typeface="Courier New" pitchFamily="34" charset="-122"/>
@@ -13505,7 +13537,7 @@
             <a:r>
               <a:rPr lang="en-US" sz="1045" dirty="0">
                 <a:solidFill>
-                  <a:srgbClr val="C9D3F5"/>
+                  <a:srgbClr val="1F2429"/>
                 </a:solidFill>
                 <a:latin typeface="Courier New" pitchFamily="34" charset="0"/>
                 <a:ea typeface="Courier New" pitchFamily="34" charset="-122"/>
@@ -15443,7 +15475,7 @@
         <p:spPr>
           <a:xfrm>
             <a:off x="640080" y="1965960"/>
-            <a:ext cx="10911535" cy="1828800"/>
+            <a:ext cx="10911535" cy="3657600"/>
           </a:xfrm>
           <a:prstGeom prst="roundRect">
             <a:avLst>
@@ -15474,7 +15506,7 @@
         <p:spPr>
           <a:xfrm>
             <a:off x="868680" y="2103120"/>
-            <a:ext cx="10454335" cy="274320"/>
+            <a:ext cx="10454335" cy="400000"/>
           </a:xfrm>
           <a:prstGeom prst="rect">
             <a:avLst/>
@@ -15490,7 +15522,7 @@
               <a:buNone/>
             </a:pPr>
             <a:r>
-              <a:rPr lang="en-US" sz="1000" b="1" spc="200" kern="0" dirty="0">
+              <a:rPr lang="en-US" sz="1800" b="1" spc="200" kern="0" dirty="0">
                 <a:solidFill>
                   <a:srgbClr val="33459E"/>
                 </a:solidFill>
@@ -15500,7 +15532,7 @@
               </a:rPr>
               <a:t>NOTE</a:t>
             </a:r>
-            <a:endParaRPr lang="en-US" sz="1000" dirty="0"/>
+            <a:endParaRPr lang="en-US" sz="1800" dirty="0"/>
           </a:p>
         </p:txBody>
       </p:sp>
@@ -15512,24 +15544,24 @@
         </p:nvSpPr>
         <p:spPr>
           <a:xfrm>
-            <a:off x="868680" y="2404872"/>
-            <a:ext cx="10454335" cy="1234440"/>
-          </a:xfrm>
-          <a:prstGeom prst="rect">
-            <a:avLst/>
-          </a:prstGeom>
-          <a:noFill/>
-          <a:ln/>
-        </p:spPr>
-        <p:txBody>
-          <a:bodyPr wrap="square" lIns="0" tIns="0" rIns="0" bIns="0" rtlCol="0" anchor="t"/>
-          <a:lstStyle/>
-          <a:p>
-            <a:pPr indent="0" marL="0">
-              <a:buNone/>
-            </a:pPr>
-            <a:r>
-              <a:rPr lang="en-US" sz="1250" dirty="0">
+            <a:off x="868680" y="2795960"/>
+            <a:ext cx="10454335" cy="2500000"/>
+          </a:xfrm>
+          <a:prstGeom prst="rect">
+            <a:avLst/>
+          </a:prstGeom>
+          <a:noFill/>
+          <a:ln/>
+        </p:spPr>
+        <p:txBody>
+          <a:bodyPr wrap="square" lIns="0" tIns="0" rIns="0" bIns="0" rtlCol="0" anchor="ctr"/>
+          <a:lstStyle/>
+          <a:p>
+            <a:pPr indent="0" marL="0">
+              <a:buNone/>
+            </a:pPr>
+            <a:r>
+              <a:rPr lang="en-US" sz="2800" dirty="0">
                 <a:solidFill>
                   <a:srgbClr val="26262F"/>
                 </a:solidFill>
@@ -15539,7 +15571,7 @@
               </a:rPr>
               <a:t>This course does not require Redux or Zustand -- useState, lifting state up, and the Context API are enough for everything you build here. Still worth knowing these names, since you will very likely meet them in real codebases and the advanced course.</a:t>
             </a:r>
-            <a:endParaRPr lang="en-US" sz="1250" dirty="0"/>
+            <a:endParaRPr lang="en-US" sz="2800" dirty="0"/>
           </a:p>
         </p:txBody>
       </p:sp>
@@ -16478,9 +16510,13 @@
             </a:avLst>
           </a:prstGeom>
           <a:solidFill>
-            <a:srgbClr val="1E1E4C"/>
+            <a:srgbClr val="F7F8F9"/>
           </a:solidFill>
-          <a:ln/>
+          <a:ln w="9525">
+            <a:solidFill>
+              <a:srgbClr val="D0D5DD"/>
+            </a:solidFill>
+          </a:ln>
         </p:spPr>
         <p:txBody>
           <a:bodyPr/>
@@ -16517,7 +16553,7 @@
             <a:r>
               <a:rPr lang="en-US" sz="1400" dirty="0">
                 <a:solidFill>
-                  <a:srgbClr val="C9D3F5"/>
+                  <a:srgbClr val="1F2429"/>
                 </a:solidFill>
                 <a:latin typeface="Courier New" pitchFamily="34" charset="0"/>
                 <a:ea typeface="Courier New" pitchFamily="34" charset="-122"/>
@@ -16537,7 +16573,7 @@
             <a:r>
               <a:rPr lang="en-US" sz="1400" dirty="0">
                 <a:solidFill>
-                  <a:srgbClr val="C9D3F5"/>
+                  <a:srgbClr val="1F2429"/>
                 </a:solidFill>
                 <a:latin typeface="Courier New" pitchFamily="34" charset="0"/>
                 <a:ea typeface="Courier New" pitchFamily="34" charset="-122"/>
@@ -16557,7 +16593,7 @@
             <a:r>
               <a:rPr lang="en-US" sz="1400" dirty="0">
                 <a:solidFill>
-                  <a:srgbClr val="C9D3F5"/>
+                  <a:srgbClr val="1F2429"/>
                 </a:solidFill>
                 <a:latin typeface="Courier New" pitchFamily="34" charset="0"/>
                 <a:ea typeface="Courier New" pitchFamily="34" charset="-122"/>
@@ -16577,7 +16613,7 @@
             <a:r>
               <a:rPr lang="en-US" sz="1400" dirty="0">
                 <a:solidFill>
-                  <a:srgbClr val="C9D3F5"/>
+                  <a:srgbClr val="1F2429"/>
                 </a:solidFill>
                 <a:latin typeface="Courier New" pitchFamily="34" charset="0"/>
                 <a:ea typeface="Courier New" pitchFamily="34" charset="-122"/>
@@ -16597,7 +16633,7 @@
             <a:r>
               <a:rPr lang="en-US" sz="1400" dirty="0">
                 <a:solidFill>
-                  <a:srgbClr val="C9D3F5"/>
+                  <a:srgbClr val="1F2429"/>
                 </a:solidFill>
                 <a:latin typeface="Courier New" pitchFamily="34" charset="0"/>
                 <a:ea typeface="Courier New" pitchFamily="34" charset="-122"/>
@@ -16617,7 +16653,7 @@
             <a:r>
               <a:rPr lang="en-US" sz="1400" dirty="0">
                 <a:solidFill>
-                  <a:srgbClr val="C9D3F5"/>
+                  <a:srgbClr val="1F2429"/>
                 </a:solidFill>
                 <a:latin typeface="Courier New" pitchFamily="34" charset="0"/>
                 <a:ea typeface="Courier New" pitchFamily="34" charset="-122"/>
@@ -16646,7 +16682,7 @@
             <a:r>
               <a:rPr lang="en-US" sz="1400" dirty="0">
                 <a:solidFill>
-                  <a:srgbClr val="C9D3F5"/>
+                  <a:srgbClr val="1F2429"/>
                 </a:solidFill>
                 <a:latin typeface="Courier New" pitchFamily="34" charset="0"/>
                 <a:ea typeface="Courier New" pitchFamily="34" charset="-122"/>
@@ -16666,7 +16702,7 @@
             <a:r>
               <a:rPr lang="en-US" sz="1400" dirty="0">
                 <a:solidFill>
-                  <a:srgbClr val="C9D3F5"/>
+                  <a:srgbClr val="1F2429"/>
                 </a:solidFill>
                 <a:latin typeface="Courier New" pitchFamily="34" charset="0"/>
                 <a:ea typeface="Courier New" pitchFamily="34" charset="-122"/>
@@ -16686,7 +16722,7 @@
             <a:r>
               <a:rPr lang="en-US" sz="1400" dirty="0">
                 <a:solidFill>
-                  <a:srgbClr val="C9D3F5"/>
+                  <a:srgbClr val="1F2429"/>
                 </a:solidFill>
                 <a:latin typeface="Courier New" pitchFamily="34" charset="0"/>
                 <a:ea typeface="Courier New" pitchFamily="34" charset="-122"/>
@@ -16706,7 +16742,7 @@
             <a:r>
               <a:rPr lang="en-US" sz="1400" dirty="0">
                 <a:solidFill>
-                  <a:srgbClr val="C9D3F5"/>
+                  <a:srgbClr val="1F2429"/>
                 </a:solidFill>
                 <a:latin typeface="Courier New" pitchFamily="34" charset="0"/>
                 <a:ea typeface="Courier New" pitchFamily="34" charset="-122"/>
@@ -16726,7 +16762,7 @@
             <a:r>
               <a:rPr lang="en-US" sz="1400" dirty="0">
                 <a:solidFill>
-                  <a:srgbClr val="C9D3F5"/>
+                  <a:srgbClr val="1F2429"/>
                 </a:solidFill>
                 <a:latin typeface="Courier New" pitchFamily="34" charset="0"/>
                 <a:ea typeface="Courier New" pitchFamily="34" charset="-122"/>
@@ -16900,7 +16936,7 @@
         <p:spPr>
           <a:xfrm>
             <a:off x="640080" y="1965960"/>
-            <a:ext cx="10911535" cy="1828800"/>
+            <a:ext cx="10911535" cy="3657600"/>
           </a:xfrm>
           <a:prstGeom prst="roundRect">
             <a:avLst>
@@ -16931,7 +16967,7 @@
         <p:spPr>
           <a:xfrm>
             <a:off x="868680" y="2103120"/>
-            <a:ext cx="10454335" cy="274320"/>
+            <a:ext cx="10454335" cy="400000"/>
           </a:xfrm>
           <a:prstGeom prst="rect">
             <a:avLst/>
@@ -16947,7 +16983,7 @@
               <a:buNone/>
             </a:pPr>
             <a:r>
-              <a:rPr lang="en-US" sz="1000" b="1" spc="200" kern="0" dirty="0">
+              <a:rPr lang="en-US" sz="1800" b="1" spc="200" kern="0" dirty="0">
                 <a:solidFill>
                   <a:srgbClr val="8A3A12"/>
                 </a:solidFill>
@@ -16957,7 +16993,7 @@
               </a:rPr>
               <a:t>WARNING</a:t>
             </a:r>
-            <a:endParaRPr lang="en-US" sz="1000" dirty="0"/>
+            <a:endParaRPr lang="en-US" sz="1800" dirty="0"/>
           </a:p>
         </p:txBody>
       </p:sp>
@@ -16969,24 +17005,24 @@
         </p:nvSpPr>
         <p:spPr>
           <a:xfrm>
-            <a:off x="868680" y="2404872"/>
-            <a:ext cx="10454335" cy="1234440"/>
-          </a:xfrm>
-          <a:prstGeom prst="rect">
-            <a:avLst/>
-          </a:prstGeom>
-          <a:noFill/>
-          <a:ln/>
-        </p:spPr>
-        <p:txBody>
-          <a:bodyPr wrap="square" lIns="0" tIns="0" rIns="0" bIns="0" rtlCol="0" anchor="t"/>
-          <a:lstStyle/>
-          <a:p>
-            <a:pPr indent="0" marL="0">
-              <a:buNone/>
-            </a:pPr>
-            <a:r>
-              <a:rPr lang="en-US" sz="1250" dirty="0">
+            <a:off x="868680" y="2795960"/>
+            <a:ext cx="10454335" cy="2500000"/>
+          </a:xfrm>
+          <a:prstGeom prst="rect">
+            <a:avLst/>
+          </a:prstGeom>
+          <a:noFill/>
+          <a:ln/>
+        </p:spPr>
+        <p:txBody>
+          <a:bodyPr wrap="square" lIns="0" tIns="0" rIns="0" bIns="0" rtlCol="0" anchor="ctr"/>
+          <a:lstStyle/>
+          <a:p>
+            <a:pPr indent="0" marL="0">
+              <a:buNone/>
+            </a:pPr>
+            <a:r>
+              <a:rPr lang="en-US" sz="2800" dirty="0">
                 <a:solidFill>
                   <a:srgbClr val="26262F"/>
                 </a:solidFill>
@@ -16996,7 +17032,7 @@
               </a:rPr>
               <a:t>React tracks each hook call by the ORDER it was called in during a render, not by name. If a hook is skipped conditionally, the order shifts, and React can attach the wrong stored value to the wrong hook next render. Calling hooks unconditionally keeps that order stable every time.</a:t>
             </a:r>
-            <a:endParaRPr lang="en-US" sz="1250" dirty="0"/>
+            <a:endParaRPr lang="en-US" sz="2800" dirty="0"/>
           </a:p>
         </p:txBody>
       </p:sp>
@@ -17629,9 +17665,13 @@
             </a:avLst>
           </a:prstGeom>
           <a:solidFill>
-            <a:srgbClr val="1E1E4C"/>
+            <a:srgbClr val="F7F8F9"/>
           </a:solidFill>
-          <a:ln/>
+          <a:ln w="9525">
+            <a:solidFill>
+              <a:srgbClr val="D0D5DD"/>
+            </a:solidFill>
+          </a:ln>
         </p:spPr>
         <p:txBody>
           <a:bodyPr/>
@@ -17668,7 +17708,7 @@
             <a:r>
               <a:rPr lang="en-US" sz="1300" dirty="0">
                 <a:solidFill>
-                  <a:srgbClr val="C9D3F5"/>
+                  <a:srgbClr val="1F2429"/>
                 </a:solidFill>
                 <a:latin typeface="Courier New" pitchFamily="34" charset="0"/>
                 <a:ea typeface="Courier New" pitchFamily="34" charset="-122"/>
@@ -17688,7 +17728,7 @@
             <a:r>
               <a:rPr lang="en-US" sz="1300" dirty="0">
                 <a:solidFill>
-                  <a:srgbClr val="C9D3F5"/>
+                  <a:srgbClr val="1F2429"/>
                 </a:solidFill>
                 <a:latin typeface="Courier New" pitchFamily="34" charset="0"/>
                 <a:ea typeface="Courier New" pitchFamily="34" charset="-122"/>
@@ -17708,7 +17748,7 @@
             <a:r>
               <a:rPr lang="en-US" sz="1300" dirty="0">
                 <a:solidFill>
-                  <a:srgbClr val="C9D3F5"/>
+                  <a:srgbClr val="1F2429"/>
                 </a:solidFill>
                 <a:latin typeface="Courier New" pitchFamily="34" charset="0"/>
                 <a:ea typeface="Courier New" pitchFamily="34" charset="-122"/>
@@ -17728,7 +17768,7 @@
             <a:r>
               <a:rPr lang="en-US" sz="1300" dirty="0">
                 <a:solidFill>
-                  <a:srgbClr val="C9D3F5"/>
+                  <a:srgbClr val="1F2429"/>
                 </a:solidFill>
                 <a:latin typeface="Courier New" pitchFamily="34" charset="0"/>
                 <a:ea typeface="Courier New" pitchFamily="34" charset="-122"/>
@@ -17748,7 +17788,7 @@
             <a:r>
               <a:rPr lang="en-US" sz="1300" dirty="0">
                 <a:solidFill>
-                  <a:srgbClr val="C9D3F5"/>
+                  <a:srgbClr val="1F2429"/>
                 </a:solidFill>
                 <a:latin typeface="Courier New" pitchFamily="34" charset="0"/>
                 <a:ea typeface="Courier New" pitchFamily="34" charset="-122"/>
@@ -17768,7 +17808,7 @@
             <a:r>
               <a:rPr lang="en-US" sz="1300" dirty="0">
                 <a:solidFill>
-                  <a:srgbClr val="C9D3F5"/>
+                  <a:srgbClr val="1F2429"/>
                 </a:solidFill>
                 <a:latin typeface="Courier New" pitchFamily="34" charset="0"/>
                 <a:ea typeface="Courier New" pitchFamily="34" charset="-122"/>
@@ -17788,7 +17828,7 @@
             <a:r>
               <a:rPr lang="en-US" sz="1300" dirty="0">
                 <a:solidFill>
-                  <a:srgbClr val="C9D3F5"/>
+                  <a:srgbClr val="1F2429"/>
                 </a:solidFill>
                 <a:latin typeface="Courier New" pitchFamily="34" charset="0"/>
                 <a:ea typeface="Courier New" pitchFamily="34" charset="-122"/>
@@ -17808,7 +17848,7 @@
             <a:r>
               <a:rPr lang="en-US" sz="1300" dirty="0">
                 <a:solidFill>
-                  <a:srgbClr val="C9D3F5"/>
+                  <a:srgbClr val="1F2429"/>
                 </a:solidFill>
                 <a:latin typeface="Courier New" pitchFamily="34" charset="0"/>
                 <a:ea typeface="Courier New" pitchFamily="34" charset="-122"/>
@@ -17828,7 +17868,7 @@
             <a:r>
               <a:rPr lang="en-US" sz="1300" dirty="0">
                 <a:solidFill>
-                  <a:srgbClr val="C9D3F5"/>
+                  <a:srgbClr val="1F2429"/>
                 </a:solidFill>
                 <a:latin typeface="Courier New" pitchFamily="34" charset="0"/>
                 <a:ea typeface="Courier New" pitchFamily="34" charset="-122"/>
@@ -17848,7 +17888,7 @@
             <a:r>
               <a:rPr lang="en-US" sz="1300" dirty="0">
                 <a:solidFill>
-                  <a:srgbClr val="C9D3F5"/>
+                  <a:srgbClr val="1F2429"/>
                 </a:solidFill>
                 <a:latin typeface="Courier New" pitchFamily="34" charset="0"/>
                 <a:ea typeface="Courier New" pitchFamily="34" charset="-122"/>
@@ -17868,7 +17908,7 @@
             <a:r>
               <a:rPr lang="en-US" sz="1300" dirty="0">
                 <a:solidFill>
-                  <a:srgbClr val="C9D3F5"/>
+                  <a:srgbClr val="1F2429"/>
                 </a:solidFill>
                 <a:latin typeface="Courier New" pitchFamily="34" charset="0"/>
                 <a:ea typeface="Courier New" pitchFamily="34" charset="-122"/>
@@ -17888,7 +17928,7 @@
             <a:r>
               <a:rPr lang="en-US" sz="1300" dirty="0">
                 <a:solidFill>
-                  <a:srgbClr val="C9D3F5"/>
+                  <a:srgbClr val="1F2429"/>
                 </a:solidFill>
                 <a:latin typeface="Courier New" pitchFamily="34" charset="0"/>
                 <a:ea typeface="Courier New" pitchFamily="34" charset="-122"/>
@@ -17908,7 +17948,7 @@
             <a:r>
               <a:rPr lang="en-US" sz="1300" dirty="0">
                 <a:solidFill>
-                  <a:srgbClr val="C9D3F5"/>
+                  <a:srgbClr val="1F2429"/>
                 </a:solidFill>
                 <a:latin typeface="Courier New" pitchFamily="34" charset="0"/>
                 <a:ea typeface="Courier New" pitchFamily="34" charset="-122"/>
@@ -17928,7 +17968,7 @@
             <a:r>
               <a:rPr lang="en-US" sz="1300" dirty="0">
                 <a:solidFill>
-                  <a:srgbClr val="C9D3F5"/>
+                  <a:srgbClr val="1F2429"/>
                 </a:solidFill>
                 <a:latin typeface="Courier New" pitchFamily="34" charset="0"/>
                 <a:ea typeface="Courier New" pitchFamily="34" charset="-122"/>
@@ -18164,7 +18204,7 @@
         <p:spPr>
           <a:xfrm>
             <a:off x="640080" y="1965960"/>
-            <a:ext cx="10911535" cy="1737360"/>
+            <a:ext cx="10911535" cy="3657600"/>
           </a:xfrm>
           <a:prstGeom prst="roundRect">
             <a:avLst>
@@ -18195,7 +18235,7 @@
         <p:spPr>
           <a:xfrm>
             <a:off x="868680" y="2103120"/>
-            <a:ext cx="10454335" cy="274320"/>
+            <a:ext cx="10454335" cy="400000"/>
           </a:xfrm>
           <a:prstGeom prst="rect">
             <a:avLst/>
@@ -18211,7 +18251,7 @@
               <a:buNone/>
             </a:pPr>
             <a:r>
-              <a:rPr lang="en-US" sz="1000" b="1" spc="200" kern="0" dirty="0">
+              <a:rPr lang="en-US" sz="1800" b="1" spc="200" kern="0" dirty="0">
                 <a:solidFill>
                   <a:srgbClr val="8A3A12"/>
                 </a:solidFill>
@@ -18221,7 +18261,7 @@
               </a:rPr>
               <a:t>WARNING</a:t>
             </a:r>
-            <a:endParaRPr lang="en-US" sz="1000" dirty="0"/>
+            <a:endParaRPr lang="en-US" sz="1800" dirty="0"/>
           </a:p>
         </p:txBody>
       </p:sp>
@@ -18233,24 +18273,24 @@
         </p:nvSpPr>
         <p:spPr>
           <a:xfrm>
-            <a:off x="868680" y="2404872"/>
-            <a:ext cx="10454335" cy="1143000"/>
-          </a:xfrm>
-          <a:prstGeom prst="rect">
-            <a:avLst/>
-          </a:prstGeom>
-          <a:noFill/>
-          <a:ln/>
-        </p:spPr>
-        <p:txBody>
-          <a:bodyPr wrap="square" lIns="0" tIns="0" rIns="0" bIns="0" rtlCol="0" anchor="t"/>
-          <a:lstStyle/>
-          <a:p>
-            <a:pPr indent="0" marL="0">
-              <a:buNone/>
-            </a:pPr>
-            <a:r>
-              <a:rPr lang="en-US" sz="1250" dirty="0">
+            <a:off x="868680" y="2795960"/>
+            <a:ext cx="10454335" cy="2500000"/>
+          </a:xfrm>
+          <a:prstGeom prst="rect">
+            <a:avLst/>
+          </a:prstGeom>
+          <a:noFill/>
+          <a:ln/>
+        </p:spPr>
+        <p:txBody>
+          <a:bodyPr wrap="square" lIns="0" tIns="0" rIns="0" bIns="0" rtlCol="0" anchor="ctr"/>
+          <a:lstStyle/>
+          <a:p>
+            <a:pPr indent="0" marL="0">
+              <a:buNone/>
+            </a:pPr>
+            <a:r>
+              <a:rPr lang="en-US" sz="2800" dirty="0">
                 <a:solidFill>
                   <a:srgbClr val="26262F"/>
                 </a:solidFill>
@@ -18260,7 +18300,7 @@
               </a:rPr>
               <a:t>Writing count++ or items.push(newItem) will NOT trigger a re-render — React only detects a change when you call the setter with a new value. Always create a new value instead of mutating the old one.</a:t>
             </a:r>
-            <a:endParaRPr lang="en-US" sz="1250" dirty="0"/>
+            <a:endParaRPr lang="en-US" sz="2800" dirty="0"/>
           </a:p>
         </p:txBody>
       </p:sp>
@@ -18434,9 +18474,13 @@
             </a:avLst>
           </a:prstGeom>
           <a:solidFill>
-            <a:srgbClr val="1E1E4C"/>
+            <a:srgbClr val="F7F8F9"/>
           </a:solidFill>
-          <a:ln/>
+          <a:ln w="9525">
+            <a:solidFill>
+              <a:srgbClr val="D0D5DD"/>
+            </a:solidFill>
+          </a:ln>
         </p:spPr>
         <p:txBody>
           <a:bodyPr/>
@@ -18473,7 +18517,7 @@
             <a:r>
               <a:rPr lang="en-US" sz="1400" dirty="0">
                 <a:solidFill>
-                  <a:srgbClr val="C9D3F5"/>
+                  <a:srgbClr val="1F2429"/>
                 </a:solidFill>
                 <a:latin typeface="Courier New" pitchFamily="34" charset="0"/>
                 <a:ea typeface="Courier New" pitchFamily="34" charset="-122"/>
@@ -18493,7 +18537,7 @@
             <a:r>
               <a:rPr lang="en-US" sz="1400" dirty="0">
                 <a:solidFill>
-                  <a:srgbClr val="C9D3F5"/>
+                  <a:srgbClr val="1F2429"/>
                 </a:solidFill>
                 <a:latin typeface="Courier New" pitchFamily="34" charset="0"/>
                 <a:ea typeface="Courier New" pitchFamily="34" charset="-122"/>
@@ -18513,7 +18557,7 @@
             <a:r>
               <a:rPr lang="en-US" sz="1400" dirty="0">
                 <a:solidFill>
-                  <a:srgbClr val="C9D3F5"/>
+                  <a:srgbClr val="1F2429"/>
                 </a:solidFill>
                 <a:latin typeface="Courier New" pitchFamily="34" charset="0"/>
                 <a:ea typeface="Courier New" pitchFamily="34" charset="-122"/>
@@ -18533,7 +18577,7 @@
             <a:r>
               <a:rPr lang="en-US" sz="1400" dirty="0">
                 <a:solidFill>
-                  <a:srgbClr val="C9D3F5"/>
+                  <a:srgbClr val="1F2429"/>
                 </a:solidFill>
                 <a:latin typeface="Courier New" pitchFamily="34" charset="0"/>
                 <a:ea typeface="Courier New" pitchFamily="34" charset="-122"/>
@@ -18553,7 +18597,7 @@
             <a:r>
               <a:rPr lang="en-US" sz="1400" dirty="0">
                 <a:solidFill>
-                  <a:srgbClr val="C9D3F5"/>
+                  <a:srgbClr val="1F2429"/>
                 </a:solidFill>
                 <a:latin typeface="Courier New" pitchFamily="34" charset="0"/>
                 <a:ea typeface="Courier New" pitchFamily="34" charset="-122"/>
@@ -18582,7 +18626,7 @@
             <a:r>
               <a:rPr lang="en-US" sz="1400" dirty="0">
                 <a:solidFill>
-                  <a:srgbClr val="C9D3F5"/>
+                  <a:srgbClr val="1F2429"/>
                 </a:solidFill>
                 <a:latin typeface="Courier New" pitchFamily="34" charset="0"/>
                 <a:ea typeface="Courier New" pitchFamily="34" charset="-122"/>
@@ -18602,7 +18646,7 @@
             <a:r>
               <a:rPr lang="en-US" sz="1400" dirty="0">
                 <a:solidFill>
-                  <a:srgbClr val="C9D3F5"/>
+                  <a:srgbClr val="1F2429"/>
                 </a:solidFill>
                 <a:latin typeface="Courier New" pitchFamily="34" charset="0"/>
                 <a:ea typeface="Courier New" pitchFamily="34" charset="-122"/>
@@ -18622,7 +18666,7 @@
             <a:r>
               <a:rPr lang="en-US" sz="1400" dirty="0">
                 <a:solidFill>
-                  <a:srgbClr val="C9D3F5"/>
+                  <a:srgbClr val="1F2429"/>
                 </a:solidFill>
                 <a:latin typeface="Courier New" pitchFamily="34" charset="0"/>
                 <a:ea typeface="Courier New" pitchFamily="34" charset="-122"/>
@@ -18642,7 +18686,7 @@
             <a:r>
               <a:rPr lang="en-US" sz="1400" dirty="0">
                 <a:solidFill>
-                  <a:srgbClr val="C9D3F5"/>
+                  <a:srgbClr val="1F2429"/>
                 </a:solidFill>
                 <a:latin typeface="Courier New" pitchFamily="34" charset="0"/>
                 <a:ea typeface="Courier New" pitchFamily="34" charset="-122"/>
